--- a/docs/Review_II_Presentation.pptx
+++ b/docs/Review_II_Presentation.pptx
@@ -22,10 +22,9 @@
     <p:sldId id="270" r:id="rId16"/>
     <p:sldId id="271" r:id="rId17"/>
     <p:sldId id="272" r:id="rId18"/>
-    <p:sldId id="273" r:id="rId19"/>
   </p:sldIdLst>
   <p:notesMasterIdLst>
-    <p:notesMasterId r:id="rId20"/>
+    <p:notesMasterId r:id="rId19"/>
   </p:notesMasterIdLst>
   <p:sldSz cx="12192000" cy="6858000"/>
   <p:notesSz cx="6858000" cy="12192000"/>
@@ -124,14 +123,14 @@
   <p:extLst>
     <p:ext uri="{521415D9-36F7-43E2-AB2F-B90AF26B5E84}">
       <p14:sectionLst xmlns:p14="http://schemas.microsoft.com/office/powerpoint/2010/main">
-        <p14:section name="Introduction" id="{c586bae7-b9cf-5a62-5306-d977c44d4f28}">
+        <p14:section name="Introduction" id="{c59ca6ee-5a9a-79d1-34dd-149f3ce0572d}">
           <p14:sldIdLst>
             <p14:sldId id="256"/>
             <p14:sldId id="257"/>
             <p14:sldId id="258"/>
           </p14:sldIdLst>
         </p14:section>
-        <p14:section name="Method" id="{436154f7-4644-0cd5-b058-6a79274d7602}">
+        <p14:section name="Method" id="{69d83007-283a-f5f8-e701-08f7f035c8d6}">
           <p14:sldIdLst>
             <p14:sldId id="259"/>
             <p14:sldId id="260"/>
@@ -141,25 +140,24 @@
             <p14:sldId id="264"/>
           </p14:sldIdLst>
         </p14:section>
-        <p14:section name="Evaluation" id="{68beb2ca-932d-484a-c265-c121bef43d8c}">
+        <p14:section name="Evaluation" id="{db9cfb19-acfd-b247-a2ae-aad7119bc36c}">
           <p14:sldIdLst>
             <p14:sldId id="265"/>
           </p14:sldIdLst>
         </p14:section>
-        <p14:section name="Results" id="{d06ff10e-3ff5-d6ef-f561-5563c5367b4b}">
+        <p14:section name="Results" id="{5e52fb8d-2226-9c73-48ab-0658cd700104}">
           <p14:sldIdLst>
             <p14:sldId id="266"/>
             <p14:sldId id="267"/>
             <p14:sldId id="268"/>
             <p14:sldId id="269"/>
             <p14:sldId id="270"/>
-            <p14:sldId id="271"/>
           </p14:sldIdLst>
         </p14:section>
-        <p14:section name="Demo and close" id="{2ff58f5b-243e-2b24-d471-daa183149f38}">
+        <p14:section name="Demo and close" id="{b8cd84da-137d-17e8-0a78-1a066b0c58f0}">
           <p14:sldIdLst>
+            <p14:sldId id="271"/>
             <p14:sldId id="272"/>
-            <p14:sldId id="273"/>
           </p14:sldIdLst>
         </p14:section>
       </p14:sectionLst>
@@ -920,6 +918,17 @@
             <c:bubble3D val="0"/>
             <c:spPr>
               <a:solidFill>
+                <a:srgbClr val="F59E0B"/>
+              </a:solidFill>
+              <a:effectLst/>
+            </c:spPr>
+          </c:dPt>
+          <c:dPt>
+            <c:idx val="4"/>
+            <c:invertIfNegative val="0"/>
+            <c:bubble3D val="0"/>
+            <c:spPr>
+              <a:solidFill>
                 <a:srgbClr val="0E7490"/>
               </a:solidFill>
               <a:effectLst/>
@@ -927,9 +936,9 @@
           </c:dPt>
           <c:cat>
             <c:multiLvlStrRef>
-              <c:f>Sheet1!$A$2:$A$5</c:f>
+              <c:f>Sheet1!$A$2:$A$6</c:f>
               <c:multiLvlStrCache>
-                <c:ptCount val="4"/>
+                <c:ptCount val="5"/>
                 <c:lvl>
                   <c:pt idx="0">
                     <c:v>UDCP</c:v>
@@ -941,6 +950,9 @@
                     <c:v>CLAHE-only</c:v>
                   </c:pt>
                   <c:pt idx="3">
+                    <c:v>WB + CLAHE</c:v>
+                  </c:pt>
+                  <c:pt idx="4">
                     <c:v>Proposed hybrid</c:v>
                   </c:pt>
                 </c:lvl>
@@ -949,10 +961,10 @@
           </c:cat>
           <c:val>
             <c:numRef>
-              <c:f>Sheet1!$B$2:$B$5</c:f>
+              <c:f>Sheet1!$B$2:$B$6</c:f>
               <c:numCache>
                 <c:formatCode>General</c:formatCode>
-                <c:ptCount val="4"/>
+                <c:ptCount val="5"/>
                 <c:pt idx="0">
                   <c:v>12.98822578790581</c:v>
                 </c:pt>
@@ -963,6 +975,9 @@
                   <c:v>18.317963796471883</c:v>
                 </c:pt>
                 <c:pt idx="3">
+                  <c:v>17.93219488642242</c:v>
+                </c:pt>
+                <c:pt idx="4">
                   <c:v>18.2732843208807</c:v>
                 </c:pt>
               </c:numCache>
@@ -1240,6 +1255,17 @@
             <c:bubble3D val="0"/>
             <c:spPr>
               <a:solidFill>
+                <a:srgbClr val="F59E0B"/>
+              </a:solidFill>
+              <a:effectLst/>
+            </c:spPr>
+          </c:dPt>
+          <c:dPt>
+            <c:idx val="4"/>
+            <c:invertIfNegative val="0"/>
+            <c:bubble3D val="0"/>
+            <c:spPr>
+              <a:solidFill>
                 <a:srgbClr val="0E7490"/>
               </a:solidFill>
               <a:effectLst/>
@@ -1247,9 +1273,9 @@
           </c:dPt>
           <c:cat>
             <c:multiLvlStrRef>
-              <c:f>Sheet1!$A$2:$A$5</c:f>
+              <c:f>Sheet1!$A$2:$A$6</c:f>
               <c:multiLvlStrCache>
-                <c:ptCount val="4"/>
+                <c:ptCount val="5"/>
                 <c:lvl>
                   <c:pt idx="0">
                     <c:v>UDCP</c:v>
@@ -1261,6 +1287,9 @@
                     <c:v>CLAHE-only</c:v>
                   </c:pt>
                   <c:pt idx="3">
+                    <c:v>WB + CLAHE</c:v>
+                  </c:pt>
+                  <c:pt idx="4">
                     <c:v>Proposed hybrid</c:v>
                   </c:pt>
                 </c:lvl>
@@ -1269,10 +1298,10 @@
           </c:cat>
           <c:val>
             <c:numRef>
-              <c:f>Sheet1!$B$2:$B$5</c:f>
+              <c:f>Sheet1!$B$2:$B$6</c:f>
               <c:numCache>
                 <c:formatCode>General</c:formatCode>
-                <c:ptCount val="4"/>
+                <c:ptCount val="5"/>
                 <c:pt idx="0">
                   <c:v>0.6559660852179874</c:v>
                 </c:pt>
@@ -1283,6 +1312,9 @@
                   <c:v>0.8397517317713133</c:v>
                 </c:pt>
                 <c:pt idx="3">
+                  <c:v>0.8380072334360491</c:v>
+                </c:pt>
+                <c:pt idx="4">
                   <c:v>0.8714819823811786</c:v>
                 </c:pt>
               </c:numCache>
@@ -1561,7 +1593,7 @@
             <c:bubble3D val="0"/>
             <c:spPr>
               <a:solidFill>
-                <a:srgbClr val="F97316"/>
+                <a:srgbClr val="64748B"/>
               </a:solidFill>
               <a:effectLst/>
             </c:spPr>
@@ -1582,7 +1614,7 @@
                     <c:v>Module 5 · per-type routing</c:v>
                   </c:pt>
                   <c:pt idx="3">
-                    <c:v>Original Module 7 search</c:v>
+                    <c:v>Modules 5 + 7 together</c:v>
                   </c:pt>
                 </c:lvl>
               </c:multiLvlStrCache>
@@ -1604,7 +1636,7 @@
                   <c:v>0.0169644114909495</c:v>
                 </c:pt>
                 <c:pt idx="3">
-                  <c:v>-0.7724125012186993</c:v>
+                  <c:v>0.182824926003839</c:v>
                 </c:pt>
               </c:numCache>
             </c:numRef>
@@ -1685,361 +1717,7 @@
         <c:axId val="2094734552"/>
         <c:scaling>
           <c:orientation val="minMax"/>
-        </c:scaling>
-        <c:delete val="0"/>
-        <c:axPos val="b"/>
-        <c:majorGridlines>
-          <c:spPr>
-            <a:ln w="6350" cap="flat">
-              <a:solidFill>
-                <a:srgbClr val="E2E8F0"/>
-              </a:solidFill>
-              <a:prstDash val="solid"/>
-              <a:round/>
-            </a:ln>
-          </c:spPr>
-        </c:majorGridlines>
-        <c:numFmt formatCode="General" sourceLinked="0"/>
-        <c:majorTickMark val="out"/>
-        <c:minorTickMark val="none"/>
-        <c:tickLblPos val="low"/>
-        <c:spPr>
-          <a:ln w="12700" cap="flat">
-            <a:solidFill>
-              <a:srgbClr val="888888"/>
-            </a:solidFill>
-            <a:prstDash val="solid"/>
-            <a:round/>
-          </a:ln>
-        </c:spPr>
-        <c:txPr>
-          <a:bodyPr/>
-          <a:lstStyle/>
-          <a:p>
-            <a:pPr>
-              <a:defRPr sz="1100" b="0" i="0" u="none" strike="noStrike">
-                <a:solidFill>
-                  <a:srgbClr val="64748B"/>
-                </a:solidFill>
-                <a:latin typeface="+mn-lt"/>
-              </a:defRPr>
-            </a:pPr>
-            <a:endParaRPr lang="en-US"/>
-          </a:p>
-        </c:txPr>
-        <c:crossAx val="2094734554"/>
-        <c:crosses val="autoZero"/>
-        <c:crossBetween val="between"/>
-      </c:valAx>
-      <c:spPr>
-        <a:noFill/>
-        <a:ln>
-          <a:noFill/>
-        </a:ln>
-        <a:effectLst/>
-      </c:spPr>
-    </c:plotArea>
-    <c:plotVisOnly val="1"/>
-    <c:dispBlanksAs val="span"/>
-  </c:chart>
-  <c:spPr>
-    <a:noFill/>
-    <a:ln>
-      <a:noFill/>
-    </a:ln>
-    <a:effectLst/>
-  </c:spPr>
-  <c:externalData r:id="rId1">
-    <c:autoUpdate val="0"/>
-  </c:externalData>
-</c:chartSpace>
-</file>
-
-<file path=ppt/charts/chart6.xml><?xml version="1.0" encoding="utf-8"?>
-<c:chartSpace xmlns:c="http://schemas.openxmlformats.org/drawingml/2006/chart" xmlns:a="http://schemas.openxmlformats.org/drawingml/2006/main" xmlns:r="http://schemas.openxmlformats.org/officeDocument/2006/relationships">
-  <c:date1904 val="0"/>
-  <c:roundedCorners val="1"/>
-  <c:chart>
-    <c:title>
-      <c:tx>
-        <c:rich>
-          <a:bodyPr/>
-          <a:lstStyle/>
-          <a:p>
-            <a:pPr>
-              <a:defRPr sz="1400" b="0" i="0" u="none" strike="noStrike">
-                <a:solidFill>
-                  <a:srgbClr val="0F172A"/>
-                </a:solidFill>
-                <a:latin typeface="+mn-lt"/>
-              </a:defRPr>
-            </a:pPr>
-            <a:r>
-              <a:rPr sz="1400" b="0" i="0" u="none" strike="noStrike">
-                <a:solidFill>
-                  <a:srgbClr val="0F172A"/>
-                </a:solidFill>
-                <a:latin typeface="+mn-lt"/>
-              </a:rPr>
-              <a:t>PSNR (dB) when α is chosen by each score · calibration split</a:t>
-            </a:r>
-          </a:p>
-        </c:rich>
-      </c:tx>
-      <c:layout/>
-      <c:overlay val="0"/>
-    </c:title>
-    <c:autoTitleDeleted val="0"/>
-    <c:plotArea>
-      <c:layout/>
-      <c:barChart>
-        <c:barDir val="bar"/>
-        <c:grouping val="clustered"/>
-        <c:varyColors val="0"/>
-        <c:ser>
-          <c:idx val="0"/>
-          <c:order val="0"/>
-          <c:tx>
-            <c:strRef>
-              <c:f>Sheet1!$B$1</c:f>
-              <c:strCache>
-                <c:ptCount val="1"/>
-                <c:pt idx="0">
-                  <c:v>PSNR</c:v>
-                </c:pt>
-              </c:strCache>
-            </c:strRef>
-          </c:tx>
-          <c:spPr>
-            <a:solidFill>
-              <a:srgbClr val="64748B"/>
-            </a:solidFill>
-            <a:effectLst/>
-          </c:spPr>
-          <c:invertIfNegative val="0"/>
-          <c:dLbls>
-            <c:numFmt formatCode="0.00" sourceLinked="0"/>
-            <c:txPr>
-              <a:bodyPr/>
-              <a:lstStyle/>
-              <a:p>
-                <a:pPr>
-                  <a:defRPr b="0" i="0" strike="noStrike" sz="1200" u="none">
-                    <a:solidFill>
-                      <a:srgbClr val="0F172A"/>
-                    </a:solidFill>
-                    <a:latin typeface="+mn-lt"/>
-                  </a:defRPr>
-                </a:pPr>
-              </a:p>
-            </c:txPr>
-            <c:showLegendKey val="0"/>
-            <c:showVal val="1"/>
-            <c:showCatName val="0"/>
-            <c:showSerName val="0"/>
-            <c:showPercent val="0"/>
-            <c:showBubbleSize val="0"/>
-            <c:showLeaderLines val="0"/>
-          </c:dLbls>
-          <c:dPt>
-            <c:idx val="0"/>
-            <c:invertIfNegative val="0"/>
-            <c:bubble3D val="0"/>
-            <c:spPr>
-              <a:solidFill>
-                <a:srgbClr val="64748B"/>
-              </a:solidFill>
-              <a:effectLst/>
-            </c:spPr>
-          </c:dPt>
-          <c:dPt>
-            <c:idx val="1"/>
-            <c:invertIfNegative val="0"/>
-            <c:bubble3D val="0"/>
-            <c:spPr>
-              <a:solidFill>
-                <a:srgbClr val="F97316"/>
-              </a:solidFill>
-              <a:effectLst/>
-            </c:spPr>
-          </c:dPt>
-          <c:dPt>
-            <c:idx val="2"/>
-            <c:invertIfNegative val="0"/>
-            <c:bubble3D val="0"/>
-            <c:spPr>
-              <a:solidFill>
-                <a:srgbClr val="F97316"/>
-              </a:solidFill>
-              <a:effectLst/>
-            </c:spPr>
-          </c:dPt>
-          <c:dPt>
-            <c:idx val="3"/>
-            <c:invertIfNegative val="0"/>
-            <c:bubble3D val="0"/>
-            <c:spPr>
-              <a:solidFill>
-                <a:srgbClr val="F97316"/>
-              </a:solidFill>
-              <a:effectLst/>
-            </c:spPr>
-          </c:dPt>
-          <c:dPt>
-            <c:idx val="4"/>
-            <c:invertIfNegative val="0"/>
-            <c:bubble3D val="0"/>
-            <c:spPr>
-              <a:solidFill>
-                <a:srgbClr val="F97316"/>
-              </a:solidFill>
-              <a:effectLst/>
-            </c:spPr>
-          </c:dPt>
-          <c:dPt>
-            <c:idx val="5"/>
-            <c:invertIfNegative val="0"/>
-            <c:bubble3D val="0"/>
-            <c:spPr>
-              <a:solidFill>
-                <a:srgbClr val="0E7490"/>
-              </a:solidFill>
-              <a:effectLst/>
-            </c:spPr>
-          </c:dPt>
-          <c:cat>
-            <c:multiLvlStrRef>
-              <c:f>Sheet1!$A$2:$A$7</c:f>
-              <c:multiLvlStrCache>
-                <c:ptCount val="6"/>
-                <c:lvl>
-                  <c:pt idx="0">
-                    <c:v>Fixed α = 0.5</c:v>
-                  </c:pt>
-                  <c:pt idx="1">
-                    <c:v>Max UCIQE+UIQM</c:v>
-                  </c:pt>
-                  <c:pt idx="2">
-                    <c:v>Max UCIQE</c:v>
-                  </c:pt>
-                  <c:pt idx="3">
-                    <c:v>Max UIQM</c:v>
-                  </c:pt>
-                  <c:pt idx="4">
-                    <c:v>Max entropy</c:v>
-                  </c:pt>
-                  <c:pt idx="5">
-                    <c:v>Oracle (reference)</c:v>
-                  </c:pt>
-                </c:lvl>
-              </c:multiLvlStrCache>
-            </c:multiLvlStrRef>
-          </c:cat>
-          <c:val>
-            <c:numRef>
-              <c:f>Sheet1!$B$2:$B$7</c:f>
-              <c:numCache>
-                <c:formatCode>General</c:formatCode>
-                <c:ptCount val="6"/>
-                <c:pt idx="0">
-                  <c:v>17.94141498810848</c:v>
-                </c:pt>
-                <c:pt idx="1">
-                  <c:v>17.27733615070428</c:v>
-                </c:pt>
-                <c:pt idx="2">
-                  <c:v>16.85402570880714</c:v>
-                </c:pt>
-                <c:pt idx="3">
-                  <c:v>17.77434688214725</c:v>
-                </c:pt>
-                <c:pt idx="4">
-                  <c:v>17.804727450034214</c:v>
-                </c:pt>
-                <c:pt idx="5">
-                  <c:v>18.580680254076537</c:v>
-                </c:pt>
-              </c:numCache>
-            </c:numRef>
-          </c:val>
-        </c:ser>
-        <c:dLbls>
-          <c:numFmt formatCode="0.00" sourceLinked="0"/>
-          <c:txPr>
-            <a:bodyPr/>
-            <a:lstStyle/>
-            <a:p>
-              <a:pPr>
-                <a:defRPr b="0" i="0" strike="noStrike" sz="1200" u="none">
-                  <a:solidFill>
-                    <a:srgbClr val="0F172A"/>
-                  </a:solidFill>
-                  <a:latin typeface="+mn-lt"/>
-                </a:defRPr>
-              </a:pPr>
-            </a:p>
-          </c:txPr>
-          <c:showLegendKey val="0"/>
-          <c:showVal val="1"/>
-          <c:showCatName val="0"/>
-          <c:showSerName val="0"/>
-          <c:showPercent val="0"/>
-          <c:showBubbleSize val="0"/>
-          <c:showLeaderLines val="0"/>
-        </c:dLbls>
-        <c:gapWidth val="150"/>
-        <c:overlap val="0"/>
-        <c:axId val="2094734554"/>
-        <c:axId val="2094734552"/>
-        <c:axId val="2094734556"/>
-      </c:barChart>
-      <c:catAx>
-        <c:axId val="2094734554"/>
-        <c:scaling>
-          <c:orientation val="maxMin"/>
-        </c:scaling>
-        <c:delete val="0"/>
-        <c:axPos val="l"/>
-        <c:numFmt formatCode="General" sourceLinked="1"/>
-        <c:majorTickMark val="out"/>
-        <c:minorTickMark val="none"/>
-        <c:tickLblPos val="nextTo"/>
-        <c:spPr>
-          <a:ln w="12700" cap="flat">
-            <a:solidFill>
-              <a:srgbClr val="888888"/>
-            </a:solidFill>
-            <a:prstDash val="solid"/>
-            <a:round/>
-          </a:ln>
-        </c:spPr>
-        <c:txPr>
-          <a:bodyPr/>
-          <a:lstStyle/>
-          <a:p>
-            <a:pPr>
-              <a:defRPr sz="1200" b="0" i="0" u="none" strike="noStrike">
-                <a:solidFill>
-                  <a:srgbClr val="64748B"/>
-                </a:solidFill>
-                <a:latin typeface="+mn-lt"/>
-              </a:defRPr>
-            </a:pPr>
-            <a:endParaRPr lang="en-US"/>
-          </a:p>
-        </c:txPr>
-        <c:crossAx val="2094734552"/>
-        <c:crosses val="autoZero"/>
-        <c:auto val="1"/>
-        <c:lblAlgn val="ctr"/>
-        <c:noMultiLvlLbl val="1"/>
-      </c:catAx>
-      <c:valAx>
-        <c:axId val="2094734552"/>
-        <c:scaling>
-          <c:orientation val="minMax"/>
-          <c:max val="19.5"/>
-          <c:min val="16"/>
+          <c:min val="0"/>
         </c:scaling>
         <c:delete val="0"/>
         <c:axPos val="b"/>
@@ -2782,7 +2460,7 @@
               <a:t>[Manav · ~1 min]
 This breaks the result down by component, all on held-out images.
 Red-channel compensation: +0.52 dB. Module 7's predicted alpha: +0.16 dB. Per-type routing: +0.02 dB.
-The orange bar is the original version of Module 7, which picked alpha by maximising image-quality scores: −0.77 dB against the predictor. That leads to our main finding.</a:t>
+Together, Modules 5 and 7 add +0.18 dB on top of an equally tuned pipeline.</a:t>
             </a:r>
             <a:endParaRPr lang="en-US" dirty="0"/>
           </a:p>
@@ -2870,10 +2548,11 @@
           <a:p>
             <a:r>
               <a:rPr lang="en-US" dirty="0"/>
-              <a:t>[Manav · ~1.5 min]
-Our first Module 7 did what many papers do: choose the fusion weight that maximises the image's own UCIQE and UIQM — no reference needed.
-We found it backfires. These scores reward extreme blends, so the search pushed alpha to 0 or 1 for 87% of images. Every score-maximising selector on this chart is worse than simply fixing alpha at 0.5, while the oracle shows what's possible.
-On held-out images the search costs 0.77 dB against our predictor. Conventional HE tells the same story: it tops UCIQE while losing on fidelity. The lesson: validate a no-reference score against references before you optimise it.</a:t>
+              <a:t>[Manav · ~1 min]
+Two held-out examples, chosen as typical for their water type — close to the median gain over both CLAHE-only and HE — not cherry-picked.
+Top, green turbid water: compare each method's colours with the reference on the right. PSNR 21.59 dB for ours vs 20.91 for CLAHE-only and 18.82 for HE.
+Bottom, hazy bright water: PSNR 15.52 vs 15.52 (CLAHE-only) and 14.29 (HE); SSIM 0.797 vs 0.771 and 0.746.
+Individual images vary — HE wins on some — which is why every claim is based on the 622-image averages.</a:t>
             </a:r>
             <a:endParaRPr lang="en-US" dirty="0"/>
           </a:p>
@@ -2962,10 +2641,10 @@
             <a:r>
               <a:rPr lang="en-US" dirty="0"/>
               <a:t>[Manav · ~1 min]
-Two held-out examples, chosen as typical for their water type — close to the median gain over both CLAHE-only and HE — not cherry-picked.
-Top, green turbid water: compare each method's colours with the reference on the right. PSNR 21.59 dB for ours vs 20.91 for CLAHE-only and 18.82 for HE.
-Bottom, hazy bright water: PSNR 15.52 vs 15.52 (CLAHE-only) and 14.29 (HE); SSIM 0.797 vs 0.771 and 0.746.
-Individual images vary — HE wins on some — which is why every claim is based on the 622-image averages.</a:t>
+We want to be upfront about limitations.
+First, PSNR: we are level with CLAHE-only overall (−0.04 dB, not a meaningful difference), and CLAHE-only still wins on 45% of test images — like this one, where our restoration drifts from the reference's colours.
+Second, routing: there is about 1.45 dB of per-image headroom, and four discrete water types capture only +0.02 dB of it.
+Third, calibration chose the mildest values we searched (WB cap 1.5, CLAHE × 0.6 and ω 0.5), so the references prefer gentler processing than our grid allowed.</a:t>
             </a:r>
             <a:endParaRPr lang="en-US" dirty="0"/>
           </a:p>
@@ -3054,10 +2733,9 @@
             <a:r>
               <a:rPr lang="en-US" dirty="0"/>
               <a:t>[Manav · ~1 min]
-We want to be upfront about limitations.
-First, PSNR: we are level with CLAHE-only overall (−0.04 dB, not a meaningful difference), and CLAHE-only still wins on 45% of test images — like this one, where our restoration drifts from the reference's colours.
-Second, routing: there is about 1.45 dB of per-image headroom, and four discrete water types capture only +0.02 dB of it.
-Third, calibration chose the mildest values we searched (WB cap 1.5, CLAHE × 0.6 and ω 0.5), so the references prefer gentler processing than our grid allowed.</a:t>
+Before trusting any number, we audited the pipeline and the evaluation and found silent bugs — nothing crashed, the numbers were just wrong.
+The most important: UCIQE was computed on OpenCV's 8-bit Lab encoding, which made every grey pixel look highly coloured; and a 1,000-point ORB cap made raw and restored keypoint counts tie. We also stopped tuning on the test images, added multiple-comparison correction, and found an inverted gamma convention — after fixing it we re-ran the whole calibration and evaluation.
+Every fix is documented in the results report with before-and-after evidence.</a:t>
             </a:r>
             <a:endParaRPr lang="en-US" dirty="0"/>
           </a:p>
@@ -3145,10 +2823,9 @@
           <a:p>
             <a:r>
               <a:rPr lang="en-US" dirty="0"/>
-              <a:t>[Manav · ~1 min]
-Before trusting any number, we audited the pipeline and the evaluation and found silent bugs — nothing crashed, the numbers were just wrong.
-The most important: UCIQE was computed on OpenCV's 8-bit Lab encoding, which made every grey pixel look highly coloured; and the original optimiser's objective was almost entirely one term. We also stopped tuning on the test images, added multiple-comparison correction, and found an inverted gamma convention — after fixing it we re-ran the whole calibration and evaluation.
-Every fix is documented in the results report with before-and-after evidence.</a:t>
+              <a:t>[Manav · ~4 min]
+[Switch to the browser — the app should already be running and on 773_img_.]
+Follow the six steps on the slide; keep it to about four minutes. If the app fails, stay on this deck and use slides 5, 13 and 14 as the visual walkthrough.</a:t>
             </a:r>
             <a:endParaRPr lang="en-US" dirty="0"/>
           </a:p>
@@ -3236,9 +2913,9 @@
           <a:p>
             <a:r>
               <a:rPr lang="en-US" dirty="0"/>
-              <a:t>[Manav · ~4 min]
-[Switch to the browser — the app should already be running and on 773_img_.]
-Follow the six steps on the slide; keep it to about four minutes. If the app fails, stay on this deck and use slides 5, 13 and 14 as the visual walkthrough.</a:t>
+              <a:t>[Kopal · ~1 min]
+To close, three takeaways. [Read the three lines.]
+Thank you — we are happy to take questions. [See docs/PRESENTATION_GUIDE.md for prepared answers.]</a:t>
             </a:r>
             <a:endParaRPr lang="en-US" dirty="0"/>
           </a:p>
@@ -3262,96 +2939,6 @@
             <a:fld id="{F7021451-1387-4CA6-816F-3879F97B5CBC}" type="slidenum">
               <a:rPr lang="en-US"/>
               <a:t>17</a:t>
-            </a:fld>
-            <a:endParaRPr lang="en-US"/>
-          </a:p>
-        </p:txBody>
-      </p:sp>
-    </p:spTree>
-    <p:extLst>
-      <p:ext uri="{BB962C8B-B14F-4D97-AF65-F5344CB8AC3E}">
-        <p14:creationId xmlns:p14="http://schemas.microsoft.com/office/powerpoint/2010/main" val="1024086991"/>
-      </p:ext>
-    </p:extLst>
-  </p:cSld>
-  <p:clrMapOvr>
-    <a:masterClrMapping/>
-  </p:clrMapOvr>
-</p:notes>
-</file>
-
-<file path=ppt/notesSlides/notesSlide18.xml><?xml version="1.0" encoding="utf-8"?>
-<p:notes xmlns:a="http://schemas.openxmlformats.org/drawingml/2006/main" xmlns:r="http://schemas.openxmlformats.org/officeDocument/2006/relationships" xmlns:p="http://schemas.openxmlformats.org/presentationml/2006/main">
-  <p:cSld>
-    <p:spTree>
-      <p:nvGrpSpPr>
-        <p:cNvPr id="1" name=""/>
-        <p:cNvGrpSpPr/>
-        <p:nvPr/>
-      </p:nvGrpSpPr>
-      <p:grpSpPr>
-        <a:xfrm>
-          <a:off x="0" y="0"/>
-          <a:ext cx="0" cy="0"/>
-          <a:chOff x="0" y="0"/>
-          <a:chExt cx="0" cy="0"/>
-        </a:xfrm>
-      </p:grpSpPr>
-      <p:sp>
-        <p:nvSpPr>
-          <p:cNvPr id="2" name="Slide Image Placeholder 1"/>
-          <p:cNvSpPr>
-            <a:spLocks noGrp="1" noRot="1" noChangeAspect="1"/>
-          </p:cNvSpPr>
-          <p:nvPr>
-            <p:ph type="sldImg"/>
-          </p:nvPr>
-        </p:nvSpPr>
-        <p:spPr/>
-      </p:sp>
-      <p:sp>
-        <p:nvSpPr>
-          <p:cNvPr id="3" name="Notes Placeholder 2"/>
-          <p:cNvSpPr>
-            <a:spLocks noGrp="1"/>
-          </p:cNvSpPr>
-          <p:nvPr>
-            <p:ph type="body" idx="1"/>
-          </p:nvPr>
-        </p:nvSpPr>
-        <p:spPr/>
-        <p:txBody>
-          <a:bodyPr/>
-          <a:lstStyle/>
-          <a:p>
-            <a:r>
-              <a:rPr lang="en-US" dirty="0"/>
-              <a:t>[Kopal · ~1 min]
-To close, three takeaways. [Read the three lines.]
-Thank you — we are happy to take questions. [See docs/PRESENTATION_GUIDE.md for prepared answers.]</a:t>
-            </a:r>
-            <a:endParaRPr lang="en-US" dirty="0"/>
-          </a:p>
-        </p:txBody>
-      </p:sp>
-      <p:sp>
-        <p:nvSpPr>
-          <p:cNvPr id="4" name="Slide Number Placeholder 3"/>
-          <p:cNvSpPr>
-            <a:spLocks noGrp="1"/>
-          </p:cNvSpPr>
-          <p:nvPr>
-            <p:ph type="sldNum" sz="quarter" idx="10"/>
-          </p:nvPr>
-        </p:nvSpPr>
-        <p:spPr/>
-        <p:txBody>
-          <a:bodyPr/>
-          <a:lstStyle/>
-          <a:p>
-            <a:fld id="{F7021451-1387-4CA6-816F-3879F97B5CBC}" type="slidenum">
-              <a:rPr lang="en-US"/>
-              <a:t>18</a:t>
             </a:fld>
             <a:endParaRPr lang="en-US"/>
           </a:p>
@@ -3511,8 +3098,7 @@
               <a:rPr lang="en-US" dirty="0"/>
               <a:t>[Kopal · ~1 min]
 Our goal: restore underwater images using only classical image processing — no deep learning — and make every stage adapt to the water type.
-We contribute three novel modules. Module 5 classifies the water and routes parameters, including how much red light to restore. Module 7 predicts, per image, how to blend two complementary processing streams. Module 9 checks that restoration actually helps computer-vision tasks.
-We also report a finding: the popular no-reference scores UCIQE and UIQM mislead when you optimise for them.</a:t>
+We contribute three novel modules. Module 5 classifies the water and routes parameters, including how much red light to restore. Module 7 predicts, per image, how to blend two complementary processing streams. Module 9 checks that restoration actually helps computer-vision tasks.</a:t>
             </a:r>
             <a:endParaRPr lang="en-US" dirty="0"/>
           </a:p>
@@ -6000,7 +5586,7 @@
                   <a:schemeClr val="tx2"/>
                 </a:solidFill>
               </a:rPr>
-              <a:t>Results: best SSIM, clearly ahead of HE and UDCP</a:t>
+              <a:t>Results: best SSIM, clearly ahead of UDCP, HE and WB+CLAHE</a:t>
             </a:r>
             <a:endParaRPr lang="en-US" sz="3200" dirty="0"/>
           </a:p>
@@ -6014,7 +5600,7 @@
         </p:nvGraphicFramePr>
         <p:xfrm>
           <a:off x="548640" y="1325880"/>
-          <a:ext cx="5364328" cy="3840480"/>
+          <a:ext cx="5364328" cy="3657600"/>
         </p:xfrm>
         <a:graphic xmlns:a="http://schemas.openxmlformats.org/drawingml/2006/main">
           <a:graphicData uri="http://schemas.openxmlformats.org/drawingml/2006/chart">
@@ -6030,7 +5616,7 @@
         </p:nvGraphicFramePr>
         <p:xfrm>
           <a:off x="6278728" y="1325880"/>
-          <a:ext cx="5364328" cy="3840480"/>
+          <a:ext cx="5364328" cy="3657600"/>
         </p:xfrm>
         <a:graphic xmlns:a="http://schemas.openxmlformats.org/drawingml/2006/main">
           <a:graphicData uri="http://schemas.openxmlformats.org/drawingml/2006/chart">
@@ -6046,8 +5632,8 @@
         </p:nvSpPr>
         <p:spPr>
           <a:xfrm>
-            <a:off x="548640" y="5349240"/>
-            <a:ext cx="11094415" cy="365760"/>
+            <a:off x="548640" y="5120640"/>
+            <a:ext cx="11094415" cy="594360"/>
           </a:xfrm>
           <a:prstGeom prst="rect">
             <a:avLst/>
@@ -6102,6 +5688,28 @@
                 </a:solidFill>
               </a:rPr>
               <a:t>+1.91 dB, +0.091 SSIM   ·   </a:t>
+            </a:r>
+            <a:pPr indent="0" marL="0">
+              <a:buNone/>
+            </a:pPr>
+            <a:r>
+              <a:rPr lang="en-US" sz="1400" b="1" dirty="0">
+                <a:solidFill>
+                  <a:schemeClr val="tx1"/>
+                </a:solidFill>
+              </a:rPr>
+              <a:t>vs WB+CLAHE: </a:t>
+            </a:r>
+            <a:pPr indent="0" marL="0">
+              <a:buNone/>
+            </a:pPr>
+            <a:r>
+              <a:rPr lang="en-US" sz="1400" dirty="0">
+                <a:solidFill>
+                  <a:schemeClr val="tx1"/>
+                </a:solidFill>
+              </a:rPr>
+              <a:t>+0.34 dB, +0.033 SSIM   ·   </a:t>
             </a:r>
             <a:pPr indent="0" marL="0">
               <a:buNone/>
@@ -6137,7 +5745,7 @@
         </p:nvSpPr>
         <p:spPr>
           <a:xfrm>
-            <a:off x="548640" y="5760720"/>
+            <a:off x="548640" y="5852160"/>
             <a:ext cx="11094415" cy="320040"/>
           </a:xfrm>
           <a:prstGeom prst="rect">
@@ -6676,10 +6284,10 @@
             <a:r>
               <a:rPr lang="en-US" sz="2000" b="1" dirty="0">
                 <a:solidFill>
-                  <a:schemeClr val="accent2"/>
-                </a:solidFill>
-              </a:rPr>
-              <a:t>−0.024</a:t>
+                  <a:schemeClr val="accent1"/>
+                </a:solidFill>
+              </a:rPr>
+              <a:t>+0.004</a:t>
             </a:r>
             <a:endParaRPr lang="en-US" sz="2000" dirty="0"/>
           </a:p>
@@ -6715,7 +6323,7 @@
                   <a:schemeClr val="tx1"/>
                 </a:solidFill>
               </a:rPr>
-              <a:t>Original Module 7 search</a:t>
+              <a:t>Modules 5 + 7 together</a:t>
             </a:r>
             <a:endParaRPr lang="en-US" sz="1300" dirty="0"/>
           </a:p>
@@ -6751,7 +6359,7 @@
                   <a:schemeClr val="accent5"/>
                 </a:solidFill>
               </a:rPr>
-              <a:t>Red compensation measured on the no-module baseline; modules vs. the equally tuned control; the original search vs. the predictor.</a:t>
+              <a:t>Red compensation measured on the no-module baseline; Modules 5 and 7 against the equally tuned control.</a:t>
             </a:r>
             <a:endParaRPr lang="en-US" sz="1200" dirty="0"/>
           </a:p>
@@ -6859,38 +6467,22 @@
                   <a:schemeClr val="tx2"/>
                 </a:solidFill>
               </a:rPr>
-              <a:t>Finding: no-reference scores mislead the optimiser</a:t>
+              <a:t>Visual comparison on held-out images</a:t>
             </a:r>
             <a:endParaRPr lang="en-US" sz="3200" dirty="0"/>
           </a:p>
         </p:txBody>
       </p:sp>
-      <p:graphicFrame>
-        <p:nvGraphicFramePr>
-          <p:cNvPr id="3" name="selector chart" descr=""/>
-          <p:cNvGraphicFramePr/>
-          <p:nvPr/>
-        </p:nvGraphicFramePr>
-        <p:xfrm>
-          <a:off x="548640" y="1325880"/>
-          <a:ext cx="6766560" cy="4754880"/>
-        </p:xfrm>
-        <a:graphic xmlns:a="http://schemas.openxmlformats.org/drawingml/2006/main">
-          <a:graphicData uri="http://schemas.openxmlformats.org/drawingml/2006/chart">
-            <c:chart xmlns:c="http://schemas.openxmlformats.org/drawingml/2006/chart" r:id="rId1"/>
-          </a:graphicData>
-        </a:graphic>
-      </p:graphicFrame>
-      <p:sp>
-        <p:nvSpPr>
-          <p:cNvPr id="4" name="Text 1"/>
+      <p:sp>
+        <p:nvSpPr>
+          <p:cNvPr id="3" name="Text 1"/>
           <p:cNvSpPr txBox="1"/>
           <p:nvPr/>
         </p:nvSpPr>
         <p:spPr>
           <a:xfrm>
-            <a:off x="7772400" y="1280160"/>
-            <a:ext cx="3870655" cy="914400"/>
+            <a:off x="548640" y="1280160"/>
+            <a:ext cx="2072579" cy="320040"/>
           </a:xfrm>
           <a:prstGeom prst="rect">
             <a:avLst/>
@@ -6902,31 +6494,501 @@
           <a:bodyPr wrap="square" lIns="0" tIns="0" rIns="0" bIns="0" rtlCol="0" anchor="t"/>
           <a:lstStyle/>
           <a:p>
+            <a:pPr algn="ctr" indent="0" marL="0">
+              <a:buNone/>
+            </a:pPr>
+            <a:r>
+              <a:rPr lang="en-US" sz="1300" b="1" dirty="0">
+                <a:solidFill>
+                  <a:schemeClr val="tx2"/>
+                </a:solidFill>
+              </a:rPr>
+              <a:t>Raw</a:t>
+            </a:r>
+            <a:endParaRPr lang="en-US" sz="1300" dirty="0"/>
+          </a:p>
+        </p:txBody>
+      </p:sp>
+      <p:sp>
+        <p:nvSpPr>
+          <p:cNvPr id="4" name="Text 2"/>
+          <p:cNvSpPr txBox="1"/>
+          <p:nvPr/>
+        </p:nvSpPr>
+        <p:spPr>
+          <a:xfrm>
+            <a:off x="2804099" y="1280160"/>
+            <a:ext cx="2072579" cy="320040"/>
+          </a:xfrm>
+          <a:prstGeom prst="rect">
+            <a:avLst/>
+          </a:prstGeom>
+          <a:noFill/>
+          <a:ln/>
+        </p:spPr>
+        <p:txBody>
+          <a:bodyPr wrap="square" lIns="0" tIns="0" rIns="0" bIns="0" rtlCol="0" anchor="t"/>
+          <a:lstStyle/>
+          <a:p>
+            <a:pPr algn="ctr" indent="0" marL="0">
+              <a:buNone/>
+            </a:pPr>
+            <a:r>
+              <a:rPr lang="en-US" sz="1300" b="1" dirty="0">
+                <a:solidFill>
+                  <a:schemeClr val="tx2"/>
+                </a:solidFill>
+              </a:rPr>
+              <a:t>Conventional HE</a:t>
+            </a:r>
+            <a:endParaRPr lang="en-US" sz="1300" dirty="0"/>
+          </a:p>
+        </p:txBody>
+      </p:sp>
+      <p:sp>
+        <p:nvSpPr>
+          <p:cNvPr id="5" name="Text 3"/>
+          <p:cNvSpPr txBox="1"/>
+          <p:nvPr/>
+        </p:nvSpPr>
+        <p:spPr>
+          <a:xfrm>
+            <a:off x="5059558" y="1280160"/>
+            <a:ext cx="2072579" cy="320040"/>
+          </a:xfrm>
+          <a:prstGeom prst="rect">
+            <a:avLst/>
+          </a:prstGeom>
+          <a:noFill/>
+          <a:ln/>
+        </p:spPr>
+        <p:txBody>
+          <a:bodyPr wrap="square" lIns="0" tIns="0" rIns="0" bIns="0" rtlCol="0" anchor="t"/>
+          <a:lstStyle/>
+          <a:p>
+            <a:pPr algn="ctr" indent="0" marL="0">
+              <a:buNone/>
+            </a:pPr>
+            <a:r>
+              <a:rPr lang="en-US" sz="1300" b="1" dirty="0">
+                <a:solidFill>
+                  <a:schemeClr val="tx2"/>
+                </a:solidFill>
+              </a:rPr>
+              <a:t>CLAHE-only</a:t>
+            </a:r>
+            <a:endParaRPr lang="en-US" sz="1300" dirty="0"/>
+          </a:p>
+        </p:txBody>
+      </p:sp>
+      <p:sp>
+        <p:nvSpPr>
+          <p:cNvPr id="6" name="Text 4"/>
+          <p:cNvSpPr txBox="1"/>
+          <p:nvPr/>
+        </p:nvSpPr>
+        <p:spPr>
+          <a:xfrm>
+            <a:off x="7315017" y="1280160"/>
+            <a:ext cx="2072579" cy="320040"/>
+          </a:xfrm>
+          <a:prstGeom prst="rect">
+            <a:avLst/>
+          </a:prstGeom>
+          <a:noFill/>
+          <a:ln/>
+        </p:spPr>
+        <p:txBody>
+          <a:bodyPr wrap="square" lIns="0" tIns="0" rIns="0" bIns="0" rtlCol="0" anchor="t"/>
+          <a:lstStyle/>
+          <a:p>
+            <a:pPr algn="ctr" indent="0" marL="0">
+              <a:buNone/>
+            </a:pPr>
+            <a:r>
+              <a:rPr lang="en-US" sz="1300" b="1" dirty="0">
+                <a:solidFill>
+                  <a:schemeClr val="accent1"/>
+                </a:solidFill>
+              </a:rPr>
+              <a:t>Proposed hybrid</a:t>
+            </a:r>
+            <a:endParaRPr lang="en-US" sz="1300" dirty="0"/>
+          </a:p>
+        </p:txBody>
+      </p:sp>
+      <p:sp>
+        <p:nvSpPr>
+          <p:cNvPr id="7" name="Text 5"/>
+          <p:cNvSpPr txBox="1"/>
+          <p:nvPr/>
+        </p:nvSpPr>
+        <p:spPr>
+          <a:xfrm>
+            <a:off x="9570476" y="1280160"/>
+            <a:ext cx="2072579" cy="320040"/>
+          </a:xfrm>
+          <a:prstGeom prst="rect">
+            <a:avLst/>
+          </a:prstGeom>
+          <a:noFill/>
+          <a:ln/>
+        </p:spPr>
+        <p:txBody>
+          <a:bodyPr wrap="square" lIns="0" tIns="0" rIns="0" bIns="0" rtlCol="0" anchor="t"/>
+          <a:lstStyle/>
+          <a:p>
+            <a:pPr algn="ctr" indent="0" marL="0">
+              <a:buNone/>
+            </a:pPr>
+            <a:r>
+              <a:rPr lang="en-US" sz="1300" b="1" dirty="0">
+                <a:solidFill>
+                  <a:schemeClr val="tx2"/>
+                </a:solidFill>
+              </a:rPr>
+              <a:t>UIEB reference</a:t>
+            </a:r>
+            <a:endParaRPr lang="en-US" sz="1300" dirty="0"/>
+          </a:p>
+        </p:txBody>
+      </p:sp>
+      <p:pic>
+        <p:nvPicPr>
+          <p:cNvPr id="8" name="773_img_ raw" descr="scripts/presentation/build/img/773_img__raw.jpg">    </p:cNvPr>
+          <p:cNvPicPr>
+            <a:picLocks noChangeAspect="1"/>
+          </p:cNvPicPr>
+          <p:nvPr/>
+        </p:nvPicPr>
+        <p:blipFill>
+          <a:blip r:embed="rId1"/>
+          <a:stretch>
+            <a:fillRect/>
+          </a:stretch>
+        </p:blipFill>
+        <p:spPr>
+          <a:xfrm>
+            <a:off x="548640" y="1691640"/>
+            <a:ext cx="2072579" cy="1450805"/>
+          </a:xfrm>
+          <a:prstGeom prst="rect">
+            <a:avLst/>
+          </a:prstGeom>
+        </p:spPr>
+      </p:pic>
+      <p:pic>
+        <p:nvPicPr>
+          <p:cNvPr id="9" name="773_img_ conventional_he" descr="scripts/presentation/build/img/773_img__conventional_he.jpg">    </p:cNvPr>
+          <p:cNvPicPr>
+            <a:picLocks noChangeAspect="1"/>
+          </p:cNvPicPr>
+          <p:nvPr/>
+        </p:nvPicPr>
+        <p:blipFill>
+          <a:blip r:embed="rId2"/>
+          <a:stretch>
+            <a:fillRect/>
+          </a:stretch>
+        </p:blipFill>
+        <p:spPr>
+          <a:xfrm>
+            <a:off x="2804099" y="1691640"/>
+            <a:ext cx="2072579" cy="1450805"/>
+          </a:xfrm>
+          <a:prstGeom prst="rect">
+            <a:avLst/>
+          </a:prstGeom>
+        </p:spPr>
+      </p:pic>
+      <p:pic>
+        <p:nvPicPr>
+          <p:cNvPr id="10" name="773_img_ clahe_only" descr="scripts/presentation/build/img/773_img__clahe_only.jpg">    </p:cNvPr>
+          <p:cNvPicPr>
+            <a:picLocks noChangeAspect="1"/>
+          </p:cNvPicPr>
+          <p:nvPr/>
+        </p:nvPicPr>
+        <p:blipFill>
+          <a:blip r:embed="rId3"/>
+          <a:stretch>
+            <a:fillRect/>
+          </a:stretch>
+        </p:blipFill>
+        <p:spPr>
+          <a:xfrm>
+            <a:off x="5059558" y="1691640"/>
+            <a:ext cx="2072579" cy="1450805"/>
+          </a:xfrm>
+          <a:prstGeom prst="rect">
+            <a:avLst/>
+          </a:prstGeom>
+        </p:spPr>
+      </p:pic>
+      <p:sp>
+        <p:nvSpPr>
+          <p:cNvPr id="11" name="hybrid frame 773_img_"/>
+          <p:cNvSpPr/>
+          <p:nvPr/>
+        </p:nvSpPr>
+        <p:spPr>
+          <a:xfrm>
+            <a:off x="7278441" y="1655064"/>
+            <a:ext cx="2145731" cy="1523957"/>
+          </a:xfrm>
+          <a:prstGeom prst="rect">
+            <a:avLst/>
+          </a:prstGeom>
+          <a:solidFill>
+            <a:schemeClr val="accent1"/>
+          </a:solidFill>
+          <a:ln w="12700">
+            <a:solidFill>
+              <a:schemeClr val="accent1"/>
+            </a:solidFill>
+            <a:prstDash val="solid"/>
+          </a:ln>
+        </p:spPr>
+      </p:sp>
+      <p:pic>
+        <p:nvPicPr>
+          <p:cNvPr id="12" name="773_img_ proposed_hybrid" descr="scripts/presentation/build/img/773_img__proposed_hybrid.jpg">    </p:cNvPr>
+          <p:cNvPicPr>
+            <a:picLocks noChangeAspect="1"/>
+          </p:cNvPicPr>
+          <p:nvPr/>
+        </p:nvPicPr>
+        <p:blipFill>
+          <a:blip r:embed="rId4"/>
+          <a:stretch>
+            <a:fillRect/>
+          </a:stretch>
+        </p:blipFill>
+        <p:spPr>
+          <a:xfrm>
+            <a:off x="7315017" y="1691640"/>
+            <a:ext cx="2072579" cy="1450805"/>
+          </a:xfrm>
+          <a:prstGeom prst="rect">
+            <a:avLst/>
+          </a:prstGeom>
+        </p:spPr>
+      </p:pic>
+      <p:pic>
+        <p:nvPicPr>
+          <p:cNvPr id="13" name="773_img_ reference" descr="scripts/presentation/build/img/773_img__reference.jpg">    </p:cNvPr>
+          <p:cNvPicPr>
+            <a:picLocks noChangeAspect="1"/>
+          </p:cNvPicPr>
+          <p:nvPr/>
+        </p:nvPicPr>
+        <p:blipFill>
+          <a:blip r:embed="rId5"/>
+          <a:stretch>
+            <a:fillRect/>
+          </a:stretch>
+        </p:blipFill>
+        <p:spPr>
+          <a:xfrm>
+            <a:off x="9570476" y="1691640"/>
+            <a:ext cx="2072579" cy="1450805"/>
+          </a:xfrm>
+          <a:prstGeom prst="rect">
+            <a:avLst/>
+          </a:prstGeom>
+        </p:spPr>
+      </p:pic>
+      <p:sp>
+        <p:nvSpPr>
+          <p:cNvPr id="14" name="773_img_ scores"/>
+          <p:cNvSpPr txBox="1"/>
+          <p:nvPr/>
+        </p:nvSpPr>
+        <p:spPr>
+          <a:xfrm>
+            <a:off x="548640" y="3233885"/>
+            <a:ext cx="11094415" cy="292608"/>
+          </a:xfrm>
+          <a:prstGeom prst="rect">
+            <a:avLst/>
+          </a:prstGeom>
+          <a:noFill/>
+          <a:ln/>
+        </p:spPr>
+        <p:txBody>
+          <a:bodyPr wrap="square" lIns="0" tIns="0" rIns="0" bIns="0" rtlCol="0" anchor="t"/>
+          <a:lstStyle/>
+          <a:p>
             <a:pPr indent="0" marL="0">
               <a:buNone/>
             </a:pPr>
             <a:r>
-              <a:rPr lang="en-US" sz="6000" b="1" dirty="0">
-                <a:solidFill>
-                  <a:schemeClr val="accent2"/>
-                </a:solidFill>
-              </a:rPr>
-              <a:t>87%</a:t>
-            </a:r>
-            <a:endParaRPr lang="en-US" sz="6000" dirty="0"/>
-          </a:p>
-        </p:txBody>
-      </p:sp>
-      <p:sp>
-        <p:nvSpPr>
-          <p:cNvPr id="5" name="Text 2"/>
+              <a:rPr lang="en-US" sz="1200" dirty="0">
+                <a:solidFill>
+                  <a:schemeClr val="accent5"/>
+                </a:solidFill>
+              </a:rPr>
+              <a:t>green turbid · PSNR / SSIM — proposed 21.59 / 0.932, CLAHE-only 20.91 / 0.921, HE 18.82 / 0.884</a:t>
+            </a:r>
+            <a:endParaRPr lang="en-US" sz="1200" dirty="0"/>
+          </a:p>
+        </p:txBody>
+      </p:sp>
+      <p:pic>
+        <p:nvPicPr>
+          <p:cNvPr id="15" name="213_img_ raw" descr="scripts/presentation/build/img/213_img__raw.jpg">    </p:cNvPr>
+          <p:cNvPicPr>
+            <a:picLocks noChangeAspect="1"/>
+          </p:cNvPicPr>
+          <p:nvPr/>
+        </p:nvPicPr>
+        <p:blipFill>
+          <a:blip r:embed="rId6"/>
+          <a:stretch>
+            <a:fillRect/>
+          </a:stretch>
+        </p:blipFill>
+        <p:spPr>
+          <a:xfrm>
+            <a:off x="548640" y="3691085"/>
+            <a:ext cx="2072579" cy="1554434"/>
+          </a:xfrm>
+          <a:prstGeom prst="rect">
+            <a:avLst/>
+          </a:prstGeom>
+        </p:spPr>
+      </p:pic>
+      <p:pic>
+        <p:nvPicPr>
+          <p:cNvPr id="16" name="213_img_ conventional_he" descr="scripts/presentation/build/img/213_img__conventional_he.jpg">    </p:cNvPr>
+          <p:cNvPicPr>
+            <a:picLocks noChangeAspect="1"/>
+          </p:cNvPicPr>
+          <p:nvPr/>
+        </p:nvPicPr>
+        <p:blipFill>
+          <a:blip r:embed="rId7"/>
+          <a:stretch>
+            <a:fillRect/>
+          </a:stretch>
+        </p:blipFill>
+        <p:spPr>
+          <a:xfrm>
+            <a:off x="2804099" y="3691085"/>
+            <a:ext cx="2072579" cy="1554434"/>
+          </a:xfrm>
+          <a:prstGeom prst="rect">
+            <a:avLst/>
+          </a:prstGeom>
+        </p:spPr>
+      </p:pic>
+      <p:pic>
+        <p:nvPicPr>
+          <p:cNvPr id="17" name="213_img_ clahe_only" descr="scripts/presentation/build/img/213_img__clahe_only.jpg">    </p:cNvPr>
+          <p:cNvPicPr>
+            <a:picLocks noChangeAspect="1"/>
+          </p:cNvPicPr>
+          <p:nvPr/>
+        </p:nvPicPr>
+        <p:blipFill>
+          <a:blip r:embed="rId8"/>
+          <a:stretch>
+            <a:fillRect/>
+          </a:stretch>
+        </p:blipFill>
+        <p:spPr>
+          <a:xfrm>
+            <a:off x="5059558" y="3691085"/>
+            <a:ext cx="2072579" cy="1554434"/>
+          </a:xfrm>
+          <a:prstGeom prst="rect">
+            <a:avLst/>
+          </a:prstGeom>
+        </p:spPr>
+      </p:pic>
+      <p:sp>
+        <p:nvSpPr>
+          <p:cNvPr id="18" name="hybrid frame 213_img_"/>
+          <p:cNvSpPr/>
+          <p:nvPr/>
+        </p:nvSpPr>
+        <p:spPr>
+          <a:xfrm>
+            <a:off x="7278441" y="3654509"/>
+            <a:ext cx="2145731" cy="1627586"/>
+          </a:xfrm>
+          <a:prstGeom prst="rect">
+            <a:avLst/>
+          </a:prstGeom>
+          <a:solidFill>
+            <a:schemeClr val="accent1"/>
+          </a:solidFill>
+          <a:ln w="12700">
+            <a:solidFill>
+              <a:schemeClr val="accent1"/>
+            </a:solidFill>
+            <a:prstDash val="solid"/>
+          </a:ln>
+        </p:spPr>
+      </p:sp>
+      <p:pic>
+        <p:nvPicPr>
+          <p:cNvPr id="19" name="213_img_ proposed_hybrid" descr="scripts/presentation/build/img/213_img__proposed_hybrid.jpg">    </p:cNvPr>
+          <p:cNvPicPr>
+            <a:picLocks noChangeAspect="1"/>
+          </p:cNvPicPr>
+          <p:nvPr/>
+        </p:nvPicPr>
+        <p:blipFill>
+          <a:blip r:embed="rId9"/>
+          <a:stretch>
+            <a:fillRect/>
+          </a:stretch>
+        </p:blipFill>
+        <p:spPr>
+          <a:xfrm>
+            <a:off x="7315017" y="3691085"/>
+            <a:ext cx="2072579" cy="1554434"/>
+          </a:xfrm>
+          <a:prstGeom prst="rect">
+            <a:avLst/>
+          </a:prstGeom>
+        </p:spPr>
+      </p:pic>
+      <p:pic>
+        <p:nvPicPr>
+          <p:cNvPr id="20" name="213_img_ reference" descr="scripts/presentation/build/img/213_img__reference.jpg">    </p:cNvPr>
+          <p:cNvPicPr>
+            <a:picLocks noChangeAspect="1"/>
+          </p:cNvPicPr>
+          <p:nvPr/>
+        </p:nvPicPr>
+        <p:blipFill>
+          <a:blip r:embed="rId10"/>
+          <a:stretch>
+            <a:fillRect/>
+          </a:stretch>
+        </p:blipFill>
+        <p:spPr>
+          <a:xfrm>
+            <a:off x="9570476" y="3691085"/>
+            <a:ext cx="2072579" cy="1554434"/>
+          </a:xfrm>
+          <a:prstGeom prst="rect">
+            <a:avLst/>
+          </a:prstGeom>
+        </p:spPr>
+      </p:pic>
+      <p:sp>
+        <p:nvSpPr>
+          <p:cNvPr id="21" name="213_img_ scores"/>
           <p:cNvSpPr txBox="1"/>
           <p:nvPr/>
         </p:nvSpPr>
         <p:spPr>
           <a:xfrm>
-            <a:off x="7772400" y="2240280"/>
-            <a:ext cx="3870655" cy="822960"/>
+            <a:off x="548640" y="5336960"/>
+            <a:ext cx="11094415" cy="292608"/>
           </a:xfrm>
           <a:prstGeom prst="rect">
             <a:avLst/>
@@ -6942,122 +7004,14 @@
               <a:buNone/>
             </a:pPr>
             <a:r>
-              <a:rPr lang="en-US" sz="1400" dirty="0">
-                <a:solidFill>
-                  <a:schemeClr val="tx1"/>
-                </a:solidFill>
-              </a:rPr>
-              <a:t>of images pushed to α = 0 or 1 by maximising UCIQE+UIQM: the scores reward extreme blends</a:t>
-            </a:r>
-            <a:endParaRPr lang="en-US" sz="1400" dirty="0"/>
-          </a:p>
-        </p:txBody>
-      </p:sp>
-      <p:sp>
-        <p:nvSpPr>
-          <p:cNvPr id="6" name="Text 3"/>
-          <p:cNvSpPr txBox="1"/>
-          <p:nvPr/>
-        </p:nvSpPr>
-        <p:spPr>
-          <a:xfrm>
-            <a:off x="7772400" y="3246120"/>
-            <a:ext cx="3870655" cy="914400"/>
-          </a:xfrm>
-          <a:prstGeom prst="rect">
-            <a:avLst/>
-          </a:prstGeom>
-          <a:noFill/>
-          <a:ln/>
-        </p:spPr>
-        <p:txBody>
-          <a:bodyPr wrap="square" lIns="0" tIns="0" rIns="0" bIns="0" rtlCol="0" anchor="t"/>
-          <a:lstStyle/>
-          <a:p>
-            <a:pPr indent="0" marL="0">
-              <a:buNone/>
-            </a:pPr>
-            <a:r>
-              <a:rPr lang="en-US" sz="4800" b="1" dirty="0">
-                <a:solidFill>
-                  <a:schemeClr val="accent2"/>
-                </a:solidFill>
-              </a:rPr>
-              <a:t>−0.77 dB</a:t>
-            </a:r>
-            <a:endParaRPr lang="en-US" sz="4800" dirty="0"/>
-          </a:p>
-        </p:txBody>
-      </p:sp>
-      <p:sp>
-        <p:nvSpPr>
-          <p:cNvPr id="7" name="Text 4"/>
-          <p:cNvSpPr txBox="1"/>
-          <p:nvPr/>
-        </p:nvSpPr>
-        <p:spPr>
-          <a:xfrm>
-            <a:off x="7772400" y="4114800"/>
-            <a:ext cx="3870655" cy="548640"/>
-          </a:xfrm>
-          <a:prstGeom prst="rect">
-            <a:avLst/>
-          </a:prstGeom>
-          <a:noFill/>
-          <a:ln/>
-        </p:spPr>
-        <p:txBody>
-          <a:bodyPr wrap="square" lIns="0" tIns="0" rIns="0" bIns="0" rtlCol="0" anchor="t"/>
-          <a:lstStyle/>
-          <a:p>
-            <a:pPr indent="0" marL="0">
-              <a:buNone/>
-            </a:pPr>
-            <a:r>
-              <a:rPr lang="en-US" sz="1400" dirty="0">
-                <a:solidFill>
-                  <a:schemeClr val="tx1"/>
-                </a:solidFill>
-              </a:rPr>
-              <a:t>held-out PSNR of that search vs. our predictor (large effect)</a:t>
-            </a:r>
-            <a:endParaRPr lang="en-US" sz="1400" dirty="0"/>
-          </a:p>
-        </p:txBody>
-      </p:sp>
-      <p:sp>
-        <p:nvSpPr>
-          <p:cNvPr id="8" name="Text 5"/>
-          <p:cNvSpPr txBox="1"/>
-          <p:nvPr/>
-        </p:nvSpPr>
-        <p:spPr>
-          <a:xfrm>
-            <a:off x="7772400" y="4800600"/>
-            <a:ext cx="3870655" cy="1371600"/>
-          </a:xfrm>
-          <a:prstGeom prst="rect">
-            <a:avLst/>
-          </a:prstGeom>
-          <a:noFill/>
-          <a:ln/>
-        </p:spPr>
-        <p:txBody>
-          <a:bodyPr wrap="square" lIns="0" tIns="0" rIns="0" bIns="0" rtlCol="0" anchor="t"/>
-          <a:lstStyle/>
-          <a:p>
-            <a:pPr indent="0" marL="0">
-              <a:buNone/>
-            </a:pPr>
-            <a:r>
-              <a:rPr lang="en-US" sz="1300" i="1" dirty="0">
+              <a:rPr lang="en-US" sz="1200" dirty="0">
                 <a:solidFill>
                   <a:schemeClr val="accent5"/>
                 </a:solidFill>
               </a:rPr>
-              <a:t>Every score-maximising choice is worse than a fixed α. HE also tops UCIQE while losing on PSNR/SSIM. Lesson: check a quality score against references before optimising it.</a:t>
-            </a:r>
-            <a:endParaRPr lang="en-US" sz="1300" dirty="0"/>
+              <a:t>hazy bright · PSNR / SSIM — proposed 15.52 / 0.797, CLAHE-only 15.52 / 0.771, HE 14.29 / 0.746</a:t>
+            </a:r>
+            <a:endParaRPr lang="en-US" sz="1200" dirty="0"/>
           </a:p>
         </p:txBody>
       </p:sp>
@@ -7163,195 +7117,15 @@
                   <a:schemeClr val="tx2"/>
                 </a:solidFill>
               </a:rPr>
-              <a:t>Visual comparison on held-out images</a:t>
+              <a:t>Where it still falls short</a:t>
             </a:r>
             <a:endParaRPr lang="en-US" sz="3200" dirty="0"/>
-          </a:p>
-        </p:txBody>
-      </p:sp>
-      <p:sp>
-        <p:nvSpPr>
-          <p:cNvPr id="3" name="Text 1"/>
-          <p:cNvSpPr txBox="1"/>
-          <p:nvPr/>
-        </p:nvSpPr>
-        <p:spPr>
-          <a:xfrm>
-            <a:off x="548640" y="1280160"/>
-            <a:ext cx="2072579" cy="320040"/>
-          </a:xfrm>
-          <a:prstGeom prst="rect">
-            <a:avLst/>
-          </a:prstGeom>
-          <a:noFill/>
-          <a:ln/>
-        </p:spPr>
-        <p:txBody>
-          <a:bodyPr wrap="square" lIns="0" tIns="0" rIns="0" bIns="0" rtlCol="0" anchor="t"/>
-          <a:lstStyle/>
-          <a:p>
-            <a:pPr algn="ctr" indent="0" marL="0">
-              <a:buNone/>
-            </a:pPr>
-            <a:r>
-              <a:rPr lang="en-US" sz="1300" b="1" dirty="0">
-                <a:solidFill>
-                  <a:schemeClr val="tx2"/>
-                </a:solidFill>
-              </a:rPr>
-              <a:t>Raw</a:t>
-            </a:r>
-            <a:endParaRPr lang="en-US" sz="1300" dirty="0"/>
-          </a:p>
-        </p:txBody>
-      </p:sp>
-      <p:sp>
-        <p:nvSpPr>
-          <p:cNvPr id="4" name="Text 2"/>
-          <p:cNvSpPr txBox="1"/>
-          <p:nvPr/>
-        </p:nvSpPr>
-        <p:spPr>
-          <a:xfrm>
-            <a:off x="2804099" y="1280160"/>
-            <a:ext cx="2072579" cy="320040"/>
-          </a:xfrm>
-          <a:prstGeom prst="rect">
-            <a:avLst/>
-          </a:prstGeom>
-          <a:noFill/>
-          <a:ln/>
-        </p:spPr>
-        <p:txBody>
-          <a:bodyPr wrap="square" lIns="0" tIns="0" rIns="0" bIns="0" rtlCol="0" anchor="t"/>
-          <a:lstStyle/>
-          <a:p>
-            <a:pPr algn="ctr" indent="0" marL="0">
-              <a:buNone/>
-            </a:pPr>
-            <a:r>
-              <a:rPr lang="en-US" sz="1300" b="1" dirty="0">
-                <a:solidFill>
-                  <a:schemeClr val="tx2"/>
-                </a:solidFill>
-              </a:rPr>
-              <a:t>Conventional HE</a:t>
-            </a:r>
-            <a:endParaRPr lang="en-US" sz="1300" dirty="0"/>
-          </a:p>
-        </p:txBody>
-      </p:sp>
-      <p:sp>
-        <p:nvSpPr>
-          <p:cNvPr id="5" name="Text 3"/>
-          <p:cNvSpPr txBox="1"/>
-          <p:nvPr/>
-        </p:nvSpPr>
-        <p:spPr>
-          <a:xfrm>
-            <a:off x="5059558" y="1280160"/>
-            <a:ext cx="2072579" cy="320040"/>
-          </a:xfrm>
-          <a:prstGeom prst="rect">
-            <a:avLst/>
-          </a:prstGeom>
-          <a:noFill/>
-          <a:ln/>
-        </p:spPr>
-        <p:txBody>
-          <a:bodyPr wrap="square" lIns="0" tIns="0" rIns="0" bIns="0" rtlCol="0" anchor="t"/>
-          <a:lstStyle/>
-          <a:p>
-            <a:pPr algn="ctr" indent="0" marL="0">
-              <a:buNone/>
-            </a:pPr>
-            <a:r>
-              <a:rPr lang="en-US" sz="1300" b="1" dirty="0">
-                <a:solidFill>
-                  <a:schemeClr val="tx2"/>
-                </a:solidFill>
-              </a:rPr>
-              <a:t>CLAHE-only</a:t>
-            </a:r>
-            <a:endParaRPr lang="en-US" sz="1300" dirty="0"/>
-          </a:p>
-        </p:txBody>
-      </p:sp>
-      <p:sp>
-        <p:nvSpPr>
-          <p:cNvPr id="6" name="Text 4"/>
-          <p:cNvSpPr txBox="1"/>
-          <p:nvPr/>
-        </p:nvSpPr>
-        <p:spPr>
-          <a:xfrm>
-            <a:off x="7315017" y="1280160"/>
-            <a:ext cx="2072579" cy="320040"/>
-          </a:xfrm>
-          <a:prstGeom prst="rect">
-            <a:avLst/>
-          </a:prstGeom>
-          <a:noFill/>
-          <a:ln/>
-        </p:spPr>
-        <p:txBody>
-          <a:bodyPr wrap="square" lIns="0" tIns="0" rIns="0" bIns="0" rtlCol="0" anchor="t"/>
-          <a:lstStyle/>
-          <a:p>
-            <a:pPr algn="ctr" indent="0" marL="0">
-              <a:buNone/>
-            </a:pPr>
-            <a:r>
-              <a:rPr lang="en-US" sz="1300" b="1" dirty="0">
-                <a:solidFill>
-                  <a:schemeClr val="accent1"/>
-                </a:solidFill>
-              </a:rPr>
-              <a:t>Proposed hybrid</a:t>
-            </a:r>
-            <a:endParaRPr lang="en-US" sz="1300" dirty="0"/>
-          </a:p>
-        </p:txBody>
-      </p:sp>
-      <p:sp>
-        <p:nvSpPr>
-          <p:cNvPr id="7" name="Text 5"/>
-          <p:cNvSpPr txBox="1"/>
-          <p:nvPr/>
-        </p:nvSpPr>
-        <p:spPr>
-          <a:xfrm>
-            <a:off x="9570476" y="1280160"/>
-            <a:ext cx="2072579" cy="320040"/>
-          </a:xfrm>
-          <a:prstGeom prst="rect">
-            <a:avLst/>
-          </a:prstGeom>
-          <a:noFill/>
-          <a:ln/>
-        </p:spPr>
-        <p:txBody>
-          <a:bodyPr wrap="square" lIns="0" tIns="0" rIns="0" bIns="0" rtlCol="0" anchor="t"/>
-          <a:lstStyle/>
-          <a:p>
-            <a:pPr algn="ctr" indent="0" marL="0">
-              <a:buNone/>
-            </a:pPr>
-            <a:r>
-              <a:rPr lang="en-US" sz="1300" b="1" dirty="0">
-                <a:solidFill>
-                  <a:schemeClr val="tx2"/>
-                </a:solidFill>
-              </a:rPr>
-              <a:t>UIEB reference</a:t>
-            </a:r>
-            <a:endParaRPr lang="en-US" sz="1300" dirty="0"/>
           </a:p>
         </p:txBody>
       </p:sp>
       <p:pic>
         <p:nvPicPr>
-          <p:cNvPr id="8" name="773_img_ raw" descr="scripts/presentation/build/img/773_img__raw.jpg">    </p:cNvPr>
+          <p:cNvPr id="3" name="weak raw" descr="scripts/presentation/build/img/699_img__raw.jpg">    </p:cNvPr>
           <p:cNvPicPr>
             <a:picLocks noChangeAspect="1"/>
           </p:cNvPicPr>
@@ -7365,17 +7139,53 @@
         </p:blipFill>
         <p:spPr>
           <a:xfrm>
-            <a:off x="548640" y="1691640"/>
-            <a:ext cx="2072579" cy="1450805"/>
+            <a:off x="548640" y="1325880"/>
+            <a:ext cx="2602154" cy="1821508"/>
           </a:xfrm>
           <a:prstGeom prst="rect">
             <a:avLst/>
           </a:prstGeom>
         </p:spPr>
       </p:pic>
+      <p:sp>
+        <p:nvSpPr>
+          <p:cNvPr id="4" name="Text 1"/>
+          <p:cNvSpPr txBox="1"/>
+          <p:nvPr/>
+        </p:nvSpPr>
+        <p:spPr>
+          <a:xfrm>
+            <a:off x="548640" y="3220540"/>
+            <a:ext cx="2602154" cy="292608"/>
+          </a:xfrm>
+          <a:prstGeom prst="rect">
+            <a:avLst/>
+          </a:prstGeom>
+          <a:noFill/>
+          <a:ln/>
+        </p:spPr>
+        <p:txBody>
+          <a:bodyPr wrap="square" lIns="0" tIns="0" rIns="0" bIns="0" rtlCol="0" anchor="t"/>
+          <a:lstStyle/>
+          <a:p>
+            <a:pPr indent="0" marL="0">
+              <a:buNone/>
+            </a:pPr>
+            <a:r>
+              <a:rPr lang="en-US" sz="1200" b="1" dirty="0">
+                <a:solidFill>
+                  <a:schemeClr val="tx2"/>
+                </a:solidFill>
+              </a:rPr>
+              <a:t>Raw</a:t>
+            </a:r>
+            <a:endParaRPr lang="en-US" sz="1200" dirty="0"/>
+          </a:p>
+        </p:txBody>
+      </p:sp>
       <p:pic>
         <p:nvPicPr>
-          <p:cNvPr id="9" name="773_img_ conventional_he" descr="scripts/presentation/build/img/773_img__conventional_he.jpg">    </p:cNvPr>
+          <p:cNvPr id="5" name="weak clahe_only" descr="scripts/presentation/build/img/699_img__clahe_only.jpg">    </p:cNvPr>
           <p:cNvPicPr>
             <a:picLocks noChangeAspect="1"/>
           </p:cNvPicPr>
@@ -7389,17 +7199,53 @@
         </p:blipFill>
         <p:spPr>
           <a:xfrm>
-            <a:off x="2804099" y="1691640"/>
-            <a:ext cx="2072579" cy="1450805"/>
+            <a:off x="3379394" y="1325880"/>
+            <a:ext cx="2602154" cy="1821508"/>
           </a:xfrm>
           <a:prstGeom prst="rect">
             <a:avLst/>
           </a:prstGeom>
         </p:spPr>
       </p:pic>
+      <p:sp>
+        <p:nvSpPr>
+          <p:cNvPr id="6" name="Text 2"/>
+          <p:cNvSpPr txBox="1"/>
+          <p:nvPr/>
+        </p:nvSpPr>
+        <p:spPr>
+          <a:xfrm>
+            <a:off x="3379394" y="3220540"/>
+            <a:ext cx="2602154" cy="292608"/>
+          </a:xfrm>
+          <a:prstGeom prst="rect">
+            <a:avLst/>
+          </a:prstGeom>
+          <a:noFill/>
+          <a:ln/>
+        </p:spPr>
+        <p:txBody>
+          <a:bodyPr wrap="square" lIns="0" tIns="0" rIns="0" bIns="0" rtlCol="0" anchor="t"/>
+          <a:lstStyle/>
+          <a:p>
+            <a:pPr indent="0" marL="0">
+              <a:buNone/>
+            </a:pPr>
+            <a:r>
+              <a:rPr lang="en-US" sz="1200" b="1" dirty="0">
+                <a:solidFill>
+                  <a:schemeClr val="tx2"/>
+                </a:solidFill>
+              </a:rPr>
+              <a:t>CLAHE-only</a:t>
+            </a:r>
+            <a:endParaRPr lang="en-US" sz="1200" dirty="0"/>
+          </a:p>
+        </p:txBody>
+      </p:sp>
       <p:pic>
         <p:nvPicPr>
-          <p:cNvPr id="10" name="773_img_ clahe_only" descr="scripts/presentation/build/img/773_img__clahe_only.jpg">    </p:cNvPr>
+          <p:cNvPr id="7" name="weak proposed_hybrid" descr="scripts/presentation/build/img/699_img__proposed_hybrid.jpg">    </p:cNvPr>
           <p:cNvPicPr>
             <a:picLocks noChangeAspect="1"/>
           </p:cNvPicPr>
@@ -7413,8 +7259,8 @@
         </p:blipFill>
         <p:spPr>
           <a:xfrm>
-            <a:off x="5059558" y="1691640"/>
-            <a:ext cx="2072579" cy="1450805"/>
+            <a:off x="6210148" y="1325880"/>
+            <a:ext cx="2602154" cy="1821508"/>
           </a:xfrm>
           <a:prstGeom prst="rect">
             <a:avLst/>
@@ -7423,32 +7269,43 @@
       </p:pic>
       <p:sp>
         <p:nvSpPr>
-          <p:cNvPr id="11" name="hybrid frame 773_img_"/>
-          <p:cNvSpPr/>
-          <p:nvPr/>
-        </p:nvSpPr>
-        <p:spPr>
-          <a:xfrm>
-            <a:off x="7278441" y="1655064"/>
-            <a:ext cx="2145731" cy="1523957"/>
-          </a:xfrm>
-          <a:prstGeom prst="rect">
-            <a:avLst/>
-          </a:prstGeom>
-          <a:solidFill>
-            <a:schemeClr val="accent1"/>
-          </a:solidFill>
-          <a:ln w="12700">
-            <a:solidFill>
-              <a:schemeClr val="accent1"/>
-            </a:solidFill>
-            <a:prstDash val="solid"/>
-          </a:ln>
-        </p:spPr>
+          <p:cNvPr id="8" name="Text 3"/>
+          <p:cNvSpPr txBox="1"/>
+          <p:nvPr/>
+        </p:nvSpPr>
+        <p:spPr>
+          <a:xfrm>
+            <a:off x="6210148" y="3220540"/>
+            <a:ext cx="2602154" cy="292608"/>
+          </a:xfrm>
+          <a:prstGeom prst="rect">
+            <a:avLst/>
+          </a:prstGeom>
+          <a:noFill/>
+          <a:ln/>
+        </p:spPr>
+        <p:txBody>
+          <a:bodyPr wrap="square" lIns="0" tIns="0" rIns="0" bIns="0" rtlCol="0" anchor="t"/>
+          <a:lstStyle/>
+          <a:p>
+            <a:pPr indent="0" marL="0">
+              <a:buNone/>
+            </a:pPr>
+            <a:r>
+              <a:rPr lang="en-US" sz="1200" b="1" dirty="0">
+                <a:solidFill>
+                  <a:schemeClr val="tx2"/>
+                </a:solidFill>
+              </a:rPr>
+              <a:t>Proposed hybrid</a:t>
+            </a:r>
+            <a:endParaRPr lang="en-US" sz="1200" dirty="0"/>
+          </a:p>
+        </p:txBody>
       </p:sp>
       <p:pic>
         <p:nvPicPr>
-          <p:cNvPr id="12" name="773_img_ proposed_hybrid" descr="scripts/presentation/build/img/773_img__proposed_hybrid.jpg">    </p:cNvPr>
+          <p:cNvPr id="9" name="weak reference" descr="scripts/presentation/build/img/699_img__reference.jpg">    </p:cNvPr>
           <p:cNvPicPr>
             <a:picLocks noChangeAspect="1"/>
           </p:cNvPicPr>
@@ -7462,17 +7319,105 @@
         </p:blipFill>
         <p:spPr>
           <a:xfrm>
-            <a:off x="7315017" y="1691640"/>
-            <a:ext cx="2072579" cy="1450805"/>
+            <a:off x="9040901" y="1325880"/>
+            <a:ext cx="2602154" cy="1821508"/>
           </a:xfrm>
           <a:prstGeom prst="rect">
             <a:avLst/>
           </a:prstGeom>
         </p:spPr>
       </p:pic>
+      <p:sp>
+        <p:nvSpPr>
+          <p:cNvPr id="10" name="Text 4"/>
+          <p:cNvSpPr txBox="1"/>
+          <p:nvPr/>
+        </p:nvSpPr>
+        <p:spPr>
+          <a:xfrm>
+            <a:off x="9040901" y="3220540"/>
+            <a:ext cx="2602154" cy="292608"/>
+          </a:xfrm>
+          <a:prstGeom prst="rect">
+            <a:avLst/>
+          </a:prstGeom>
+          <a:noFill/>
+          <a:ln/>
+        </p:spPr>
+        <p:txBody>
+          <a:bodyPr wrap="square" lIns="0" tIns="0" rIns="0" bIns="0" rtlCol="0" anchor="t"/>
+          <a:lstStyle/>
+          <a:p>
+            <a:pPr indent="0" marL="0">
+              <a:buNone/>
+            </a:pPr>
+            <a:r>
+              <a:rPr lang="en-US" sz="1200" b="1" dirty="0">
+                <a:solidFill>
+                  <a:schemeClr val="tx2"/>
+                </a:solidFill>
+              </a:rPr>
+              <a:t>UIEB reference</a:t>
+            </a:r>
+            <a:endParaRPr lang="en-US" sz="1200" dirty="0"/>
+          </a:p>
+        </p:txBody>
+      </p:sp>
+      <p:sp>
+        <p:nvSpPr>
+          <p:cNvPr id="11" name="limit card 0"/>
+          <p:cNvSpPr/>
+          <p:nvPr/>
+        </p:nvSpPr>
+        <p:spPr>
+          <a:xfrm>
+            <a:off x="548640" y="3696028"/>
+            <a:ext cx="3515258" cy="2103120"/>
+          </a:xfrm>
+          <a:prstGeom prst="roundRect">
+            <a:avLst>
+              <a:gd name="adj" fmla="val 5217"/>
+            </a:avLst>
+          </a:prstGeom>
+          <a:solidFill>
+            <a:schemeClr val="bg2"/>
+          </a:solidFill>
+          <a:ln w="12700">
+            <a:solidFill>
+              <a:schemeClr val="bg2"/>
+            </a:solidFill>
+            <a:prstDash val="solid"/>
+          </a:ln>
+        </p:spPr>
+      </p:sp>
+      <p:sp>
+        <p:nvSpPr>
+          <p:cNvPr id="12" name="limit 0 circle"/>
+          <p:cNvSpPr/>
+          <p:nvPr/>
+        </p:nvSpPr>
+        <p:spPr>
+          <a:xfrm>
+            <a:off x="777240" y="3924628"/>
+            <a:ext cx="548640" cy="548640"/>
+          </a:xfrm>
+          <a:prstGeom prst="ellipse">
+            <a:avLst/>
+          </a:prstGeom>
+          <a:solidFill>
+            <a:schemeClr val="accent2"/>
+          </a:solidFill>
+          <a:ln w="12700">
+            <a:solidFill>
+              <a:schemeClr val="accent2"/>
+            </a:solidFill>
+            <a:prstDash val="solid"/>
+          </a:ln>
+        </p:spPr>
+      </p:sp>
       <p:pic>
         <p:nvPicPr>
-          <p:cNvPr id="13" name="773_img_ reference" descr="scripts/presentation/build/img/773_img__reference.jpg">    </p:cNvPr>
+          <p:cNvPr id="13" name="limit 0 glyph" descr="preencoded.png">    </p:cNvPr>
           <p:cNvPicPr>
             <a:picLocks noChangeAspect="1"/>
           </p:cNvPicPr>
@@ -7486,8 +7431,8 @@
         </p:blipFill>
         <p:spPr>
           <a:xfrm>
-            <a:off x="9570476" y="1691640"/>
-            <a:ext cx="2072579" cy="1450805"/>
+            <a:off x="897941" y="4045328"/>
+            <a:ext cx="307238" cy="307238"/>
           </a:xfrm>
           <a:prstGeom prst="rect">
             <a:avLst/>
@@ -7496,14 +7441,50 @@
       </p:pic>
       <p:sp>
         <p:nvSpPr>
-          <p:cNvPr id="14" name="773_img_ scores"/>
+          <p:cNvPr id="14" name="Text 7"/>
           <p:cNvSpPr txBox="1"/>
           <p:nvPr/>
         </p:nvSpPr>
         <p:spPr>
           <a:xfrm>
-            <a:off x="548640" y="3233885"/>
-            <a:ext cx="11094415" cy="292608"/>
+            <a:off x="1508760" y="3970348"/>
+            <a:ext cx="2372258" cy="457200"/>
+          </a:xfrm>
+          <a:prstGeom prst="rect">
+            <a:avLst/>
+          </a:prstGeom>
+          <a:noFill/>
+          <a:ln/>
+        </p:spPr>
+        <p:txBody>
+          <a:bodyPr wrap="square" lIns="0" tIns="0" rIns="0" bIns="0" rtlCol="0" anchor="ctr"/>
+          <a:lstStyle/>
+          <a:p>
+            <a:pPr indent="0" marL="0">
+              <a:buNone/>
+            </a:pPr>
+            <a:r>
+              <a:rPr lang="en-US" sz="1600" b="1" dirty="0">
+                <a:solidFill>
+                  <a:schemeClr val="tx2"/>
+                </a:solidFill>
+              </a:rPr>
+              <a:t>No PSNR gain over CLAHE-only</a:t>
+            </a:r>
+            <a:endParaRPr lang="en-US" sz="1600" dirty="0"/>
+          </a:p>
+        </p:txBody>
+      </p:sp>
+      <p:sp>
+        <p:nvSpPr>
+          <p:cNvPr id="15" name="Text 8"/>
+          <p:cNvSpPr txBox="1"/>
+          <p:nvPr/>
+        </p:nvSpPr>
+        <p:spPr>
+          <a:xfrm>
+            <a:off x="777240" y="4610428"/>
+            <a:ext cx="3058058" cy="1097280"/>
           </a:xfrm>
           <a:prstGeom prst="rect">
             <a:avLst/>
@@ -7519,20 +7500,72 @@
               <a:buNone/>
             </a:pPr>
             <a:r>
-              <a:rPr lang="en-US" sz="1200" dirty="0">
-                <a:solidFill>
-                  <a:schemeClr val="accent5"/>
-                </a:solidFill>
-              </a:rPr>
-              <a:t>green turbid · PSNR / SSIM — proposed 21.59 / 0.932, CLAHE-only 20.91 / 0.921, HE 18.82 / 0.884</a:t>
-            </a:r>
-            <a:endParaRPr lang="en-US" sz="1200" dirty="0"/>
-          </a:p>
-        </p:txBody>
+              <a:rPr lang="en-US" sz="1300" dirty="0">
+                <a:solidFill>
+                  <a:schemeClr val="tx1"/>
+                </a:solidFill>
+              </a:rPr>
+              <a:t>Level overall (−0.04 dB, negligible, not significant). CLAHE-only scores higher PSNR on 45% of test images, like this clear blue one (17.13 vs 19.24 dB).</a:t>
+            </a:r>
+            <a:endParaRPr lang="en-US" sz="1300" dirty="0"/>
+          </a:p>
+        </p:txBody>
+      </p:sp>
+      <p:sp>
+        <p:nvSpPr>
+          <p:cNvPr id="16" name="limit card 1"/>
+          <p:cNvSpPr/>
+          <p:nvPr/>
+        </p:nvSpPr>
+        <p:spPr>
+          <a:xfrm>
+            <a:off x="4338218" y="3696028"/>
+            <a:ext cx="3515258" cy="2103120"/>
+          </a:xfrm>
+          <a:prstGeom prst="roundRect">
+            <a:avLst>
+              <a:gd name="adj" fmla="val 5217"/>
+            </a:avLst>
+          </a:prstGeom>
+          <a:solidFill>
+            <a:schemeClr val="bg2"/>
+          </a:solidFill>
+          <a:ln w="12700">
+            <a:solidFill>
+              <a:schemeClr val="bg2"/>
+            </a:solidFill>
+            <a:prstDash val="solid"/>
+          </a:ln>
+        </p:spPr>
+      </p:sp>
+      <p:sp>
+        <p:nvSpPr>
+          <p:cNvPr id="17" name="limit 1 circle"/>
+          <p:cNvSpPr/>
+          <p:nvPr/>
+        </p:nvSpPr>
+        <p:spPr>
+          <a:xfrm>
+            <a:off x="4566818" y="3924628"/>
+            <a:ext cx="548640" cy="548640"/>
+          </a:xfrm>
+          <a:prstGeom prst="ellipse">
+            <a:avLst/>
+          </a:prstGeom>
+          <a:solidFill>
+            <a:schemeClr val="accent2"/>
+          </a:solidFill>
+          <a:ln w="12700">
+            <a:solidFill>
+              <a:schemeClr val="accent2"/>
+            </a:solidFill>
+            <a:prstDash val="solid"/>
+          </a:ln>
+        </p:spPr>
       </p:sp>
       <p:pic>
         <p:nvPicPr>
-          <p:cNvPr id="15" name="213_img_ raw" descr="scripts/presentation/build/img/213_img__raw.jpg">    </p:cNvPr>
+          <p:cNvPr id="18" name="limit 1 glyph" descr="preencoded.png">    </p:cNvPr>
           <p:cNvPicPr>
             <a:picLocks noChangeAspect="1"/>
           </p:cNvPicPr>
@@ -7546,17 +7579,141 @@
         </p:blipFill>
         <p:spPr>
           <a:xfrm>
-            <a:off x="548640" y="3691085"/>
-            <a:ext cx="2072579" cy="1554434"/>
+            <a:off x="4687519" y="4045328"/>
+            <a:ext cx="307238" cy="307238"/>
           </a:xfrm>
           <a:prstGeom prst="rect">
             <a:avLst/>
           </a:prstGeom>
         </p:spPr>
       </p:pic>
+      <p:sp>
+        <p:nvSpPr>
+          <p:cNvPr id="19" name="Text 11"/>
+          <p:cNvSpPr txBox="1"/>
+          <p:nvPr/>
+        </p:nvSpPr>
+        <p:spPr>
+          <a:xfrm>
+            <a:off x="5298338" y="3970348"/>
+            <a:ext cx="2372258" cy="457200"/>
+          </a:xfrm>
+          <a:prstGeom prst="rect">
+            <a:avLst/>
+          </a:prstGeom>
+          <a:noFill/>
+          <a:ln/>
+        </p:spPr>
+        <p:txBody>
+          <a:bodyPr wrap="square" lIns="0" tIns="0" rIns="0" bIns="0" rtlCol="0" anchor="ctr"/>
+          <a:lstStyle/>
+          <a:p>
+            <a:pPr indent="0" marL="0">
+              <a:buNone/>
+            </a:pPr>
+            <a:r>
+              <a:rPr lang="en-US" sz="1600" b="1" dirty="0">
+                <a:solidFill>
+                  <a:schemeClr val="tx2"/>
+                </a:solidFill>
+              </a:rPr>
+              <a:t>Routing adds little</a:t>
+            </a:r>
+            <a:endParaRPr lang="en-US" sz="1600" dirty="0"/>
+          </a:p>
+        </p:txBody>
+      </p:sp>
+      <p:sp>
+        <p:nvSpPr>
+          <p:cNvPr id="20" name="Text 12"/>
+          <p:cNvSpPr txBox="1"/>
+          <p:nvPr/>
+        </p:nvSpPr>
+        <p:spPr>
+          <a:xfrm>
+            <a:off x="4566818" y="4610428"/>
+            <a:ext cx="3058058" cy="1097280"/>
+          </a:xfrm>
+          <a:prstGeom prst="rect">
+            <a:avLst/>
+          </a:prstGeom>
+          <a:noFill/>
+          <a:ln/>
+        </p:spPr>
+        <p:txBody>
+          <a:bodyPr wrap="square" lIns="0" tIns="0" rIns="0" bIns="0" rtlCol="0" anchor="t"/>
+          <a:lstStyle/>
+          <a:p>
+            <a:pPr indent="0" marL="0">
+              <a:buNone/>
+            </a:pPr>
+            <a:r>
+              <a:rPr lang="en-US" sz="1300" dirty="0">
+                <a:solidFill>
+                  <a:schemeClr val="tx1"/>
+                </a:solidFill>
+              </a:rPr>
+              <a:t>A per-image oracle profile would add 1.45 dB over one global profile; four water types capture +0.02 dB of it.</a:t>
+            </a:r>
+            <a:endParaRPr lang="en-US" sz="1300" dirty="0"/>
+          </a:p>
+        </p:txBody>
+      </p:sp>
+      <p:sp>
+        <p:nvSpPr>
+          <p:cNvPr id="21" name="limit card 2"/>
+          <p:cNvSpPr/>
+          <p:nvPr/>
+        </p:nvSpPr>
+        <p:spPr>
+          <a:xfrm>
+            <a:off x="8127797" y="3696028"/>
+            <a:ext cx="3515258" cy="2103120"/>
+          </a:xfrm>
+          <a:prstGeom prst="roundRect">
+            <a:avLst>
+              <a:gd name="adj" fmla="val 5217"/>
+            </a:avLst>
+          </a:prstGeom>
+          <a:solidFill>
+            <a:schemeClr val="bg2"/>
+          </a:solidFill>
+          <a:ln w="12700">
+            <a:solidFill>
+              <a:schemeClr val="bg2"/>
+            </a:solidFill>
+            <a:prstDash val="solid"/>
+          </a:ln>
+        </p:spPr>
+      </p:sp>
+      <p:sp>
+        <p:nvSpPr>
+          <p:cNvPr id="22" name="limit 2 circle"/>
+          <p:cNvSpPr/>
+          <p:nvPr/>
+        </p:nvSpPr>
+        <p:spPr>
+          <a:xfrm>
+            <a:off x="8356397" y="3924628"/>
+            <a:ext cx="548640" cy="548640"/>
+          </a:xfrm>
+          <a:prstGeom prst="ellipse">
+            <a:avLst/>
+          </a:prstGeom>
+          <a:solidFill>
+            <a:schemeClr val="accent2"/>
+          </a:solidFill>
+          <a:ln w="12700">
+            <a:solidFill>
+              <a:schemeClr val="accent2"/>
+            </a:solidFill>
+            <a:prstDash val="solid"/>
+          </a:ln>
+        </p:spPr>
+      </p:sp>
       <p:pic>
         <p:nvPicPr>
-          <p:cNvPr id="16" name="213_img_ conventional_he" descr="scripts/presentation/build/img/213_img__conventional_he.jpg">    </p:cNvPr>
+          <p:cNvPr id="23" name="limit 2 glyph" descr="preencoded.png">    </p:cNvPr>
           <p:cNvPicPr>
             <a:picLocks noChangeAspect="1"/>
           </p:cNvPicPr>
@@ -7570,121 +7727,60 @@
         </p:blipFill>
         <p:spPr>
           <a:xfrm>
-            <a:off x="2804099" y="3691085"/>
-            <a:ext cx="2072579" cy="1554434"/>
+            <a:off x="8477098" y="4045328"/>
+            <a:ext cx="307238" cy="307238"/>
           </a:xfrm>
           <a:prstGeom prst="rect">
             <a:avLst/>
           </a:prstGeom>
         </p:spPr>
       </p:pic>
-      <p:pic>
-        <p:nvPicPr>
-          <p:cNvPr id="17" name="213_img_ clahe_only" descr="scripts/presentation/build/img/213_img__clahe_only.jpg">    </p:cNvPr>
-          <p:cNvPicPr>
-            <a:picLocks noChangeAspect="1"/>
-          </p:cNvPicPr>
-          <p:nvPr/>
-        </p:nvPicPr>
-        <p:blipFill>
-          <a:blip r:embed="rId8"/>
-          <a:stretch>
-            <a:fillRect/>
-          </a:stretch>
-        </p:blipFill>
-        <p:spPr>
-          <a:xfrm>
-            <a:off x="5059558" y="3691085"/>
-            <a:ext cx="2072579" cy="1554434"/>
-          </a:xfrm>
-          <a:prstGeom prst="rect">
-            <a:avLst/>
-          </a:prstGeom>
-        </p:spPr>
-      </p:pic>
-      <p:sp>
-        <p:nvSpPr>
-          <p:cNvPr id="18" name="hybrid frame 213_img_"/>
-          <p:cNvSpPr/>
-          <p:nvPr/>
-        </p:nvSpPr>
-        <p:spPr>
-          <a:xfrm>
-            <a:off x="7278441" y="3654509"/>
-            <a:ext cx="2145731" cy="1627586"/>
-          </a:xfrm>
-          <a:prstGeom prst="rect">
-            <a:avLst/>
-          </a:prstGeom>
-          <a:solidFill>
-            <a:schemeClr val="accent1"/>
-          </a:solidFill>
-          <a:ln w="12700">
-            <a:solidFill>
-              <a:schemeClr val="accent1"/>
-            </a:solidFill>
-            <a:prstDash val="solid"/>
-          </a:ln>
-        </p:spPr>
-      </p:sp>
-      <p:pic>
-        <p:nvPicPr>
-          <p:cNvPr id="19" name="213_img_ proposed_hybrid" descr="scripts/presentation/build/img/213_img__proposed_hybrid.jpg">    </p:cNvPr>
-          <p:cNvPicPr>
-            <a:picLocks noChangeAspect="1"/>
-          </p:cNvPicPr>
-          <p:nvPr/>
-        </p:nvPicPr>
-        <p:blipFill>
-          <a:blip r:embed="rId9"/>
-          <a:stretch>
-            <a:fillRect/>
-          </a:stretch>
-        </p:blipFill>
-        <p:spPr>
-          <a:xfrm>
-            <a:off x="7315017" y="3691085"/>
-            <a:ext cx="2072579" cy="1554434"/>
-          </a:xfrm>
-          <a:prstGeom prst="rect">
-            <a:avLst/>
-          </a:prstGeom>
-        </p:spPr>
-      </p:pic>
-      <p:pic>
-        <p:nvPicPr>
-          <p:cNvPr id="20" name="213_img_ reference" descr="scripts/presentation/build/img/213_img__reference.jpg">    </p:cNvPr>
-          <p:cNvPicPr>
-            <a:picLocks noChangeAspect="1"/>
-          </p:cNvPicPr>
-          <p:nvPr/>
-        </p:nvPicPr>
-        <p:blipFill>
-          <a:blip r:embed="rId10"/>
-          <a:stretch>
-            <a:fillRect/>
-          </a:stretch>
-        </p:blipFill>
-        <p:spPr>
-          <a:xfrm>
-            <a:off x="9570476" y="3691085"/>
-            <a:ext cx="2072579" cy="1554434"/>
-          </a:xfrm>
-          <a:prstGeom prst="rect">
-            <a:avLst/>
-          </a:prstGeom>
-        </p:spPr>
-      </p:pic>
-      <p:sp>
-        <p:nvSpPr>
-          <p:cNvPr id="21" name="213_img_ scores"/>
+      <p:sp>
+        <p:nvSpPr>
+          <p:cNvPr id="24" name="Text 15"/>
           <p:cNvSpPr txBox="1"/>
           <p:nvPr/>
         </p:nvSpPr>
         <p:spPr>
           <a:xfrm>
-            <a:off x="548640" y="5336960"/>
-            <a:ext cx="11094415" cy="292608"/>
+            <a:off x="9087917" y="3970348"/>
+            <a:ext cx="2372258" cy="457200"/>
+          </a:xfrm>
+          <a:prstGeom prst="rect">
+            <a:avLst/>
+          </a:prstGeom>
+          <a:noFill/>
+          <a:ln/>
+        </p:spPr>
+        <p:txBody>
+          <a:bodyPr wrap="square" lIns="0" tIns="0" rIns="0" bIns="0" rtlCol="0" anchor="ctr"/>
+          <a:lstStyle/>
+          <a:p>
+            <a:pPr indent="0" marL="0">
+              <a:buNone/>
+            </a:pPr>
+            <a:r>
+              <a:rPr lang="en-US" sz="1600" b="1" dirty="0">
+                <a:solidFill>
+                  <a:schemeClr val="tx2"/>
+                </a:solidFill>
+              </a:rPr>
+              <a:t>Calibration at the grid edge</a:t>
+            </a:r>
+            <a:endParaRPr lang="en-US" sz="1600" dirty="0"/>
+          </a:p>
+        </p:txBody>
+      </p:sp>
+      <p:sp>
+        <p:nvSpPr>
+          <p:cNvPr id="25" name="Text 16"/>
+          <p:cNvSpPr txBox="1"/>
+          <p:nvPr/>
+        </p:nvSpPr>
+        <p:spPr>
+          <a:xfrm>
+            <a:off x="8356397" y="4610428"/>
+            <a:ext cx="3058058" cy="1097280"/>
           </a:xfrm>
           <a:prstGeom prst="rect">
             <a:avLst/>
@@ -7700,14 +7796,14 @@
               <a:buNone/>
             </a:pPr>
             <a:r>
-              <a:rPr lang="en-US" sz="1200" dirty="0">
-                <a:solidFill>
-                  <a:schemeClr val="accent5"/>
-                </a:solidFill>
-              </a:rPr>
-              <a:t>hazy bright · PSNR / SSIM — proposed 15.52 / 0.797, CLAHE-only 15.52 / 0.771, HE 14.29 / 0.746</a:t>
-            </a:r>
-            <a:endParaRPr lang="en-US" sz="1200" dirty="0"/>
+              <a:rPr lang="en-US" sz="1300" dirty="0">
+                <a:solidFill>
+                  <a:schemeClr val="tx1"/>
+                </a:solidFill>
+              </a:rPr>
+              <a:t>WB cap 1.5, CLAHE × 0.6 and ω 0.5 are the mildest values searched: the references prefer gentler processing than the grid allowed.</a:t>
+            </a:r>
+            <a:endParaRPr lang="en-US" sz="1300" dirty="0"/>
           </a:p>
         </p:txBody>
       </p:sp>
@@ -7813,266 +7909,26 @@
                   <a:schemeClr val="tx2"/>
                 </a:solidFill>
               </a:rPr>
-              <a:t>Where it still falls short</a:t>
+              <a:t>Rigour: issues we found and fixed</a:t>
             </a:r>
             <a:endParaRPr lang="en-US" sz="3200" dirty="0"/>
           </a:p>
         </p:txBody>
       </p:sp>
-      <p:pic>
-        <p:nvPicPr>
-          <p:cNvPr id="3" name="weak raw" descr="scripts/presentation/build/img/699_img__raw.jpg">    </p:cNvPr>
-          <p:cNvPicPr>
-            <a:picLocks noChangeAspect="1"/>
-          </p:cNvPicPr>
-          <p:nvPr/>
-        </p:nvPicPr>
-        <p:blipFill>
-          <a:blip r:embed="rId1"/>
-          <a:stretch>
-            <a:fillRect/>
-          </a:stretch>
-        </p:blipFill>
-        <p:spPr>
-          <a:xfrm>
-            <a:off x="548640" y="1325880"/>
-            <a:ext cx="2602154" cy="1821508"/>
-          </a:xfrm>
-          <a:prstGeom prst="rect">
-            <a:avLst/>
-          </a:prstGeom>
-        </p:spPr>
-      </p:pic>
-      <p:sp>
-        <p:nvSpPr>
-          <p:cNvPr id="4" name="Text 1"/>
-          <p:cNvSpPr txBox="1"/>
-          <p:nvPr/>
-        </p:nvSpPr>
-        <p:spPr>
-          <a:xfrm>
-            <a:off x="548640" y="3220540"/>
-            <a:ext cx="2602154" cy="292608"/>
-          </a:xfrm>
-          <a:prstGeom prst="rect">
-            <a:avLst/>
-          </a:prstGeom>
-          <a:noFill/>
-          <a:ln/>
-        </p:spPr>
-        <p:txBody>
-          <a:bodyPr wrap="square" lIns="0" tIns="0" rIns="0" bIns="0" rtlCol="0" anchor="t"/>
-          <a:lstStyle/>
-          <a:p>
-            <a:pPr indent="0" marL="0">
-              <a:buNone/>
-            </a:pPr>
-            <a:r>
-              <a:rPr lang="en-US" sz="1200" b="1" dirty="0">
-                <a:solidFill>
-                  <a:schemeClr val="tx2"/>
-                </a:solidFill>
-              </a:rPr>
-              <a:t>Raw</a:t>
-            </a:r>
-            <a:endParaRPr lang="en-US" sz="1200" dirty="0"/>
-          </a:p>
-        </p:txBody>
-      </p:sp>
-      <p:pic>
-        <p:nvPicPr>
-          <p:cNvPr id="5" name="weak clahe_only" descr="scripts/presentation/build/img/699_img__clahe_only.jpg">    </p:cNvPr>
-          <p:cNvPicPr>
-            <a:picLocks noChangeAspect="1"/>
-          </p:cNvPicPr>
-          <p:nvPr/>
-        </p:nvPicPr>
-        <p:blipFill>
-          <a:blip r:embed="rId2"/>
-          <a:stretch>
-            <a:fillRect/>
-          </a:stretch>
-        </p:blipFill>
-        <p:spPr>
-          <a:xfrm>
-            <a:off x="3379394" y="1325880"/>
-            <a:ext cx="2602154" cy="1821508"/>
-          </a:xfrm>
-          <a:prstGeom prst="rect">
-            <a:avLst/>
-          </a:prstGeom>
-        </p:spPr>
-      </p:pic>
-      <p:sp>
-        <p:nvSpPr>
-          <p:cNvPr id="6" name="Text 2"/>
-          <p:cNvSpPr txBox="1"/>
-          <p:nvPr/>
-        </p:nvSpPr>
-        <p:spPr>
-          <a:xfrm>
-            <a:off x="3379394" y="3220540"/>
-            <a:ext cx="2602154" cy="292608"/>
-          </a:xfrm>
-          <a:prstGeom prst="rect">
-            <a:avLst/>
-          </a:prstGeom>
-          <a:noFill/>
-          <a:ln/>
-        </p:spPr>
-        <p:txBody>
-          <a:bodyPr wrap="square" lIns="0" tIns="0" rIns="0" bIns="0" rtlCol="0" anchor="t"/>
-          <a:lstStyle/>
-          <a:p>
-            <a:pPr indent="0" marL="0">
-              <a:buNone/>
-            </a:pPr>
-            <a:r>
-              <a:rPr lang="en-US" sz="1200" b="1" dirty="0">
-                <a:solidFill>
-                  <a:schemeClr val="tx2"/>
-                </a:solidFill>
-              </a:rPr>
-              <a:t>CLAHE-only</a:t>
-            </a:r>
-            <a:endParaRPr lang="en-US" sz="1200" dirty="0"/>
-          </a:p>
-        </p:txBody>
-      </p:sp>
-      <p:pic>
-        <p:nvPicPr>
-          <p:cNvPr id="7" name="weak proposed_hybrid" descr="scripts/presentation/build/img/699_img__proposed_hybrid.jpg">    </p:cNvPr>
-          <p:cNvPicPr>
-            <a:picLocks noChangeAspect="1"/>
-          </p:cNvPicPr>
-          <p:nvPr/>
-        </p:nvPicPr>
-        <p:blipFill>
-          <a:blip r:embed="rId3"/>
-          <a:stretch>
-            <a:fillRect/>
-          </a:stretch>
-        </p:blipFill>
-        <p:spPr>
-          <a:xfrm>
-            <a:off x="6210148" y="1325880"/>
-            <a:ext cx="2602154" cy="1821508"/>
-          </a:xfrm>
-          <a:prstGeom prst="rect">
-            <a:avLst/>
-          </a:prstGeom>
-        </p:spPr>
-      </p:pic>
-      <p:sp>
-        <p:nvSpPr>
-          <p:cNvPr id="8" name="Text 3"/>
-          <p:cNvSpPr txBox="1"/>
-          <p:nvPr/>
-        </p:nvSpPr>
-        <p:spPr>
-          <a:xfrm>
-            <a:off x="6210148" y="3220540"/>
-            <a:ext cx="2602154" cy="292608"/>
-          </a:xfrm>
-          <a:prstGeom prst="rect">
-            <a:avLst/>
-          </a:prstGeom>
-          <a:noFill/>
-          <a:ln/>
-        </p:spPr>
-        <p:txBody>
-          <a:bodyPr wrap="square" lIns="0" tIns="0" rIns="0" bIns="0" rtlCol="0" anchor="t"/>
-          <a:lstStyle/>
-          <a:p>
-            <a:pPr indent="0" marL="0">
-              <a:buNone/>
-            </a:pPr>
-            <a:r>
-              <a:rPr lang="en-US" sz="1200" b="1" dirty="0">
-                <a:solidFill>
-                  <a:schemeClr val="tx2"/>
-                </a:solidFill>
-              </a:rPr>
-              <a:t>Proposed hybrid</a:t>
-            </a:r>
-            <a:endParaRPr lang="en-US" sz="1200" dirty="0"/>
-          </a:p>
-        </p:txBody>
-      </p:sp>
-      <p:pic>
-        <p:nvPicPr>
-          <p:cNvPr id="9" name="weak reference" descr="scripts/presentation/build/img/699_img__reference.jpg">    </p:cNvPr>
-          <p:cNvPicPr>
-            <a:picLocks noChangeAspect="1"/>
-          </p:cNvPicPr>
-          <p:nvPr/>
-        </p:nvPicPr>
-        <p:blipFill>
-          <a:blip r:embed="rId4"/>
-          <a:stretch>
-            <a:fillRect/>
-          </a:stretch>
-        </p:blipFill>
-        <p:spPr>
-          <a:xfrm>
-            <a:off x="9040901" y="1325880"/>
-            <a:ext cx="2602154" cy="1821508"/>
-          </a:xfrm>
-          <a:prstGeom prst="rect">
-            <a:avLst/>
-          </a:prstGeom>
-        </p:spPr>
-      </p:pic>
-      <p:sp>
-        <p:nvSpPr>
-          <p:cNvPr id="10" name="Text 4"/>
-          <p:cNvSpPr txBox="1"/>
-          <p:nvPr/>
-        </p:nvSpPr>
-        <p:spPr>
-          <a:xfrm>
-            <a:off x="9040901" y="3220540"/>
-            <a:ext cx="2602154" cy="292608"/>
-          </a:xfrm>
-          <a:prstGeom prst="rect">
-            <a:avLst/>
-          </a:prstGeom>
-          <a:noFill/>
-          <a:ln/>
-        </p:spPr>
-        <p:txBody>
-          <a:bodyPr wrap="square" lIns="0" tIns="0" rIns="0" bIns="0" rtlCol="0" anchor="t"/>
-          <a:lstStyle/>
-          <a:p>
-            <a:pPr indent="0" marL="0">
-              <a:buNone/>
-            </a:pPr>
-            <a:r>
-              <a:rPr lang="en-US" sz="1200" b="1" dirty="0">
-                <a:solidFill>
-                  <a:schemeClr val="tx2"/>
-                </a:solidFill>
-              </a:rPr>
-              <a:t>UIEB reference</a:t>
-            </a:r>
-            <a:endParaRPr lang="en-US" sz="1200" dirty="0"/>
-          </a:p>
-        </p:txBody>
-      </p:sp>
-      <p:sp>
-        <p:nvSpPr>
-          <p:cNvPr id="11" name="limit card 0"/>
+      <p:sp>
+        <p:nvSpPr>
+          <p:cNvPr id="3" name="fix card 0"/>
           <p:cNvSpPr/>
           <p:nvPr/>
         </p:nvSpPr>
         <p:spPr>
           <a:xfrm>
-            <a:off x="548640" y="3696028"/>
-            <a:ext cx="3515258" cy="2103120"/>
+            <a:off x="548640" y="1371600"/>
+            <a:ext cx="3515258" cy="2240280"/>
           </a:xfrm>
           <a:prstGeom prst="roundRect">
             <a:avLst>
-              <a:gd name="adj" fmla="val 5217"/>
+              <a:gd name="adj" fmla="val 4898"/>
             </a:avLst>
           </a:prstGeom>
           <a:solidFill>
@@ -8088,24 +7944,24 @@
       </p:sp>
       <p:sp>
         <p:nvSpPr>
-          <p:cNvPr id="12" name="limit 0 circle"/>
+          <p:cNvPr id="4" name="fix 0 circle"/>
           <p:cNvSpPr/>
           <p:nvPr/>
         </p:nvSpPr>
         <p:spPr>
           <a:xfrm>
-            <a:off x="777240" y="3924628"/>
-            <a:ext cx="548640" cy="548640"/>
+            <a:off x="822960" y="1645920"/>
+            <a:ext cx="594360" cy="594360"/>
           </a:xfrm>
           <a:prstGeom prst="ellipse">
             <a:avLst/>
           </a:prstGeom>
           <a:solidFill>
-            <a:schemeClr val="accent2"/>
+            <a:schemeClr val="accent3"/>
           </a:solidFill>
           <a:ln w="12700">
             <a:solidFill>
-              <a:schemeClr val="accent2"/>
+              <a:schemeClr val="accent3"/>
             </a:solidFill>
             <a:prstDash val="solid"/>
           </a:ln>
@@ -8113,22 +7969,22 @@
       </p:sp>
       <p:pic>
         <p:nvPicPr>
-          <p:cNvPr id="13" name="limit 0 glyph" descr="preencoded.png">    </p:cNvPr>
+          <p:cNvPr id="5" name="fix 0 glyph" descr="preencoded.png">    </p:cNvPr>
           <p:cNvPicPr>
             <a:picLocks noChangeAspect="1"/>
           </p:cNvPicPr>
           <p:nvPr/>
         </p:nvPicPr>
         <p:blipFill>
-          <a:blip r:embed="rId5"/>
+          <a:blip r:embed="rId1"/>
           <a:stretch>
             <a:fillRect/>
           </a:stretch>
         </p:blipFill>
         <p:spPr>
           <a:xfrm>
-            <a:off x="897941" y="4045328"/>
-            <a:ext cx="307238" cy="307238"/>
+            <a:off x="953719" y="1776679"/>
+            <a:ext cx="332842" cy="332842"/>
           </a:xfrm>
           <a:prstGeom prst="rect">
             <a:avLst/>
@@ -8137,14 +7993,14 @@
       </p:pic>
       <p:sp>
         <p:nvSpPr>
-          <p:cNvPr id="14" name="Text 7"/>
+          <p:cNvPr id="6" name="Text 3"/>
           <p:cNvSpPr txBox="1"/>
           <p:nvPr/>
         </p:nvSpPr>
         <p:spPr>
           <a:xfrm>
-            <a:off x="1508760" y="3970348"/>
-            <a:ext cx="2372258" cy="457200"/>
+            <a:off x="1554480" y="1645920"/>
+            <a:ext cx="2326538" cy="594360"/>
           </a:xfrm>
           <a:prstGeom prst="rect">
             <a:avLst/>
@@ -8165,7 +8021,7 @@
                   <a:schemeClr val="tx2"/>
                 </a:solidFill>
               </a:rPr>
-              <a:t>No PSNR gain over CLAHE-only</a:t>
+              <a:t>UCIQE on 8-bit Lab</a:t>
             </a:r>
             <a:endParaRPr lang="en-US" sz="1600" dirty="0"/>
           </a:p>
@@ -8173,14 +8029,14 @@
       </p:sp>
       <p:sp>
         <p:nvSpPr>
-          <p:cNvPr id="15" name="Text 8"/>
+          <p:cNvPr id="7" name="Text 4"/>
           <p:cNvSpPr txBox="1"/>
           <p:nvPr/>
         </p:nvSpPr>
         <p:spPr>
           <a:xfrm>
-            <a:off x="777240" y="4610428"/>
-            <a:ext cx="3058058" cy="1097280"/>
+            <a:off x="822960" y="2423160"/>
+            <a:ext cx="2966618" cy="1097280"/>
           </a:xfrm>
           <a:prstGeom prst="rect">
             <a:avLst/>
@@ -8196,31 +8052,31 @@
               <a:buNone/>
             </a:pPr>
             <a:r>
-              <a:rPr lang="en-US" sz="1300" dirty="0">
+              <a:rPr lang="en-US" sz="1400" dirty="0">
                 <a:solidFill>
                   <a:schemeClr val="tx1"/>
                 </a:solidFill>
               </a:rPr>
-              <a:t>Level overall (−0.04 dB, negligible, not significant). CLAHE-only scores higher PSNR on 45% of test images, like this clear blue one (17.13 vs 19.24 dB).</a:t>
-            </a:r>
-            <a:endParaRPr lang="en-US" sz="1300" dirty="0"/>
-          </a:p>
-        </p:txBody>
-      </p:sp>
-      <p:sp>
-        <p:nvSpPr>
-          <p:cNvPr id="16" name="limit card 1"/>
+              <a:t>OpenCV's encoding made grey pixels read as chroma ≈181; now computed in true CIELAB.</a:t>
+            </a:r>
+            <a:endParaRPr lang="en-US" sz="1400" dirty="0"/>
+          </a:p>
+        </p:txBody>
+      </p:sp>
+      <p:sp>
+        <p:nvSpPr>
+          <p:cNvPr id="8" name="fix card 1"/>
           <p:cNvSpPr/>
           <p:nvPr/>
         </p:nvSpPr>
         <p:spPr>
           <a:xfrm>
-            <a:off x="4338218" y="3696028"/>
-            <a:ext cx="3515258" cy="2103120"/>
+            <a:off x="4338218" y="1371600"/>
+            <a:ext cx="3515258" cy="2240280"/>
           </a:xfrm>
           <a:prstGeom prst="roundRect">
             <a:avLst>
-              <a:gd name="adj" fmla="val 5217"/>
+              <a:gd name="adj" fmla="val 4898"/>
             </a:avLst>
           </a:prstGeom>
           <a:solidFill>
@@ -8236,24 +8092,24 @@
       </p:sp>
       <p:sp>
         <p:nvSpPr>
-          <p:cNvPr id="17" name="limit 1 circle"/>
+          <p:cNvPr id="9" name="fix 1 circle"/>
           <p:cNvSpPr/>
           <p:nvPr/>
         </p:nvSpPr>
         <p:spPr>
           <a:xfrm>
-            <a:off x="4566818" y="3924628"/>
-            <a:ext cx="548640" cy="548640"/>
+            <a:off x="4612538" y="1645920"/>
+            <a:ext cx="594360" cy="594360"/>
           </a:xfrm>
           <a:prstGeom prst="ellipse">
             <a:avLst/>
           </a:prstGeom>
           <a:solidFill>
-            <a:schemeClr val="accent2"/>
+            <a:schemeClr val="accent3"/>
           </a:solidFill>
           <a:ln w="12700">
             <a:solidFill>
-              <a:schemeClr val="accent2"/>
+              <a:schemeClr val="accent3"/>
             </a:solidFill>
             <a:prstDash val="solid"/>
           </a:ln>
@@ -8261,22 +8117,22 @@
       </p:sp>
       <p:pic>
         <p:nvPicPr>
-          <p:cNvPr id="18" name="limit 1 glyph" descr="preencoded.png">    </p:cNvPr>
+          <p:cNvPr id="10" name="fix 1 glyph" descr="preencoded.png">    </p:cNvPr>
           <p:cNvPicPr>
             <a:picLocks noChangeAspect="1"/>
           </p:cNvPicPr>
           <p:nvPr/>
         </p:nvPicPr>
         <p:blipFill>
-          <a:blip r:embed="rId6"/>
+          <a:blip r:embed="rId2"/>
           <a:stretch>
             <a:fillRect/>
           </a:stretch>
         </p:blipFill>
         <p:spPr>
           <a:xfrm>
-            <a:off x="4687519" y="4045328"/>
-            <a:ext cx="307238" cy="307238"/>
+            <a:off x="4743298" y="1776679"/>
+            <a:ext cx="332842" cy="332842"/>
           </a:xfrm>
           <a:prstGeom prst="rect">
             <a:avLst/>
@@ -8285,14 +8141,14 @@
       </p:pic>
       <p:sp>
         <p:nvSpPr>
-          <p:cNvPr id="19" name="Text 11"/>
+          <p:cNvPr id="11" name="Text 7"/>
           <p:cNvSpPr txBox="1"/>
           <p:nvPr/>
         </p:nvSpPr>
         <p:spPr>
           <a:xfrm>
-            <a:off x="5298338" y="3970348"/>
-            <a:ext cx="2372258" cy="457200"/>
+            <a:off x="5344058" y="1645920"/>
+            <a:ext cx="2326538" cy="594360"/>
           </a:xfrm>
           <a:prstGeom prst="rect">
             <a:avLst/>
@@ -8313,7 +8169,7 @@
                   <a:schemeClr val="tx2"/>
                 </a:solidFill>
               </a:rPr>
-              <a:t>Routing adds little</a:t>
+              <a:t>Keypoint cap tied counts</a:t>
             </a:r>
             <a:endParaRPr lang="en-US" sz="1600" dirty="0"/>
           </a:p>
@@ -8321,14 +8177,14 @@
       </p:sp>
       <p:sp>
         <p:nvSpPr>
-          <p:cNvPr id="20" name="Text 12"/>
+          <p:cNvPr id="12" name="Text 8"/>
           <p:cNvSpPr txBox="1"/>
           <p:nvPr/>
         </p:nvSpPr>
         <p:spPr>
           <a:xfrm>
-            <a:off x="4566818" y="4610428"/>
-            <a:ext cx="3058058" cy="1097280"/>
+            <a:off x="4612538" y="2423160"/>
+            <a:ext cx="2966618" cy="1097280"/>
           </a:xfrm>
           <a:prstGeom prst="rect">
             <a:avLst/>
@@ -8344,31 +8200,31 @@
               <a:buNone/>
             </a:pPr>
             <a:r>
-              <a:rPr lang="en-US" sz="1300" dirty="0">
+              <a:rPr lang="en-US" sz="1400" dirty="0">
                 <a:solidFill>
                   <a:schemeClr val="tx1"/>
                 </a:solidFill>
               </a:rPr>
-              <a:t>A per-image oracle profile would add 1.45 dB over one global profile; four water types capture +0.02 dB of it.</a:t>
-            </a:r>
-            <a:endParaRPr lang="en-US" sz="1300" dirty="0"/>
-          </a:p>
-        </p:txBody>
-      </p:sp>
-      <p:sp>
-        <p:nvSpPr>
-          <p:cNvPr id="21" name="limit card 2"/>
+              <a:t>ORB stopped at 1,000 points, so raw and restored images hit the same ceiling; cap raised to 200,000.</a:t>
+            </a:r>
+            <a:endParaRPr lang="en-US" sz="1400" dirty="0"/>
+          </a:p>
+        </p:txBody>
+      </p:sp>
+      <p:sp>
+        <p:nvSpPr>
+          <p:cNvPr id="13" name="fix card 2"/>
           <p:cNvSpPr/>
           <p:nvPr/>
         </p:nvSpPr>
         <p:spPr>
           <a:xfrm>
-            <a:off x="8127797" y="3696028"/>
-            <a:ext cx="3515258" cy="2103120"/>
+            <a:off x="8127797" y="1371600"/>
+            <a:ext cx="3515258" cy="2240280"/>
           </a:xfrm>
           <a:prstGeom prst="roundRect">
             <a:avLst>
-              <a:gd name="adj" fmla="val 5217"/>
+              <a:gd name="adj" fmla="val 4898"/>
             </a:avLst>
           </a:prstGeom>
           <a:solidFill>
@@ -8384,24 +8240,24 @@
       </p:sp>
       <p:sp>
         <p:nvSpPr>
-          <p:cNvPr id="22" name="limit 2 circle"/>
+          <p:cNvPr id="14" name="fix 2 circle"/>
           <p:cNvSpPr/>
           <p:nvPr/>
         </p:nvSpPr>
         <p:spPr>
           <a:xfrm>
-            <a:off x="8356397" y="3924628"/>
-            <a:ext cx="548640" cy="548640"/>
+            <a:off x="8402117" y="1645920"/>
+            <a:ext cx="594360" cy="594360"/>
           </a:xfrm>
           <a:prstGeom prst="ellipse">
             <a:avLst/>
           </a:prstGeom>
           <a:solidFill>
-            <a:schemeClr val="accent2"/>
+            <a:schemeClr val="accent3"/>
           </a:solidFill>
           <a:ln w="12700">
             <a:solidFill>
-              <a:schemeClr val="accent2"/>
+              <a:schemeClr val="accent3"/>
             </a:solidFill>
             <a:prstDash val="solid"/>
           </a:ln>
@@ -8409,22 +8265,22 @@
       </p:sp>
       <p:pic>
         <p:nvPicPr>
-          <p:cNvPr id="23" name="limit 2 glyph" descr="preencoded.png">    </p:cNvPr>
+          <p:cNvPr id="15" name="fix 2 glyph" descr="preencoded.png">    </p:cNvPr>
           <p:cNvPicPr>
             <a:picLocks noChangeAspect="1"/>
           </p:cNvPicPr>
           <p:nvPr/>
         </p:nvPicPr>
         <p:blipFill>
-          <a:blip r:embed="rId7"/>
+          <a:blip r:embed="rId3"/>
           <a:stretch>
             <a:fillRect/>
           </a:stretch>
         </p:blipFill>
         <p:spPr>
           <a:xfrm>
-            <a:off x="8477098" y="4045328"/>
-            <a:ext cx="307238" cy="307238"/>
+            <a:off x="8532876" y="1776679"/>
+            <a:ext cx="332842" cy="332842"/>
           </a:xfrm>
           <a:prstGeom prst="rect">
             <a:avLst/>
@@ -8433,14 +8289,14 @@
       </p:pic>
       <p:sp>
         <p:nvSpPr>
-          <p:cNvPr id="24" name="Text 15"/>
+          <p:cNvPr id="16" name="Text 11"/>
           <p:cNvSpPr txBox="1"/>
           <p:nvPr/>
         </p:nvSpPr>
         <p:spPr>
           <a:xfrm>
-            <a:off x="9087917" y="3970348"/>
-            <a:ext cx="2372258" cy="457200"/>
+            <a:off x="9133637" y="1645920"/>
+            <a:ext cx="2326538" cy="594360"/>
           </a:xfrm>
           <a:prstGeom prst="rect">
             <a:avLst/>
@@ -8461,7 +8317,7 @@
                   <a:schemeClr val="tx2"/>
                 </a:solidFill>
               </a:rPr>
-              <a:t>Calibration at the grid edge</a:t>
+              <a:t>White-balance cap unused</a:t>
             </a:r>
             <a:endParaRPr lang="en-US" sz="1600" dirty="0"/>
           </a:p>
@@ -8469,14 +8325,14 @@
       </p:sp>
       <p:sp>
         <p:nvSpPr>
-          <p:cNvPr id="25" name="Text 16"/>
+          <p:cNvPr id="17" name="Text 12"/>
           <p:cNvSpPr txBox="1"/>
           <p:nvPr/>
         </p:nvSpPr>
         <p:spPr>
           <a:xfrm>
-            <a:off x="8356397" y="4610428"/>
-            <a:ext cx="3058058" cy="1097280"/>
+            <a:off x="8402117" y="2423160"/>
+            <a:ext cx="2966618" cy="1097280"/>
           </a:xfrm>
           <a:prstGeom prst="rect">
             <a:avLst/>
@@ -8492,14 +8348,458 @@
               <a:buNone/>
             </a:pPr>
             <a:r>
-              <a:rPr lang="en-US" sz="1300" dirty="0">
+              <a:rPr lang="en-US" sz="1400" dirty="0">
                 <a:solidFill>
                   <a:schemeClr val="tx1"/>
                 </a:solidFill>
               </a:rPr>
-              <a:t>WB cap 1.5, CLAHE × 0.6 and ω 0.5 are the mildest values searched: the references prefer gentler processing than the grid allowed.</a:t>
-            </a:r>
-            <a:endParaRPr lang="en-US" sz="1300" dirty="0"/>
+              <a:t>The per-type gain cap was defined but never applied; now passed through.</a:t>
+            </a:r>
+            <a:endParaRPr lang="en-US" sz="1400" dirty="0"/>
+          </a:p>
+        </p:txBody>
+      </p:sp>
+      <p:sp>
+        <p:nvSpPr>
+          <p:cNvPr id="18" name="fix card 3"/>
+          <p:cNvSpPr/>
+          <p:nvPr/>
+        </p:nvSpPr>
+        <p:spPr>
+          <a:xfrm>
+            <a:off x="548640" y="3886200"/>
+            <a:ext cx="3515258" cy="2240280"/>
+          </a:xfrm>
+          <a:prstGeom prst="roundRect">
+            <a:avLst>
+              <a:gd name="adj" fmla="val 4898"/>
+            </a:avLst>
+          </a:prstGeom>
+          <a:solidFill>
+            <a:schemeClr val="bg2"/>
+          </a:solidFill>
+          <a:ln w="12700">
+            <a:solidFill>
+              <a:schemeClr val="bg2"/>
+            </a:solidFill>
+            <a:prstDash val="solid"/>
+          </a:ln>
+        </p:spPr>
+      </p:sp>
+      <p:sp>
+        <p:nvSpPr>
+          <p:cNvPr id="19" name="fix 3 circle"/>
+          <p:cNvSpPr/>
+          <p:nvPr/>
+        </p:nvSpPr>
+        <p:spPr>
+          <a:xfrm>
+            <a:off x="822960" y="4160520"/>
+            <a:ext cx="594360" cy="594360"/>
+          </a:xfrm>
+          <a:prstGeom prst="ellipse">
+            <a:avLst/>
+          </a:prstGeom>
+          <a:solidFill>
+            <a:schemeClr val="accent3"/>
+          </a:solidFill>
+          <a:ln w="12700">
+            <a:solidFill>
+              <a:schemeClr val="accent3"/>
+            </a:solidFill>
+            <a:prstDash val="solid"/>
+          </a:ln>
+        </p:spPr>
+      </p:sp>
+      <p:pic>
+        <p:nvPicPr>
+          <p:cNvPr id="20" name="fix 3 glyph" descr="preencoded.png">    </p:cNvPr>
+          <p:cNvPicPr>
+            <a:picLocks noChangeAspect="1"/>
+          </p:cNvPicPr>
+          <p:nvPr/>
+        </p:nvPicPr>
+        <p:blipFill>
+          <a:blip r:embed="rId4"/>
+          <a:stretch>
+            <a:fillRect/>
+          </a:stretch>
+        </p:blipFill>
+        <p:spPr>
+          <a:xfrm>
+            <a:off x="953719" y="4291279"/>
+            <a:ext cx="332842" cy="332842"/>
+          </a:xfrm>
+          <a:prstGeom prst="rect">
+            <a:avLst/>
+          </a:prstGeom>
+        </p:spPr>
+      </p:pic>
+      <p:sp>
+        <p:nvSpPr>
+          <p:cNvPr id="21" name="Text 15"/>
+          <p:cNvSpPr txBox="1"/>
+          <p:nvPr/>
+        </p:nvSpPr>
+        <p:spPr>
+          <a:xfrm>
+            <a:off x="1554480" y="4160520"/>
+            <a:ext cx="2326538" cy="594360"/>
+          </a:xfrm>
+          <a:prstGeom prst="rect">
+            <a:avLst/>
+          </a:prstGeom>
+          <a:noFill/>
+          <a:ln/>
+        </p:spPr>
+        <p:txBody>
+          <a:bodyPr wrap="square" lIns="0" tIns="0" rIns="0" bIns="0" rtlCol="0" anchor="ctr"/>
+          <a:lstStyle/>
+          <a:p>
+            <a:pPr indent="0" marL="0">
+              <a:buNone/>
+            </a:pPr>
+            <a:r>
+              <a:rPr lang="en-US" sz="1600" b="1" dirty="0">
+                <a:solidFill>
+                  <a:schemeClr val="tx2"/>
+                </a:solidFill>
+              </a:rPr>
+              <a:t>Tuned on the test images</a:t>
+            </a:r>
+            <a:endParaRPr lang="en-US" sz="1600" dirty="0"/>
+          </a:p>
+        </p:txBody>
+      </p:sp>
+      <p:sp>
+        <p:nvSpPr>
+          <p:cNvPr id="22" name="Text 16"/>
+          <p:cNvSpPr txBox="1"/>
+          <p:nvPr/>
+        </p:nvSpPr>
+        <p:spPr>
+          <a:xfrm>
+            <a:off x="822960" y="4937760"/>
+            <a:ext cx="2966618" cy="1097280"/>
+          </a:xfrm>
+          <a:prstGeom prst="rect">
+            <a:avLst/>
+          </a:prstGeom>
+          <a:noFill/>
+          <a:ln/>
+        </p:spPr>
+        <p:txBody>
+          <a:bodyPr wrap="square" lIns="0" tIns="0" rIns="0" bIns="0" rtlCol="0" anchor="t"/>
+          <a:lstStyle/>
+          <a:p>
+            <a:pPr indent="0" marL="0">
+              <a:buNone/>
+            </a:pPr>
+            <a:r>
+              <a:rPr lang="en-US" sz="1400" dirty="0">
+                <a:solidFill>
+                  <a:schemeClr val="tx1"/>
+                </a:solidFill>
+              </a:rPr>
+              <a:t>Hand-set profiles were judged on the same images; now a held-out 30/70 split.</a:t>
+            </a:r>
+            <a:endParaRPr lang="en-US" sz="1400" dirty="0"/>
+          </a:p>
+        </p:txBody>
+      </p:sp>
+      <p:sp>
+        <p:nvSpPr>
+          <p:cNvPr id="23" name="fix card 4"/>
+          <p:cNvSpPr/>
+          <p:nvPr/>
+        </p:nvSpPr>
+        <p:spPr>
+          <a:xfrm>
+            <a:off x="4338218" y="3886200"/>
+            <a:ext cx="3515258" cy="2240280"/>
+          </a:xfrm>
+          <a:prstGeom prst="roundRect">
+            <a:avLst>
+              <a:gd name="adj" fmla="val 4898"/>
+            </a:avLst>
+          </a:prstGeom>
+          <a:solidFill>
+            <a:schemeClr val="bg2"/>
+          </a:solidFill>
+          <a:ln w="12700">
+            <a:solidFill>
+              <a:schemeClr val="bg2"/>
+            </a:solidFill>
+            <a:prstDash val="solid"/>
+          </a:ln>
+        </p:spPr>
+      </p:sp>
+      <p:sp>
+        <p:nvSpPr>
+          <p:cNvPr id="24" name="fix 4 circle"/>
+          <p:cNvSpPr/>
+          <p:nvPr/>
+        </p:nvSpPr>
+        <p:spPr>
+          <a:xfrm>
+            <a:off x="4612538" y="4160520"/>
+            <a:ext cx="594360" cy="594360"/>
+          </a:xfrm>
+          <a:prstGeom prst="ellipse">
+            <a:avLst/>
+          </a:prstGeom>
+          <a:solidFill>
+            <a:schemeClr val="accent3"/>
+          </a:solidFill>
+          <a:ln w="12700">
+            <a:solidFill>
+              <a:schemeClr val="accent3"/>
+            </a:solidFill>
+            <a:prstDash val="solid"/>
+          </a:ln>
+        </p:spPr>
+      </p:sp>
+      <p:pic>
+        <p:nvPicPr>
+          <p:cNvPr id="25" name="fix 4 glyph" descr="preencoded.png">    </p:cNvPr>
+          <p:cNvPicPr>
+            <a:picLocks noChangeAspect="1"/>
+          </p:cNvPicPr>
+          <p:nvPr/>
+        </p:nvPicPr>
+        <p:blipFill>
+          <a:blip r:embed="rId5"/>
+          <a:stretch>
+            <a:fillRect/>
+          </a:stretch>
+        </p:blipFill>
+        <p:spPr>
+          <a:xfrm>
+            <a:off x="4743298" y="4291279"/>
+            <a:ext cx="332842" cy="332842"/>
+          </a:xfrm>
+          <a:prstGeom prst="rect">
+            <a:avLst/>
+          </a:prstGeom>
+        </p:spPr>
+      </p:pic>
+      <p:sp>
+        <p:nvSpPr>
+          <p:cNvPr id="26" name="Text 19"/>
+          <p:cNvSpPr txBox="1"/>
+          <p:nvPr/>
+        </p:nvSpPr>
+        <p:spPr>
+          <a:xfrm>
+            <a:off x="5344058" y="4160520"/>
+            <a:ext cx="2326538" cy="594360"/>
+          </a:xfrm>
+          <a:prstGeom prst="rect">
+            <a:avLst/>
+          </a:prstGeom>
+          <a:noFill/>
+          <a:ln/>
+        </p:spPr>
+        <p:txBody>
+          <a:bodyPr wrap="square" lIns="0" tIns="0" rIns="0" bIns="0" rtlCol="0" anchor="ctr"/>
+          <a:lstStyle/>
+          <a:p>
+            <a:pPr indent="0" marL="0">
+              <a:buNone/>
+            </a:pPr>
+            <a:r>
+              <a:rPr lang="en-US" sz="1600" b="1" dirty="0">
+                <a:solidFill>
+                  <a:schemeClr val="tx2"/>
+                </a:solidFill>
+              </a:rPr>
+              <a:t>No multiple-comparison control</a:t>
+            </a:r>
+            <a:endParaRPr lang="en-US" sz="1600" dirty="0"/>
+          </a:p>
+        </p:txBody>
+      </p:sp>
+      <p:sp>
+        <p:nvSpPr>
+          <p:cNvPr id="27" name="Text 20"/>
+          <p:cNvSpPr txBox="1"/>
+          <p:nvPr/>
+        </p:nvSpPr>
+        <p:spPr>
+          <a:xfrm>
+            <a:off x="4612538" y="4937760"/>
+            <a:ext cx="2966618" cy="1097280"/>
+          </a:xfrm>
+          <a:prstGeom prst="rect">
+            <a:avLst/>
+          </a:prstGeom>
+          <a:noFill/>
+          <a:ln/>
+        </p:spPr>
+        <p:txBody>
+          <a:bodyPr wrap="square" lIns="0" tIns="0" rIns="0" bIns="0" rtlCol="0" anchor="t"/>
+          <a:lstStyle/>
+          <a:p>
+            <a:pPr indent="0" marL="0">
+              <a:buNone/>
+            </a:pPr>
+            <a:r>
+              <a:rPr lang="en-US" sz="1400" dirty="0">
+                <a:solidFill>
+                  <a:schemeClr val="tx1"/>
+                </a:solidFill>
+              </a:rPr>
+              <a:t>25 raw p-values; now Holm correction, effect sizes and 95% CIs.</a:t>
+            </a:r>
+            <a:endParaRPr lang="en-US" sz="1400" dirty="0"/>
+          </a:p>
+        </p:txBody>
+      </p:sp>
+      <p:sp>
+        <p:nvSpPr>
+          <p:cNvPr id="28" name="fix card 5"/>
+          <p:cNvSpPr/>
+          <p:nvPr/>
+        </p:nvSpPr>
+        <p:spPr>
+          <a:xfrm>
+            <a:off x="8127797" y="3886200"/>
+            <a:ext cx="3515258" cy="2240280"/>
+          </a:xfrm>
+          <a:prstGeom prst="roundRect">
+            <a:avLst>
+              <a:gd name="adj" fmla="val 4898"/>
+            </a:avLst>
+          </a:prstGeom>
+          <a:solidFill>
+            <a:schemeClr val="bg2"/>
+          </a:solidFill>
+          <a:ln w="12700">
+            <a:solidFill>
+              <a:schemeClr val="bg2"/>
+            </a:solidFill>
+            <a:prstDash val="solid"/>
+          </a:ln>
+        </p:spPr>
+      </p:sp>
+      <p:sp>
+        <p:nvSpPr>
+          <p:cNvPr id="29" name="fix 5 circle"/>
+          <p:cNvSpPr/>
+          <p:nvPr/>
+        </p:nvSpPr>
+        <p:spPr>
+          <a:xfrm>
+            <a:off x="8402117" y="4160520"/>
+            <a:ext cx="594360" cy="594360"/>
+          </a:xfrm>
+          <a:prstGeom prst="ellipse">
+            <a:avLst/>
+          </a:prstGeom>
+          <a:solidFill>
+            <a:schemeClr val="accent3"/>
+          </a:solidFill>
+          <a:ln w="12700">
+            <a:solidFill>
+              <a:schemeClr val="accent3"/>
+            </a:solidFill>
+            <a:prstDash val="solid"/>
+          </a:ln>
+        </p:spPr>
+      </p:sp>
+      <p:pic>
+        <p:nvPicPr>
+          <p:cNvPr id="30" name="fix 5 glyph" descr="preencoded.png">    </p:cNvPr>
+          <p:cNvPicPr>
+            <a:picLocks noChangeAspect="1"/>
+          </p:cNvPicPr>
+          <p:nvPr/>
+        </p:nvPicPr>
+        <p:blipFill>
+          <a:blip r:embed="rId6"/>
+          <a:stretch>
+            <a:fillRect/>
+          </a:stretch>
+        </p:blipFill>
+        <p:spPr>
+          <a:xfrm>
+            <a:off x="8532876" y="4291279"/>
+            <a:ext cx="332842" cy="332842"/>
+          </a:xfrm>
+          <a:prstGeom prst="rect">
+            <a:avLst/>
+          </a:prstGeom>
+        </p:spPr>
+      </p:pic>
+      <p:sp>
+        <p:nvSpPr>
+          <p:cNvPr id="31" name="Text 23"/>
+          <p:cNvSpPr txBox="1"/>
+          <p:nvPr/>
+        </p:nvSpPr>
+        <p:spPr>
+          <a:xfrm>
+            <a:off x="9133637" y="4160520"/>
+            <a:ext cx="2326538" cy="594360"/>
+          </a:xfrm>
+          <a:prstGeom prst="rect">
+            <a:avLst/>
+          </a:prstGeom>
+          <a:noFill/>
+          <a:ln/>
+        </p:spPr>
+        <p:txBody>
+          <a:bodyPr wrap="square" lIns="0" tIns="0" rIns="0" bIns="0" rtlCol="0" anchor="ctr"/>
+          <a:lstStyle/>
+          <a:p>
+            <a:pPr indent="0" marL="0">
+              <a:buNone/>
+            </a:pPr>
+            <a:r>
+              <a:rPr lang="en-US" sz="1600" b="1" dirty="0">
+                <a:solidFill>
+                  <a:schemeClr val="tx2"/>
+                </a:solidFill>
+              </a:rPr>
+              <a:t>Gamma convention inverted</a:t>
+            </a:r>
+            <a:endParaRPr lang="en-US" sz="1600" dirty="0"/>
+          </a:p>
+        </p:txBody>
+      </p:sp>
+      <p:sp>
+        <p:nvSpPr>
+          <p:cNvPr id="32" name="Text 24"/>
+          <p:cNvSpPr txBox="1"/>
+          <p:nvPr/>
+        </p:nvSpPr>
+        <p:spPr>
+          <a:xfrm>
+            <a:off x="8402117" y="4937760"/>
+            <a:ext cx="2966618" cy="1097280"/>
+          </a:xfrm>
+          <a:prstGeom prst="rect">
+            <a:avLst/>
+          </a:prstGeom>
+          <a:noFill/>
+          <a:ln/>
+        </p:spPr>
+        <p:txBody>
+          <a:bodyPr wrap="square" lIns="0" tIns="0" rIns="0" bIns="0" rtlCol="0" anchor="t"/>
+          <a:lstStyle/>
+          <a:p>
+            <a:pPr indent="0" marL="0">
+              <a:buNone/>
+            </a:pPr>
+            <a:r>
+              <a:rPr lang="en-US" sz="1400" dirty="0">
+                <a:solidFill>
+                  <a:schemeClr val="tx1"/>
+                </a:solidFill>
+              </a:rPr>
+              <a:t>γ was derived for input^γ but applied as input^(1/γ), inverting the adaptivity; fixed and re-calibrated.</a:t>
+            </a:r>
+            <a:endParaRPr lang="en-US" sz="1400" dirty="0"/>
           </a:p>
         </p:txBody>
       </p:sp>
@@ -8605,7 +8905,7 @@
                   <a:schemeClr val="tx2"/>
                 </a:solidFill>
               </a:rPr>
-              <a:t>Rigour: issues we found and fixed</a:t>
+              <a:t>Live demo</a:t>
             </a:r>
             <a:endParaRPr lang="en-US" sz="3200" dirty="0"/>
           </a:p>
@@ -8613,26 +8913,24 @@
       </p:sp>
       <p:sp>
         <p:nvSpPr>
-          <p:cNvPr id="3" name="fix card 0"/>
+          <p:cNvPr id="3" name="demo step 1"/>
           <p:cNvSpPr/>
           <p:nvPr/>
         </p:nvSpPr>
         <p:spPr>
           <a:xfrm>
             <a:off x="548640" y="1371600"/>
-            <a:ext cx="3515258" cy="2240280"/>
-          </a:xfrm>
-          <a:prstGeom prst="roundRect">
-            <a:avLst>
-              <a:gd name="adj" fmla="val 4898"/>
-            </a:avLst>
+            <a:ext cx="502920" cy="502920"/>
+          </a:xfrm>
+          <a:prstGeom prst="ellipse">
+            <a:avLst/>
           </a:prstGeom>
           <a:solidFill>
-            <a:schemeClr val="bg2"/>
+            <a:schemeClr val="accent1"/>
           </a:solidFill>
           <a:ln w="12700">
             <a:solidFill>
-              <a:schemeClr val="bg2"/>
+              <a:schemeClr val="accent1"/>
             </a:solidFill>
             <a:prstDash val="solid"/>
           </a:ln>
@@ -8640,32 +8938,616 @@
       </p:sp>
       <p:sp>
         <p:nvSpPr>
-          <p:cNvPr id="4" name="fix 0 circle"/>
+          <p:cNvPr id="4" name="Text 2"/>
+          <p:cNvSpPr txBox="1"/>
+          <p:nvPr/>
+        </p:nvSpPr>
+        <p:spPr>
+          <a:xfrm>
+            <a:off x="548640" y="1371600"/>
+            <a:ext cx="502920" cy="502920"/>
+          </a:xfrm>
+          <a:prstGeom prst="rect">
+            <a:avLst/>
+          </a:prstGeom>
+          <a:noFill/>
+          <a:ln/>
+        </p:spPr>
+        <p:txBody>
+          <a:bodyPr wrap="square" lIns="0" tIns="0" rIns="0" bIns="0" rtlCol="0" anchor="ctr"/>
+          <a:lstStyle/>
+          <a:p>
+            <a:pPr algn="ctr" indent="0" marL="0">
+              <a:buNone/>
+            </a:pPr>
+            <a:r>
+              <a:rPr lang="en-US" sz="1600" b="1" dirty="0">
+                <a:solidFill>
+                  <a:schemeClr val="bg1"/>
+                </a:solidFill>
+              </a:rPr>
+              <a:t>1</a:t>
+            </a:r>
+            <a:endParaRPr lang="en-US" sz="1600" dirty="0"/>
+          </a:p>
+        </p:txBody>
+      </p:sp>
+      <p:sp>
+        <p:nvSpPr>
+          <p:cNvPr id="5" name="Text 3"/>
+          <p:cNvSpPr txBox="1"/>
+          <p:nvPr/>
+        </p:nvSpPr>
+        <p:spPr>
+          <a:xfrm>
+            <a:off x="1280160" y="1371600"/>
+            <a:ext cx="6766560" cy="502920"/>
+          </a:xfrm>
+          <a:prstGeom prst="rect">
+            <a:avLst/>
+          </a:prstGeom>
+          <a:noFill/>
+          <a:ln/>
+        </p:spPr>
+        <p:txBody>
+          <a:bodyPr wrap="square" lIns="0" tIns="0" rIns="0" bIns="0" rtlCol="0" anchor="ctr"/>
+          <a:lstStyle/>
+          <a:p>
+            <a:pPr indent="0" marL="0">
+              <a:buNone/>
+            </a:pPr>
+            <a:r>
+              <a:rPr lang="en-US" sz="1600" dirty="0">
+                <a:solidFill>
+                  <a:schemeClr val="tx1"/>
+                </a:solidFill>
+              </a:rPr>
+              <a:t>Compare tab: pick 773_img_ (green turbid) and compare against every method</a:t>
+            </a:r>
+            <a:endParaRPr lang="en-US" sz="1600" dirty="0"/>
+          </a:p>
+        </p:txBody>
+      </p:sp>
+      <p:sp>
+        <p:nvSpPr>
+          <p:cNvPr id="6" name="demo step 2"/>
           <p:cNvSpPr/>
           <p:nvPr/>
         </p:nvSpPr>
         <p:spPr>
           <a:xfrm>
-            <a:off x="822960" y="1645920"/>
-            <a:ext cx="594360" cy="594360"/>
+            <a:off x="548640" y="2148840"/>
+            <a:ext cx="502920" cy="502920"/>
           </a:xfrm>
           <a:prstGeom prst="ellipse">
             <a:avLst/>
           </a:prstGeom>
           <a:solidFill>
-            <a:schemeClr val="accent3"/>
+            <a:schemeClr val="accent1"/>
           </a:solidFill>
           <a:ln w="12700">
             <a:solidFill>
-              <a:schemeClr val="accent3"/>
+              <a:schemeClr val="accent1"/>
             </a:solidFill>
             <a:prstDash val="solid"/>
           </a:ln>
         </p:spPr>
       </p:sp>
+      <p:sp>
+        <p:nvSpPr>
+          <p:cNvPr id="7" name="Text 5"/>
+          <p:cNvSpPr txBox="1"/>
+          <p:nvPr/>
+        </p:nvSpPr>
+        <p:spPr>
+          <a:xfrm>
+            <a:off x="548640" y="2148840"/>
+            <a:ext cx="502920" cy="502920"/>
+          </a:xfrm>
+          <a:prstGeom prst="rect">
+            <a:avLst/>
+          </a:prstGeom>
+          <a:noFill/>
+          <a:ln/>
+        </p:spPr>
+        <p:txBody>
+          <a:bodyPr wrap="square" lIns="0" tIns="0" rIns="0" bIns="0" rtlCol="0" anchor="ctr"/>
+          <a:lstStyle/>
+          <a:p>
+            <a:pPr algn="ctr" indent="0" marL="0">
+              <a:buNone/>
+            </a:pPr>
+            <a:r>
+              <a:rPr lang="en-US" sz="1600" b="1" dirty="0">
+                <a:solidFill>
+                  <a:schemeClr val="bg1"/>
+                </a:solidFill>
+              </a:rPr>
+              <a:t>2</a:t>
+            </a:r>
+            <a:endParaRPr lang="en-US" sz="1600" dirty="0"/>
+          </a:p>
+        </p:txBody>
+      </p:sp>
+      <p:sp>
+        <p:nvSpPr>
+          <p:cNvPr id="8" name="Text 6"/>
+          <p:cNvSpPr txBox="1"/>
+          <p:nvPr/>
+        </p:nvSpPr>
+        <p:spPr>
+          <a:xfrm>
+            <a:off x="1280160" y="2148840"/>
+            <a:ext cx="6766560" cy="502920"/>
+          </a:xfrm>
+          <a:prstGeom prst="rect">
+            <a:avLst/>
+          </a:prstGeom>
+          <a:noFill/>
+          <a:ln/>
+        </p:spPr>
+        <p:txBody>
+          <a:bodyPr wrap="square" lIns="0" tIns="0" rIns="0" bIns="0" rtlCol="0" anchor="ctr"/>
+          <a:lstStyle/>
+          <a:p>
+            <a:pPr indent="0" marL="0">
+              <a:buNone/>
+            </a:pPr>
+            <a:r>
+              <a:rPr lang="en-US" sz="1600" dirty="0">
+                <a:solidFill>
+                  <a:schemeClr val="tx1"/>
+                </a:solidFill>
+              </a:rPr>
+              <a:t>Pipeline tab: walk the stages and drag the α preview slider</a:t>
+            </a:r>
+            <a:endParaRPr lang="en-US" sz="1600" dirty="0"/>
+          </a:p>
+        </p:txBody>
+      </p:sp>
+      <p:sp>
+        <p:nvSpPr>
+          <p:cNvPr id="9" name="demo step 3"/>
+          <p:cNvSpPr/>
+          <p:nvPr/>
+        </p:nvSpPr>
+        <p:spPr>
+          <a:xfrm>
+            <a:off x="548640" y="2926080"/>
+            <a:ext cx="502920" cy="502920"/>
+          </a:xfrm>
+          <a:prstGeom prst="ellipse">
+            <a:avLst/>
+          </a:prstGeom>
+          <a:solidFill>
+            <a:schemeClr val="accent1"/>
+          </a:solidFill>
+          <a:ln w="12700">
+            <a:solidFill>
+              <a:schemeClr val="accent1"/>
+            </a:solidFill>
+            <a:prstDash val="solid"/>
+          </a:ln>
+        </p:spPr>
+      </p:sp>
+      <p:sp>
+        <p:nvSpPr>
+          <p:cNvPr id="10" name="Text 8"/>
+          <p:cNvSpPr txBox="1"/>
+          <p:nvPr/>
+        </p:nvSpPr>
+        <p:spPr>
+          <a:xfrm>
+            <a:off x="548640" y="2926080"/>
+            <a:ext cx="502920" cy="502920"/>
+          </a:xfrm>
+          <a:prstGeom prst="rect">
+            <a:avLst/>
+          </a:prstGeom>
+          <a:noFill/>
+          <a:ln/>
+        </p:spPr>
+        <p:txBody>
+          <a:bodyPr wrap="square" lIns="0" tIns="0" rIns="0" bIns="0" rtlCol="0" anchor="ctr"/>
+          <a:lstStyle/>
+          <a:p>
+            <a:pPr algn="ctr" indent="0" marL="0">
+              <a:buNone/>
+            </a:pPr>
+            <a:r>
+              <a:rPr lang="en-US" sz="1600" b="1" dirty="0">
+                <a:solidFill>
+                  <a:schemeClr val="bg1"/>
+                </a:solidFill>
+              </a:rPr>
+              <a:t>3</a:t>
+            </a:r>
+            <a:endParaRPr lang="en-US" sz="1600" dirty="0"/>
+          </a:p>
+        </p:txBody>
+      </p:sp>
+      <p:sp>
+        <p:nvSpPr>
+          <p:cNvPr id="11" name="Text 9"/>
+          <p:cNvSpPr txBox="1"/>
+          <p:nvPr/>
+        </p:nvSpPr>
+        <p:spPr>
+          <a:xfrm>
+            <a:off x="1280160" y="2926080"/>
+            <a:ext cx="6766560" cy="502920"/>
+          </a:xfrm>
+          <a:prstGeom prst="rect">
+            <a:avLst/>
+          </a:prstGeom>
+          <a:noFill/>
+          <a:ln/>
+        </p:spPr>
+        <p:txBody>
+          <a:bodyPr wrap="square" lIns="0" tIns="0" rIns="0" bIns="0" rtlCol="0" anchor="ctr"/>
+          <a:lstStyle/>
+          <a:p>
+            <a:pPr indent="0" marL="0">
+              <a:buNone/>
+            </a:pPr>
+            <a:r>
+              <a:rPr lang="en-US" sz="1600" dirty="0">
+                <a:solidFill>
+                  <a:schemeClr val="tx1"/>
+                </a:solidFill>
+              </a:rPr>
+              <a:t>Toggle Module 5 and Module 7 off and on, watching PSNR/SSIM in the header</a:t>
+            </a:r>
+            <a:endParaRPr lang="en-US" sz="1600" dirty="0"/>
+          </a:p>
+        </p:txBody>
+      </p:sp>
+      <p:sp>
+        <p:nvSpPr>
+          <p:cNvPr id="12" name="demo step 4"/>
+          <p:cNvSpPr/>
+          <p:nvPr/>
+        </p:nvSpPr>
+        <p:spPr>
+          <a:xfrm>
+            <a:off x="548640" y="3703320"/>
+            <a:ext cx="502920" cy="502920"/>
+          </a:xfrm>
+          <a:prstGeom prst="ellipse">
+            <a:avLst/>
+          </a:prstGeom>
+          <a:solidFill>
+            <a:schemeClr val="accent1"/>
+          </a:solidFill>
+          <a:ln w="12700">
+            <a:solidFill>
+              <a:schemeClr val="accent1"/>
+            </a:solidFill>
+            <a:prstDash val="solid"/>
+          </a:ln>
+        </p:spPr>
+      </p:sp>
+      <p:sp>
+        <p:nvSpPr>
+          <p:cNvPr id="13" name="Text 11"/>
+          <p:cNvSpPr txBox="1"/>
+          <p:nvPr/>
+        </p:nvSpPr>
+        <p:spPr>
+          <a:xfrm>
+            <a:off x="548640" y="3703320"/>
+            <a:ext cx="502920" cy="502920"/>
+          </a:xfrm>
+          <a:prstGeom prst="rect">
+            <a:avLst/>
+          </a:prstGeom>
+          <a:noFill/>
+          <a:ln/>
+        </p:spPr>
+        <p:txBody>
+          <a:bodyPr wrap="square" lIns="0" tIns="0" rIns="0" bIns="0" rtlCol="0" anchor="ctr"/>
+          <a:lstStyle/>
+          <a:p>
+            <a:pPr algn="ctr" indent="0" marL="0">
+              <a:buNone/>
+            </a:pPr>
+            <a:r>
+              <a:rPr lang="en-US" sz="1600" b="1" dirty="0">
+                <a:solidFill>
+                  <a:schemeClr val="bg1"/>
+                </a:solidFill>
+              </a:rPr>
+              <a:t>4</a:t>
+            </a:r>
+            <a:endParaRPr lang="en-US" sz="1600" dirty="0"/>
+          </a:p>
+        </p:txBody>
+      </p:sp>
+      <p:sp>
+        <p:nvSpPr>
+          <p:cNvPr id="14" name="Text 12"/>
+          <p:cNvSpPr txBox="1"/>
+          <p:nvPr/>
+        </p:nvSpPr>
+        <p:spPr>
+          <a:xfrm>
+            <a:off x="1280160" y="3703320"/>
+            <a:ext cx="6766560" cy="502920"/>
+          </a:xfrm>
+          <a:prstGeom prst="rect">
+            <a:avLst/>
+          </a:prstGeom>
+          <a:noFill/>
+          <a:ln/>
+        </p:spPr>
+        <p:txBody>
+          <a:bodyPr wrap="square" lIns="0" tIns="0" rIns="0" bIns="0" rtlCol="0" anchor="ctr"/>
+          <a:lstStyle/>
+          <a:p>
+            <a:pPr indent="0" marL="0">
+              <a:buNone/>
+            </a:pPr>
+            <a:r>
+              <a:rPr lang="en-US" sz="1600" dirty="0">
+                <a:solidFill>
+                  <a:schemeClr val="tx1"/>
+                </a:solidFill>
+              </a:rPr>
+              <a:t>Metrics tab: no-reference scores vs. the PSNR/SSIM table</a:t>
+            </a:r>
+            <a:endParaRPr lang="en-US" sz="1600" dirty="0"/>
+          </a:p>
+        </p:txBody>
+      </p:sp>
+      <p:sp>
+        <p:nvSpPr>
+          <p:cNvPr id="15" name="demo step 5"/>
+          <p:cNvSpPr/>
+          <p:nvPr/>
+        </p:nvSpPr>
+        <p:spPr>
+          <a:xfrm>
+            <a:off x="548640" y="4480560"/>
+            <a:ext cx="502920" cy="502920"/>
+          </a:xfrm>
+          <a:prstGeom prst="ellipse">
+            <a:avLst/>
+          </a:prstGeom>
+          <a:solidFill>
+            <a:schemeClr val="accent1"/>
+          </a:solidFill>
+          <a:ln w="12700">
+            <a:solidFill>
+              <a:schemeClr val="accent1"/>
+            </a:solidFill>
+            <a:prstDash val="solid"/>
+          </a:ln>
+        </p:spPr>
+      </p:sp>
+      <p:sp>
+        <p:nvSpPr>
+          <p:cNvPr id="16" name="Text 14"/>
+          <p:cNvSpPr txBox="1"/>
+          <p:nvPr/>
+        </p:nvSpPr>
+        <p:spPr>
+          <a:xfrm>
+            <a:off x="548640" y="4480560"/>
+            <a:ext cx="502920" cy="502920"/>
+          </a:xfrm>
+          <a:prstGeom prst="rect">
+            <a:avLst/>
+          </a:prstGeom>
+          <a:noFill/>
+          <a:ln/>
+        </p:spPr>
+        <p:txBody>
+          <a:bodyPr wrap="square" lIns="0" tIns="0" rIns="0" bIns="0" rtlCol="0" anchor="ctr"/>
+          <a:lstStyle/>
+          <a:p>
+            <a:pPr algn="ctr" indent="0" marL="0">
+              <a:buNone/>
+            </a:pPr>
+            <a:r>
+              <a:rPr lang="en-US" sz="1600" b="1" dirty="0">
+                <a:solidFill>
+                  <a:schemeClr val="bg1"/>
+                </a:solidFill>
+              </a:rPr>
+              <a:t>5</a:t>
+            </a:r>
+            <a:endParaRPr lang="en-US" sz="1600" dirty="0"/>
+          </a:p>
+        </p:txBody>
+      </p:sp>
+      <p:sp>
+        <p:nvSpPr>
+          <p:cNvPr id="17" name="Text 15"/>
+          <p:cNvSpPr txBox="1"/>
+          <p:nvPr/>
+        </p:nvSpPr>
+        <p:spPr>
+          <a:xfrm>
+            <a:off x="1280160" y="4480560"/>
+            <a:ext cx="6766560" cy="502920"/>
+          </a:xfrm>
+          <a:prstGeom prst="rect">
+            <a:avLst/>
+          </a:prstGeom>
+          <a:noFill/>
+          <a:ln/>
+        </p:spPr>
+        <p:txBody>
+          <a:bodyPr wrap="square" lIns="0" tIns="0" rIns="0" bIns="0" rtlCol="0" anchor="ctr"/>
+          <a:lstStyle/>
+          <a:p>
+            <a:pPr indent="0" marL="0">
+              <a:buNone/>
+            </a:pPr>
+            <a:r>
+              <a:rPr lang="en-US" sz="1600" dirty="0">
+                <a:solidFill>
+                  <a:schemeClr val="tx1"/>
+                </a:solidFill>
+              </a:rPr>
+              <a:t>Downstream tab: run ORB keypoint and edge validation</a:t>
+            </a:r>
+            <a:endParaRPr lang="en-US" sz="1600" dirty="0"/>
+          </a:p>
+        </p:txBody>
+      </p:sp>
+      <p:sp>
+        <p:nvSpPr>
+          <p:cNvPr id="18" name="demo step 6"/>
+          <p:cNvSpPr/>
+          <p:nvPr/>
+        </p:nvSpPr>
+        <p:spPr>
+          <a:xfrm>
+            <a:off x="548640" y="5257800"/>
+            <a:ext cx="502920" cy="502920"/>
+          </a:xfrm>
+          <a:prstGeom prst="ellipse">
+            <a:avLst/>
+          </a:prstGeom>
+          <a:solidFill>
+            <a:schemeClr val="accent1"/>
+          </a:solidFill>
+          <a:ln w="12700">
+            <a:solidFill>
+              <a:schemeClr val="accent1"/>
+            </a:solidFill>
+            <a:prstDash val="solid"/>
+          </a:ln>
+        </p:spPr>
+      </p:sp>
+      <p:sp>
+        <p:nvSpPr>
+          <p:cNvPr id="19" name="Text 17"/>
+          <p:cNvSpPr txBox="1"/>
+          <p:nvPr/>
+        </p:nvSpPr>
+        <p:spPr>
+          <a:xfrm>
+            <a:off x="548640" y="5257800"/>
+            <a:ext cx="502920" cy="502920"/>
+          </a:xfrm>
+          <a:prstGeom prst="rect">
+            <a:avLst/>
+          </a:prstGeom>
+          <a:noFill/>
+          <a:ln/>
+        </p:spPr>
+        <p:txBody>
+          <a:bodyPr wrap="square" lIns="0" tIns="0" rIns="0" bIns="0" rtlCol="0" anchor="ctr"/>
+          <a:lstStyle/>
+          <a:p>
+            <a:pPr algn="ctr" indent="0" marL="0">
+              <a:buNone/>
+            </a:pPr>
+            <a:r>
+              <a:rPr lang="en-US" sz="1600" b="1" dirty="0">
+                <a:solidFill>
+                  <a:schemeClr val="bg1"/>
+                </a:solidFill>
+              </a:rPr>
+              <a:t>6</a:t>
+            </a:r>
+            <a:endParaRPr lang="en-US" sz="1600" dirty="0"/>
+          </a:p>
+        </p:txBody>
+      </p:sp>
+      <p:sp>
+        <p:nvSpPr>
+          <p:cNvPr id="20" name="Text 18"/>
+          <p:cNvSpPr txBox="1"/>
+          <p:nvPr/>
+        </p:nvSpPr>
+        <p:spPr>
+          <a:xfrm>
+            <a:off x="1280160" y="5257800"/>
+            <a:ext cx="6766560" cy="502920"/>
+          </a:xfrm>
+          <a:prstGeom prst="rect">
+            <a:avLst/>
+          </a:prstGeom>
+          <a:noFill/>
+          <a:ln/>
+        </p:spPr>
+        <p:txBody>
+          <a:bodyPr wrap="square" lIns="0" tIns="0" rIns="0" bIns="0" rtlCol="0" anchor="ctr"/>
+          <a:lstStyle/>
+          <a:p>
+            <a:pPr indent="0" marL="0">
+              <a:buNone/>
+            </a:pPr>
+            <a:r>
+              <a:rPr lang="en-US" sz="1600" dirty="0">
+                <a:solidFill>
+                  <a:schemeClr val="tx1"/>
+                </a:solidFill>
+              </a:rPr>
+              <a:t>Switch to 699_img_ (clear blue) to show the limitation</a:t>
+            </a:r>
+            <a:endParaRPr lang="en-US" sz="1600" dirty="0"/>
+          </a:p>
+        </p:txBody>
+      </p:sp>
+      <p:sp>
+        <p:nvSpPr>
+          <p:cNvPr id="21" name="demo card"/>
+          <p:cNvSpPr/>
+          <p:nvPr/>
+        </p:nvSpPr>
+        <p:spPr>
+          <a:xfrm>
+            <a:off x="8229600" y="1371600"/>
+            <a:ext cx="3413455" cy="4572000"/>
+          </a:xfrm>
+          <a:prstGeom prst="roundRect">
+            <a:avLst>
+              <a:gd name="adj" fmla="val 3215"/>
+            </a:avLst>
+          </a:prstGeom>
+          <a:solidFill>
+            <a:schemeClr val="tx2"/>
+          </a:solidFill>
+          <a:ln w="12700">
+            <a:solidFill>
+              <a:schemeClr val="tx2"/>
+            </a:solidFill>
+            <a:prstDash val="solid"/>
+          </a:ln>
+        </p:spPr>
+      </p:sp>
+      <p:sp>
+        <p:nvSpPr>
+          <p:cNvPr id="22" name="demo circle"/>
+          <p:cNvSpPr/>
+          <p:nvPr/>
+        </p:nvSpPr>
+        <p:spPr>
+          <a:xfrm>
+            <a:off x="9296248" y="1828800"/>
+            <a:ext cx="1280160" cy="1280160"/>
+          </a:xfrm>
+          <a:prstGeom prst="ellipse">
+            <a:avLst/>
+          </a:prstGeom>
+          <a:solidFill>
+            <a:schemeClr val="accent1"/>
+          </a:solidFill>
+          <a:ln w="12700">
+            <a:solidFill>
+              <a:schemeClr val="accent1"/>
+            </a:solidFill>
+            <a:prstDash val="solid"/>
+          </a:ln>
+        </p:spPr>
+      </p:sp>
       <p:pic>
         <p:nvPicPr>
-          <p:cNvPr id="5" name="fix 0 glyph" descr="preencoded.png">    </p:cNvPr>
+          <p:cNvPr id="23" name="demo glyph" descr="preencoded.png">    </p:cNvPr>
           <p:cNvPicPr>
             <a:picLocks noChangeAspect="1"/>
           </p:cNvPicPr>
@@ -8679,8 +9561,8 @@
         </p:blipFill>
         <p:spPr>
           <a:xfrm>
-            <a:off x="953719" y="1776679"/>
-            <a:ext cx="332842" cy="332842"/>
+            <a:off x="9577883" y="2110435"/>
+            <a:ext cx="716890" cy="716890"/>
           </a:xfrm>
           <a:prstGeom prst="rect">
             <a:avLst/>
@@ -8689,50 +9571,50 @@
       </p:pic>
       <p:sp>
         <p:nvSpPr>
-          <p:cNvPr id="6" name="Text 3"/>
+          <p:cNvPr id="24" name="Text 21"/>
           <p:cNvSpPr txBox="1"/>
           <p:nvPr/>
         </p:nvSpPr>
         <p:spPr>
           <a:xfrm>
-            <a:off x="1554480" y="1645920"/>
-            <a:ext cx="2326538" cy="594360"/>
-          </a:xfrm>
-          <a:prstGeom prst="rect">
-            <a:avLst/>
-          </a:prstGeom>
-          <a:noFill/>
-          <a:ln/>
-        </p:spPr>
-        <p:txBody>
-          <a:bodyPr wrap="square" lIns="0" tIns="0" rIns="0" bIns="0" rtlCol="0" anchor="ctr"/>
-          <a:lstStyle/>
-          <a:p>
-            <a:pPr indent="0" marL="0">
-              <a:buNone/>
-            </a:pPr>
-            <a:r>
-              <a:rPr lang="en-US" sz="1600" b="1" dirty="0">
-                <a:solidFill>
-                  <a:schemeClr val="tx2"/>
-                </a:solidFill>
-              </a:rPr>
-              <a:t>UCIQE on 8-bit Lab</a:t>
-            </a:r>
-            <a:endParaRPr lang="en-US" sz="1600" dirty="0"/>
-          </a:p>
-        </p:txBody>
-      </p:sp>
-      <p:sp>
-        <p:nvSpPr>
-          <p:cNvPr id="7" name="Text 4"/>
+            <a:off x="8503920" y="3337560"/>
+            <a:ext cx="2864815" cy="411480"/>
+          </a:xfrm>
+          <a:prstGeom prst="rect">
+            <a:avLst/>
+          </a:prstGeom>
+          <a:noFill/>
+          <a:ln/>
+        </p:spPr>
+        <p:txBody>
+          <a:bodyPr wrap="square" lIns="0" tIns="0" rIns="0" bIns="0" rtlCol="0" anchor="t"/>
+          <a:lstStyle/>
+          <a:p>
+            <a:pPr algn="ctr" indent="0" marL="0">
+              <a:buNone/>
+            </a:pPr>
+            <a:r>
+              <a:rPr lang="en-US" sz="2000" b="1" dirty="0">
+                <a:solidFill>
+                  <a:schemeClr val="bg1"/>
+                </a:solidFill>
+              </a:rPr>
+              <a:t>Streamlit app</a:t>
+            </a:r>
+            <a:endParaRPr lang="en-US" sz="2000" dirty="0"/>
+          </a:p>
+        </p:txBody>
+      </p:sp>
+      <p:sp>
+        <p:nvSpPr>
+          <p:cNvPr id="25" name="Text 22"/>
           <p:cNvSpPr txBox="1"/>
           <p:nvPr/>
         </p:nvSpPr>
         <p:spPr>
           <a:xfrm>
-            <a:off x="822960" y="2423160"/>
-            <a:ext cx="2966618" cy="1097280"/>
+            <a:off x="8503920" y="3840480"/>
+            <a:ext cx="2864815" cy="411480"/>
           </a:xfrm>
           <a:prstGeom prst="rect">
             <a:avLst/>
@@ -8744,756 +9626,55 @@
           <a:bodyPr wrap="square" lIns="0" tIns="0" rIns="0" bIns="0" rtlCol="0" anchor="t"/>
           <a:lstStyle/>
           <a:p>
-            <a:pPr indent="0" marL="0">
+            <a:pPr algn="ctr" indent="0" marL="0">
+              <a:buNone/>
+            </a:pPr>
+            <a:r>
+              <a:rPr lang="en-US" sz="1300" dirty="0">
+                <a:solidFill>
+                  <a:schemeClr val="bg2"/>
+                </a:solidFill>
+                <a:latin typeface="Courier New" pitchFamily="34" charset="0"/>
+                <a:ea typeface="Courier New" pitchFamily="34" charset="-122"/>
+                <a:cs typeface="Courier New" pitchFamily="34" charset="-120"/>
+              </a:rPr>
+              <a:t>streamlit run app/streamlit_app.py</a:t>
+            </a:r>
+            <a:endParaRPr lang="en-US" sz="1300" dirty="0"/>
+          </a:p>
+        </p:txBody>
+      </p:sp>
+      <p:sp>
+        <p:nvSpPr>
+          <p:cNvPr id="26" name="Text 23"/>
+          <p:cNvSpPr txBox="1"/>
+          <p:nvPr/>
+        </p:nvSpPr>
+        <p:spPr>
+          <a:xfrm>
+            <a:off x="8503920" y="4480560"/>
+            <a:ext cx="2864815" cy="822960"/>
+          </a:xfrm>
+          <a:prstGeom prst="rect">
+            <a:avLst/>
+          </a:prstGeom>
+          <a:noFill/>
+          <a:ln/>
+        </p:spPr>
+        <p:txBody>
+          <a:bodyPr wrap="square" lIns="0" tIns="0" rIns="0" bIns="0" rtlCol="0" anchor="t"/>
+          <a:lstStyle/>
+          <a:p>
+            <a:pPr algn="ctr" indent="0" marL="0">
               <a:buNone/>
             </a:pPr>
             <a:r>
               <a:rPr lang="en-US" sz="1400" dirty="0">
                 <a:solidFill>
-                  <a:schemeClr val="tx1"/>
-                </a:solidFill>
-              </a:rPr>
-              <a:t>OpenCV's encoding made grey pixels read as chroma ≈181; now computed in true CIELAB.</a:t>
-            </a:r>
-            <a:endParaRPr lang="en-US" sz="1400" dirty="0"/>
-          </a:p>
-        </p:txBody>
-      </p:sp>
-      <p:sp>
-        <p:nvSpPr>
-          <p:cNvPr id="8" name="fix card 1"/>
-          <p:cNvSpPr/>
-          <p:nvPr/>
-        </p:nvSpPr>
-        <p:spPr>
-          <a:xfrm>
-            <a:off x="4338218" y="1371600"/>
-            <a:ext cx="3515258" cy="2240280"/>
-          </a:xfrm>
-          <a:prstGeom prst="roundRect">
-            <a:avLst>
-              <a:gd name="adj" fmla="val 4898"/>
-            </a:avLst>
-          </a:prstGeom>
-          <a:solidFill>
-            <a:schemeClr val="bg2"/>
-          </a:solidFill>
-          <a:ln w="12700">
-            <a:solidFill>
-              <a:schemeClr val="bg2"/>
-            </a:solidFill>
-            <a:prstDash val="solid"/>
-          </a:ln>
-        </p:spPr>
-      </p:sp>
-      <p:sp>
-        <p:nvSpPr>
-          <p:cNvPr id="9" name="fix 1 circle"/>
-          <p:cNvSpPr/>
-          <p:nvPr/>
-        </p:nvSpPr>
-        <p:spPr>
-          <a:xfrm>
-            <a:off x="4612538" y="1645920"/>
-            <a:ext cx="594360" cy="594360"/>
-          </a:xfrm>
-          <a:prstGeom prst="ellipse">
-            <a:avLst/>
-          </a:prstGeom>
-          <a:solidFill>
-            <a:schemeClr val="accent3"/>
-          </a:solidFill>
-          <a:ln w="12700">
-            <a:solidFill>
-              <a:schemeClr val="accent3"/>
-            </a:solidFill>
-            <a:prstDash val="solid"/>
-          </a:ln>
-        </p:spPr>
-      </p:sp>
-      <p:pic>
-        <p:nvPicPr>
-          <p:cNvPr id="10" name="fix 1 glyph" descr="preencoded.png">    </p:cNvPr>
-          <p:cNvPicPr>
-            <a:picLocks noChangeAspect="1"/>
-          </p:cNvPicPr>
-          <p:nvPr/>
-        </p:nvPicPr>
-        <p:blipFill>
-          <a:blip r:embed="rId2"/>
-          <a:stretch>
-            <a:fillRect/>
-          </a:stretch>
-        </p:blipFill>
-        <p:spPr>
-          <a:xfrm>
-            <a:off x="4743298" y="1776679"/>
-            <a:ext cx="332842" cy="332842"/>
-          </a:xfrm>
-          <a:prstGeom prst="rect">
-            <a:avLst/>
-          </a:prstGeom>
-        </p:spPr>
-      </p:pic>
-      <p:sp>
-        <p:nvSpPr>
-          <p:cNvPr id="11" name="Text 7"/>
-          <p:cNvSpPr txBox="1"/>
-          <p:nvPr/>
-        </p:nvSpPr>
-        <p:spPr>
-          <a:xfrm>
-            <a:off x="5344058" y="1645920"/>
-            <a:ext cx="2326538" cy="594360"/>
-          </a:xfrm>
-          <a:prstGeom prst="rect">
-            <a:avLst/>
-          </a:prstGeom>
-          <a:noFill/>
-          <a:ln/>
-        </p:spPr>
-        <p:txBody>
-          <a:bodyPr wrap="square" lIns="0" tIns="0" rIns="0" bIns="0" rtlCol="0" anchor="ctr"/>
-          <a:lstStyle/>
-          <a:p>
-            <a:pPr indent="0" marL="0">
-              <a:buNone/>
-            </a:pPr>
-            <a:r>
-              <a:rPr lang="en-US" sz="1600" b="1" dirty="0">
-                <a:solidFill>
-                  <a:schemeClr val="tx2"/>
-                </a:solidFill>
-              </a:rPr>
-              <a:t>Mis-scaled optimiser</a:t>
-            </a:r>
-            <a:endParaRPr lang="en-US" sz="1600" dirty="0"/>
-          </a:p>
-        </p:txBody>
-      </p:sp>
-      <p:sp>
-        <p:nvSpPr>
-          <p:cNvPr id="12" name="Text 8"/>
-          <p:cNvSpPr txBox="1"/>
-          <p:nvPr/>
-        </p:nvSpPr>
-        <p:spPr>
-          <a:xfrm>
-            <a:off x="4612538" y="2423160"/>
-            <a:ext cx="2966618" cy="1097280"/>
-          </a:xfrm>
-          <a:prstGeom prst="rect">
-            <a:avLst/>
-          </a:prstGeom>
-          <a:noFill/>
-          <a:ln/>
-        </p:spPr>
-        <p:txBody>
-          <a:bodyPr wrap="square" lIns="0" tIns="0" rIns="0" bIns="0" rtlCol="0" anchor="t"/>
-          <a:lstStyle/>
-          <a:p>
-            <a:pPr indent="0" marL="0">
-              <a:buNone/>
-            </a:pPr>
-            <a:r>
-              <a:rPr lang="en-US" sz="1400" dirty="0">
-                <a:solidFill>
-                  <a:schemeClr val="tx1"/>
-                </a:solidFill>
-              </a:rPr>
-              <a:t>The objective was ≈49 parts UCIQE to 0.2 UIQM; fixing it exposed the misalignment finding.</a:t>
-            </a:r>
-            <a:endParaRPr lang="en-US" sz="1400" dirty="0"/>
-          </a:p>
-        </p:txBody>
-      </p:sp>
-      <p:sp>
-        <p:nvSpPr>
-          <p:cNvPr id="13" name="fix card 2"/>
-          <p:cNvSpPr/>
-          <p:nvPr/>
-        </p:nvSpPr>
-        <p:spPr>
-          <a:xfrm>
-            <a:off x="8127797" y="1371600"/>
-            <a:ext cx="3515258" cy="2240280"/>
-          </a:xfrm>
-          <a:prstGeom prst="roundRect">
-            <a:avLst>
-              <a:gd name="adj" fmla="val 4898"/>
-            </a:avLst>
-          </a:prstGeom>
-          <a:solidFill>
-            <a:schemeClr val="bg2"/>
-          </a:solidFill>
-          <a:ln w="12700">
-            <a:solidFill>
-              <a:schemeClr val="bg2"/>
-            </a:solidFill>
-            <a:prstDash val="solid"/>
-          </a:ln>
-        </p:spPr>
-      </p:sp>
-      <p:sp>
-        <p:nvSpPr>
-          <p:cNvPr id="14" name="fix 2 circle"/>
-          <p:cNvSpPr/>
-          <p:nvPr/>
-        </p:nvSpPr>
-        <p:spPr>
-          <a:xfrm>
-            <a:off x="8402117" y="1645920"/>
-            <a:ext cx="594360" cy="594360"/>
-          </a:xfrm>
-          <a:prstGeom prst="ellipse">
-            <a:avLst/>
-          </a:prstGeom>
-          <a:solidFill>
-            <a:schemeClr val="accent3"/>
-          </a:solidFill>
-          <a:ln w="12700">
-            <a:solidFill>
-              <a:schemeClr val="accent3"/>
-            </a:solidFill>
-            <a:prstDash val="solid"/>
-          </a:ln>
-        </p:spPr>
-      </p:sp>
-      <p:pic>
-        <p:nvPicPr>
-          <p:cNvPr id="15" name="fix 2 glyph" descr="preencoded.png">    </p:cNvPr>
-          <p:cNvPicPr>
-            <a:picLocks noChangeAspect="1"/>
-          </p:cNvPicPr>
-          <p:nvPr/>
-        </p:nvPicPr>
-        <p:blipFill>
-          <a:blip r:embed="rId3"/>
-          <a:stretch>
-            <a:fillRect/>
-          </a:stretch>
-        </p:blipFill>
-        <p:spPr>
-          <a:xfrm>
-            <a:off x="8532876" y="1776679"/>
-            <a:ext cx="332842" cy="332842"/>
-          </a:xfrm>
-          <a:prstGeom prst="rect">
-            <a:avLst/>
-          </a:prstGeom>
-        </p:spPr>
-      </p:pic>
-      <p:sp>
-        <p:nvSpPr>
-          <p:cNvPr id="16" name="Text 11"/>
-          <p:cNvSpPr txBox="1"/>
-          <p:nvPr/>
-        </p:nvSpPr>
-        <p:spPr>
-          <a:xfrm>
-            <a:off x="9133637" y="1645920"/>
-            <a:ext cx="2326538" cy="594360"/>
-          </a:xfrm>
-          <a:prstGeom prst="rect">
-            <a:avLst/>
-          </a:prstGeom>
-          <a:noFill/>
-          <a:ln/>
-        </p:spPr>
-        <p:txBody>
-          <a:bodyPr wrap="square" lIns="0" tIns="0" rIns="0" bIns="0" rtlCol="0" anchor="ctr"/>
-          <a:lstStyle/>
-          <a:p>
-            <a:pPr indent="0" marL="0">
-              <a:buNone/>
-            </a:pPr>
-            <a:r>
-              <a:rPr lang="en-US" sz="1600" b="1" dirty="0">
-                <a:solidFill>
-                  <a:schemeClr val="tx2"/>
-                </a:solidFill>
-              </a:rPr>
-              <a:t>White-balance cap unused</a:t>
-            </a:r>
-            <a:endParaRPr lang="en-US" sz="1600" dirty="0"/>
-          </a:p>
-        </p:txBody>
-      </p:sp>
-      <p:sp>
-        <p:nvSpPr>
-          <p:cNvPr id="17" name="Text 12"/>
-          <p:cNvSpPr txBox="1"/>
-          <p:nvPr/>
-        </p:nvSpPr>
-        <p:spPr>
-          <a:xfrm>
-            <a:off x="8402117" y="2423160"/>
-            <a:ext cx="2966618" cy="1097280"/>
-          </a:xfrm>
-          <a:prstGeom prst="rect">
-            <a:avLst/>
-          </a:prstGeom>
-          <a:noFill/>
-          <a:ln/>
-        </p:spPr>
-        <p:txBody>
-          <a:bodyPr wrap="square" lIns="0" tIns="0" rIns="0" bIns="0" rtlCol="0" anchor="t"/>
-          <a:lstStyle/>
-          <a:p>
-            <a:pPr indent="0" marL="0">
-              <a:buNone/>
-            </a:pPr>
-            <a:r>
-              <a:rPr lang="en-US" sz="1400" dirty="0">
-                <a:solidFill>
-                  <a:schemeClr val="tx1"/>
-                </a:solidFill>
-              </a:rPr>
-              <a:t>The per-type gain cap was defined but never applied; now passed through.</a:t>
-            </a:r>
-            <a:endParaRPr lang="en-US" sz="1400" dirty="0"/>
-          </a:p>
-        </p:txBody>
-      </p:sp>
-      <p:sp>
-        <p:nvSpPr>
-          <p:cNvPr id="18" name="fix card 3"/>
-          <p:cNvSpPr/>
-          <p:nvPr/>
-        </p:nvSpPr>
-        <p:spPr>
-          <a:xfrm>
-            <a:off x="548640" y="3886200"/>
-            <a:ext cx="3515258" cy="2240280"/>
-          </a:xfrm>
-          <a:prstGeom prst="roundRect">
-            <a:avLst>
-              <a:gd name="adj" fmla="val 4898"/>
-            </a:avLst>
-          </a:prstGeom>
-          <a:solidFill>
-            <a:schemeClr val="bg2"/>
-          </a:solidFill>
-          <a:ln w="12700">
-            <a:solidFill>
-              <a:schemeClr val="bg2"/>
-            </a:solidFill>
-            <a:prstDash val="solid"/>
-          </a:ln>
-        </p:spPr>
-      </p:sp>
-      <p:sp>
-        <p:nvSpPr>
-          <p:cNvPr id="19" name="fix 3 circle"/>
-          <p:cNvSpPr/>
-          <p:nvPr/>
-        </p:nvSpPr>
-        <p:spPr>
-          <a:xfrm>
-            <a:off x="822960" y="4160520"/>
-            <a:ext cx="594360" cy="594360"/>
-          </a:xfrm>
-          <a:prstGeom prst="ellipse">
-            <a:avLst/>
-          </a:prstGeom>
-          <a:solidFill>
-            <a:schemeClr val="accent3"/>
-          </a:solidFill>
-          <a:ln w="12700">
-            <a:solidFill>
-              <a:schemeClr val="accent3"/>
-            </a:solidFill>
-            <a:prstDash val="solid"/>
-          </a:ln>
-        </p:spPr>
-      </p:sp>
-      <p:pic>
-        <p:nvPicPr>
-          <p:cNvPr id="20" name="fix 3 glyph" descr="preencoded.png">    </p:cNvPr>
-          <p:cNvPicPr>
-            <a:picLocks noChangeAspect="1"/>
-          </p:cNvPicPr>
-          <p:nvPr/>
-        </p:nvPicPr>
-        <p:blipFill>
-          <a:blip r:embed="rId4"/>
-          <a:stretch>
-            <a:fillRect/>
-          </a:stretch>
-        </p:blipFill>
-        <p:spPr>
-          <a:xfrm>
-            <a:off x="953719" y="4291279"/>
-            <a:ext cx="332842" cy="332842"/>
-          </a:xfrm>
-          <a:prstGeom prst="rect">
-            <a:avLst/>
-          </a:prstGeom>
-        </p:spPr>
-      </p:pic>
-      <p:sp>
-        <p:nvSpPr>
-          <p:cNvPr id="21" name="Text 15"/>
-          <p:cNvSpPr txBox="1"/>
-          <p:nvPr/>
-        </p:nvSpPr>
-        <p:spPr>
-          <a:xfrm>
-            <a:off x="1554480" y="4160520"/>
-            <a:ext cx="2326538" cy="594360"/>
-          </a:xfrm>
-          <a:prstGeom prst="rect">
-            <a:avLst/>
-          </a:prstGeom>
-          <a:noFill/>
-          <a:ln/>
-        </p:spPr>
-        <p:txBody>
-          <a:bodyPr wrap="square" lIns="0" tIns="0" rIns="0" bIns="0" rtlCol="0" anchor="ctr"/>
-          <a:lstStyle/>
-          <a:p>
-            <a:pPr indent="0" marL="0">
-              <a:buNone/>
-            </a:pPr>
-            <a:r>
-              <a:rPr lang="en-US" sz="1600" b="1" dirty="0">
-                <a:solidFill>
-                  <a:schemeClr val="tx2"/>
-                </a:solidFill>
-              </a:rPr>
-              <a:t>Tuned on the test images</a:t>
-            </a:r>
-            <a:endParaRPr lang="en-US" sz="1600" dirty="0"/>
-          </a:p>
-        </p:txBody>
-      </p:sp>
-      <p:sp>
-        <p:nvSpPr>
-          <p:cNvPr id="22" name="Text 16"/>
-          <p:cNvSpPr txBox="1"/>
-          <p:nvPr/>
-        </p:nvSpPr>
-        <p:spPr>
-          <a:xfrm>
-            <a:off x="822960" y="4937760"/>
-            <a:ext cx="2966618" cy="1097280"/>
-          </a:xfrm>
-          <a:prstGeom prst="rect">
-            <a:avLst/>
-          </a:prstGeom>
-          <a:noFill/>
-          <a:ln/>
-        </p:spPr>
-        <p:txBody>
-          <a:bodyPr wrap="square" lIns="0" tIns="0" rIns="0" bIns="0" rtlCol="0" anchor="t"/>
-          <a:lstStyle/>
-          <a:p>
-            <a:pPr indent="0" marL="0">
-              <a:buNone/>
-            </a:pPr>
-            <a:r>
-              <a:rPr lang="en-US" sz="1400" dirty="0">
-                <a:solidFill>
-                  <a:schemeClr val="tx1"/>
-                </a:solidFill>
-              </a:rPr>
-              <a:t>Hand-set profiles were judged on the same images; now a held-out 30/70 split.</a:t>
-            </a:r>
-            <a:endParaRPr lang="en-US" sz="1400" dirty="0"/>
-          </a:p>
-        </p:txBody>
-      </p:sp>
-      <p:sp>
-        <p:nvSpPr>
-          <p:cNvPr id="23" name="fix card 4"/>
-          <p:cNvSpPr/>
-          <p:nvPr/>
-        </p:nvSpPr>
-        <p:spPr>
-          <a:xfrm>
-            <a:off x="4338218" y="3886200"/>
-            <a:ext cx="3515258" cy="2240280"/>
-          </a:xfrm>
-          <a:prstGeom prst="roundRect">
-            <a:avLst>
-              <a:gd name="adj" fmla="val 4898"/>
-            </a:avLst>
-          </a:prstGeom>
-          <a:solidFill>
-            <a:schemeClr val="bg2"/>
-          </a:solidFill>
-          <a:ln w="12700">
-            <a:solidFill>
-              <a:schemeClr val="bg2"/>
-            </a:solidFill>
-            <a:prstDash val="solid"/>
-          </a:ln>
-        </p:spPr>
-      </p:sp>
-      <p:sp>
-        <p:nvSpPr>
-          <p:cNvPr id="24" name="fix 4 circle"/>
-          <p:cNvSpPr/>
-          <p:nvPr/>
-        </p:nvSpPr>
-        <p:spPr>
-          <a:xfrm>
-            <a:off x="4612538" y="4160520"/>
-            <a:ext cx="594360" cy="594360"/>
-          </a:xfrm>
-          <a:prstGeom prst="ellipse">
-            <a:avLst/>
-          </a:prstGeom>
-          <a:solidFill>
-            <a:schemeClr val="accent3"/>
-          </a:solidFill>
-          <a:ln w="12700">
-            <a:solidFill>
-              <a:schemeClr val="accent3"/>
-            </a:solidFill>
-            <a:prstDash val="solid"/>
-          </a:ln>
-        </p:spPr>
-      </p:sp>
-      <p:pic>
-        <p:nvPicPr>
-          <p:cNvPr id="25" name="fix 4 glyph" descr="preencoded.png">    </p:cNvPr>
-          <p:cNvPicPr>
-            <a:picLocks noChangeAspect="1"/>
-          </p:cNvPicPr>
-          <p:nvPr/>
-        </p:nvPicPr>
-        <p:blipFill>
-          <a:blip r:embed="rId5"/>
-          <a:stretch>
-            <a:fillRect/>
-          </a:stretch>
-        </p:blipFill>
-        <p:spPr>
-          <a:xfrm>
-            <a:off x="4743298" y="4291279"/>
-            <a:ext cx="332842" cy="332842"/>
-          </a:xfrm>
-          <a:prstGeom prst="rect">
-            <a:avLst/>
-          </a:prstGeom>
-        </p:spPr>
-      </p:pic>
-      <p:sp>
-        <p:nvSpPr>
-          <p:cNvPr id="26" name="Text 19"/>
-          <p:cNvSpPr txBox="1"/>
-          <p:nvPr/>
-        </p:nvSpPr>
-        <p:spPr>
-          <a:xfrm>
-            <a:off x="5344058" y="4160520"/>
-            <a:ext cx="2326538" cy="594360"/>
-          </a:xfrm>
-          <a:prstGeom prst="rect">
-            <a:avLst/>
-          </a:prstGeom>
-          <a:noFill/>
-          <a:ln/>
-        </p:spPr>
-        <p:txBody>
-          <a:bodyPr wrap="square" lIns="0" tIns="0" rIns="0" bIns="0" rtlCol="0" anchor="ctr"/>
-          <a:lstStyle/>
-          <a:p>
-            <a:pPr indent="0" marL="0">
-              <a:buNone/>
-            </a:pPr>
-            <a:r>
-              <a:rPr lang="en-US" sz="1600" b="1" dirty="0">
-                <a:solidFill>
-                  <a:schemeClr val="tx2"/>
-                </a:solidFill>
-              </a:rPr>
-              <a:t>No multiple-comparison control</a:t>
-            </a:r>
-            <a:endParaRPr lang="en-US" sz="1600" dirty="0"/>
-          </a:p>
-        </p:txBody>
-      </p:sp>
-      <p:sp>
-        <p:nvSpPr>
-          <p:cNvPr id="27" name="Text 20"/>
-          <p:cNvSpPr txBox="1"/>
-          <p:nvPr/>
-        </p:nvSpPr>
-        <p:spPr>
-          <a:xfrm>
-            <a:off x="4612538" y="4937760"/>
-            <a:ext cx="2966618" cy="1097280"/>
-          </a:xfrm>
-          <a:prstGeom prst="rect">
-            <a:avLst/>
-          </a:prstGeom>
-          <a:noFill/>
-          <a:ln/>
-        </p:spPr>
-        <p:txBody>
-          <a:bodyPr wrap="square" lIns="0" tIns="0" rIns="0" bIns="0" rtlCol="0" anchor="t"/>
-          <a:lstStyle/>
-          <a:p>
-            <a:pPr indent="0" marL="0">
-              <a:buNone/>
-            </a:pPr>
-            <a:r>
-              <a:rPr lang="en-US" sz="1400" dirty="0">
-                <a:solidFill>
-                  <a:schemeClr val="tx1"/>
-                </a:solidFill>
-              </a:rPr>
-              <a:t>25 raw p-values; now Holm correction, effect sizes and 95% CIs.</a:t>
-            </a:r>
-            <a:endParaRPr lang="en-US" sz="1400" dirty="0"/>
-          </a:p>
-        </p:txBody>
-      </p:sp>
-      <p:sp>
-        <p:nvSpPr>
-          <p:cNvPr id="28" name="fix card 5"/>
-          <p:cNvSpPr/>
-          <p:nvPr/>
-        </p:nvSpPr>
-        <p:spPr>
-          <a:xfrm>
-            <a:off x="8127797" y="3886200"/>
-            <a:ext cx="3515258" cy="2240280"/>
-          </a:xfrm>
-          <a:prstGeom prst="roundRect">
-            <a:avLst>
-              <a:gd name="adj" fmla="val 4898"/>
-            </a:avLst>
-          </a:prstGeom>
-          <a:solidFill>
-            <a:schemeClr val="bg2"/>
-          </a:solidFill>
-          <a:ln w="12700">
-            <a:solidFill>
-              <a:schemeClr val="bg2"/>
-            </a:solidFill>
-            <a:prstDash val="solid"/>
-          </a:ln>
-        </p:spPr>
-      </p:sp>
-      <p:sp>
-        <p:nvSpPr>
-          <p:cNvPr id="29" name="fix 5 circle"/>
-          <p:cNvSpPr/>
-          <p:nvPr/>
-        </p:nvSpPr>
-        <p:spPr>
-          <a:xfrm>
-            <a:off x="8402117" y="4160520"/>
-            <a:ext cx="594360" cy="594360"/>
-          </a:xfrm>
-          <a:prstGeom prst="ellipse">
-            <a:avLst/>
-          </a:prstGeom>
-          <a:solidFill>
-            <a:schemeClr val="accent3"/>
-          </a:solidFill>
-          <a:ln w="12700">
-            <a:solidFill>
-              <a:schemeClr val="accent3"/>
-            </a:solidFill>
-            <a:prstDash val="solid"/>
-          </a:ln>
-        </p:spPr>
-      </p:sp>
-      <p:pic>
-        <p:nvPicPr>
-          <p:cNvPr id="30" name="fix 5 glyph" descr="preencoded.png">    </p:cNvPr>
-          <p:cNvPicPr>
-            <a:picLocks noChangeAspect="1"/>
-          </p:cNvPicPr>
-          <p:nvPr/>
-        </p:nvPicPr>
-        <p:blipFill>
-          <a:blip r:embed="rId6"/>
-          <a:stretch>
-            <a:fillRect/>
-          </a:stretch>
-        </p:blipFill>
-        <p:spPr>
-          <a:xfrm>
-            <a:off x="8532876" y="4291279"/>
-            <a:ext cx="332842" cy="332842"/>
-          </a:xfrm>
-          <a:prstGeom prst="rect">
-            <a:avLst/>
-          </a:prstGeom>
-        </p:spPr>
-      </p:pic>
-      <p:sp>
-        <p:nvSpPr>
-          <p:cNvPr id="31" name="Text 23"/>
-          <p:cNvSpPr txBox="1"/>
-          <p:nvPr/>
-        </p:nvSpPr>
-        <p:spPr>
-          <a:xfrm>
-            <a:off x="9133637" y="4160520"/>
-            <a:ext cx="2326538" cy="594360"/>
-          </a:xfrm>
-          <a:prstGeom prst="rect">
-            <a:avLst/>
-          </a:prstGeom>
-          <a:noFill/>
-          <a:ln/>
-        </p:spPr>
-        <p:txBody>
-          <a:bodyPr wrap="square" lIns="0" tIns="0" rIns="0" bIns="0" rtlCol="0" anchor="ctr"/>
-          <a:lstStyle/>
-          <a:p>
-            <a:pPr indent="0" marL="0">
-              <a:buNone/>
-            </a:pPr>
-            <a:r>
-              <a:rPr lang="en-US" sz="1600" b="1" dirty="0">
-                <a:solidFill>
-                  <a:schemeClr val="tx2"/>
-                </a:solidFill>
-              </a:rPr>
-              <a:t>Gamma convention inverted</a:t>
-            </a:r>
-            <a:endParaRPr lang="en-US" sz="1600" dirty="0"/>
-          </a:p>
-        </p:txBody>
-      </p:sp>
-      <p:sp>
-        <p:nvSpPr>
-          <p:cNvPr id="32" name="Text 24"/>
-          <p:cNvSpPr txBox="1"/>
-          <p:nvPr/>
-        </p:nvSpPr>
-        <p:spPr>
-          <a:xfrm>
-            <a:off x="8402117" y="4937760"/>
-            <a:ext cx="2966618" cy="1097280"/>
-          </a:xfrm>
-          <a:prstGeom prst="rect">
-            <a:avLst/>
-          </a:prstGeom>
-          <a:noFill/>
-          <a:ln/>
-        </p:spPr>
-        <p:txBody>
-          <a:bodyPr wrap="square" lIns="0" tIns="0" rIns="0" bIns="0" rtlCol="0" anchor="t"/>
-          <a:lstStyle/>
-          <a:p>
-            <a:pPr indent="0" marL="0">
-              <a:buNone/>
-            </a:pPr>
-            <a:r>
-              <a:rPr lang="en-US" sz="1400" dirty="0">
-                <a:solidFill>
-                  <a:schemeClr val="tx1"/>
-                </a:solidFill>
-              </a:rPr>
-              <a:t>γ was derived for input^γ but applied as input^(1/γ), inverting the adaptivity; fixed and re-calibrated.</a:t>
+                  <a:schemeClr val="bg2"/>
+                </a:solidFill>
+              </a:rPr>
+              <a:t>Every metric is computed live on the selected image</a:t>
             </a:r>
             <a:endParaRPr lang="en-US" sz="1400" dirty="0"/>
           </a:p>
@@ -9579,44 +9760,44 @@
         </p:nvSpPr>
         <p:spPr>
           <a:xfrm>
-            <a:off x="548640" y="320040"/>
-            <a:ext cx="11094415" cy="777240"/>
-          </a:xfrm>
-          <a:prstGeom prst="rect">
-            <a:avLst/>
-          </a:prstGeom>
-          <a:noFill/>
-          <a:ln/>
-        </p:spPr>
-        <p:txBody>
-          <a:bodyPr wrap="square" lIns="0" tIns="0" rIns="0" bIns="0" rtlCol="0" anchor="ctr"/>
+            <a:off x="548640" y="411480"/>
+            <a:ext cx="11094415" cy="822960"/>
+          </a:xfrm>
+          <a:prstGeom prst="rect">
+            <a:avLst/>
+          </a:prstGeom>
+          <a:noFill/>
+          <a:ln/>
+        </p:spPr>
+        <p:txBody>
+          <a:bodyPr wrap="square" lIns="0" tIns="0" rIns="0" bIns="0" rtlCol="0"/>
           <a:lstStyle/>
           <a:p>
             <a:pPr algn="l" indent="0" marL="0">
               <a:buNone/>
             </a:pPr>
             <a:r>
-              <a:rPr lang="en-US" sz="3200" b="1" dirty="0">
-                <a:solidFill>
-                  <a:schemeClr val="tx2"/>
-                </a:solidFill>
-              </a:rPr>
-              <a:t>Live demo</a:t>
-            </a:r>
-            <a:endParaRPr lang="en-US" sz="3200" dirty="0"/>
-          </a:p>
-        </p:txBody>
-      </p:sp>
-      <p:sp>
-        <p:nvSpPr>
-          <p:cNvPr id="3" name="demo step 1"/>
+              <a:rPr lang="en-US" sz="3600" b="1" dirty="0">
+                <a:solidFill>
+                  <a:schemeClr val="bg1"/>
+                </a:solidFill>
+              </a:rPr>
+              <a:t>Takeaways</a:t>
+            </a:r>
+            <a:endParaRPr lang="en-US" sz="3600" dirty="0"/>
+          </a:p>
+        </p:txBody>
+      </p:sp>
+      <p:sp>
+        <p:nvSpPr>
+          <p:cNvPr id="3" name="takeaway 1 circle"/>
           <p:cNvSpPr/>
           <p:nvPr/>
         </p:nvSpPr>
         <p:spPr>
           <a:xfrm>
-            <a:off x="548640" y="1371600"/>
-            <a:ext cx="502920" cy="502920"/>
+            <a:off x="548640" y="1600200"/>
+            <a:ext cx="777240" cy="777240"/>
           </a:xfrm>
           <a:prstGeom prst="ellipse">
             <a:avLst/>
@@ -9632,16 +9813,40 @@
           </a:ln>
         </p:spPr>
       </p:sp>
-      <p:sp>
-        <p:nvSpPr>
-          <p:cNvPr id="4" name="Text 2"/>
+      <p:pic>
+        <p:nvPicPr>
+          <p:cNvPr id="4" name="takeaway 1 glyph" descr="preencoded.png">    </p:cNvPr>
+          <p:cNvPicPr>
+            <a:picLocks noChangeAspect="1"/>
+          </p:cNvPicPr>
+          <p:nvPr/>
+        </p:nvPicPr>
+        <p:blipFill>
+          <a:blip r:embed="rId1"/>
+          <a:stretch>
+            <a:fillRect/>
+          </a:stretch>
+        </p:blipFill>
+        <p:spPr>
+          <a:xfrm>
+            <a:off x="719633" y="1771193"/>
+            <a:ext cx="435254" cy="435254"/>
+          </a:xfrm>
+          <a:prstGeom prst="rect">
+            <a:avLst/>
+          </a:prstGeom>
+        </p:spPr>
+      </p:pic>
+      <p:sp>
+        <p:nvSpPr>
+          <p:cNvPr id="5" name="Text 2"/>
           <p:cNvSpPr txBox="1"/>
           <p:nvPr/>
         </p:nvSpPr>
         <p:spPr>
           <a:xfrm>
-            <a:off x="548640" y="1371600"/>
-            <a:ext cx="502920" cy="502920"/>
+            <a:off x="1645920" y="1600200"/>
+            <a:ext cx="9997135" cy="777240"/>
           </a:xfrm>
           <a:prstGeom prst="rect">
             <a:avLst/>
@@ -9653,67 +9858,31 @@
           <a:bodyPr wrap="square" lIns="0" tIns="0" rIns="0" bIns="0" rtlCol="0" anchor="ctr"/>
           <a:lstStyle/>
           <a:p>
-            <a:pPr algn="ctr" indent="0" marL="0">
-              <a:buNone/>
-            </a:pPr>
-            <a:r>
-              <a:rPr lang="en-US" sz="1600" b="1" dirty="0">
+            <a:pPr indent="0" marL="0">
+              <a:buNone/>
+            </a:pPr>
+            <a:r>
+              <a:rPr lang="en-US" sz="1800" dirty="0">
                 <a:solidFill>
                   <a:schemeClr val="bg1"/>
                 </a:solidFill>
               </a:rPr>
-              <a:t>1</a:t>
-            </a:r>
-            <a:endParaRPr lang="en-US" sz="1600" dirty="0"/>
-          </a:p>
-        </p:txBody>
-      </p:sp>
-      <p:sp>
-        <p:nvSpPr>
-          <p:cNvPr id="5" name="Text 3"/>
-          <p:cNvSpPr txBox="1"/>
-          <p:nvPr/>
-        </p:nvSpPr>
-        <p:spPr>
-          <a:xfrm>
-            <a:off x="1280160" y="1371600"/>
-            <a:ext cx="6766560" cy="502920"/>
-          </a:xfrm>
-          <a:prstGeom prst="rect">
-            <a:avLst/>
-          </a:prstGeom>
-          <a:noFill/>
-          <a:ln/>
-        </p:spPr>
-        <p:txBody>
-          <a:bodyPr wrap="square" lIns="0" tIns="0" rIns="0" bIns="0" rtlCol="0" anchor="ctr"/>
-          <a:lstStyle/>
-          <a:p>
-            <a:pPr indent="0" marL="0">
-              <a:buNone/>
-            </a:pPr>
-            <a:r>
-              <a:rPr lang="en-US" sz="1600" dirty="0">
-                <a:solidFill>
-                  <a:schemeClr val="tx1"/>
-                </a:solidFill>
-              </a:rPr>
-              <a:t>Compare tab: pick 773_img_ (green turbid) and compare against every method</a:t>
-            </a:r>
-            <a:endParaRPr lang="en-US" sz="1600" dirty="0"/>
-          </a:p>
-        </p:txBody>
-      </p:sp>
-      <p:sp>
-        <p:nvSpPr>
-          <p:cNvPr id="6" name="demo step 2"/>
+              <a:t>Red-channel compensation before white balance is the largest single gain: +0.52 dB PSNR on held-out images.</a:t>
+            </a:r>
+            <a:endParaRPr lang="en-US" sz="1800" dirty="0"/>
+          </a:p>
+        </p:txBody>
+      </p:sp>
+      <p:sp>
+        <p:nvSpPr>
+          <p:cNvPr id="6" name="takeaway 2 circle"/>
           <p:cNvSpPr/>
           <p:nvPr/>
         </p:nvSpPr>
         <p:spPr>
           <a:xfrm>
-            <a:off x="548640" y="2148840"/>
-            <a:ext cx="502920" cy="502920"/>
+            <a:off x="548640" y="2834640"/>
+            <a:ext cx="777240" cy="777240"/>
           </a:xfrm>
           <a:prstGeom prst="ellipse">
             <a:avLst/>
@@ -9729,16 +9898,40 @@
           </a:ln>
         </p:spPr>
       </p:sp>
-      <p:sp>
-        <p:nvSpPr>
-          <p:cNvPr id="7" name="Text 5"/>
+      <p:pic>
+        <p:nvPicPr>
+          <p:cNvPr id="7" name="takeaway 2 glyph" descr="preencoded.png">    </p:cNvPr>
+          <p:cNvPicPr>
+            <a:picLocks noChangeAspect="1"/>
+          </p:cNvPicPr>
+          <p:nvPr/>
+        </p:nvPicPr>
+        <p:blipFill>
+          <a:blip r:embed="rId2"/>
+          <a:stretch>
+            <a:fillRect/>
+          </a:stretch>
+        </p:blipFill>
+        <p:spPr>
+          <a:xfrm>
+            <a:off x="719633" y="3005633"/>
+            <a:ext cx="435254" cy="435254"/>
+          </a:xfrm>
+          <a:prstGeom prst="rect">
+            <a:avLst/>
+          </a:prstGeom>
+        </p:spPr>
+      </p:pic>
+      <p:sp>
+        <p:nvSpPr>
+          <p:cNvPr id="8" name="Text 4"/>
           <p:cNvSpPr txBox="1"/>
           <p:nvPr/>
         </p:nvSpPr>
         <p:spPr>
           <a:xfrm>
-            <a:off x="548640" y="2148840"/>
-            <a:ext cx="502920" cy="502920"/>
+            <a:off x="1645920" y="2834640"/>
+            <a:ext cx="9997135" cy="777240"/>
           </a:xfrm>
           <a:prstGeom prst="rect">
             <a:avLst/>
@@ -9750,67 +9943,31 @@
           <a:bodyPr wrap="square" lIns="0" tIns="0" rIns="0" bIns="0" rtlCol="0" anchor="ctr"/>
           <a:lstStyle/>
           <a:p>
-            <a:pPr algn="ctr" indent="0" marL="0">
-              <a:buNone/>
-            </a:pPr>
-            <a:r>
-              <a:rPr lang="en-US" sz="1600" b="1" dirty="0">
+            <a:pPr indent="0" marL="0">
+              <a:buNone/>
+            </a:pPr>
+            <a:r>
+              <a:rPr lang="en-US" sz="1800" dirty="0">
                 <a:solidFill>
                   <a:schemeClr val="bg1"/>
                 </a:solidFill>
               </a:rPr>
-              <a:t>2</a:t>
-            </a:r>
-            <a:endParaRPr lang="en-US" sz="1600" dirty="0"/>
-          </a:p>
-        </p:txBody>
-      </p:sp>
-      <p:sp>
-        <p:nvSpPr>
-          <p:cNvPr id="8" name="Text 6"/>
-          <p:cNvSpPr txBox="1"/>
-          <p:nvPr/>
-        </p:nvSpPr>
-        <p:spPr>
-          <a:xfrm>
-            <a:off x="1280160" y="2148840"/>
-            <a:ext cx="6766560" cy="502920"/>
-          </a:xfrm>
-          <a:prstGeom prst="rect">
-            <a:avLst/>
-          </a:prstGeom>
-          <a:noFill/>
-          <a:ln/>
-        </p:spPr>
-        <p:txBody>
-          <a:bodyPr wrap="square" lIns="0" tIns="0" rIns="0" bIns="0" rtlCol="0" anchor="ctr"/>
-          <a:lstStyle/>
-          <a:p>
-            <a:pPr indent="0" marL="0">
-              <a:buNone/>
-            </a:pPr>
-            <a:r>
-              <a:rPr lang="en-US" sz="1600" dirty="0">
-                <a:solidFill>
-                  <a:schemeClr val="tx1"/>
-                </a:solidFill>
-              </a:rPr>
-              <a:t>Pipeline tab: walk the stages and drag the α preview slider</a:t>
-            </a:r>
-            <a:endParaRPr lang="en-US" sz="1600" dirty="0"/>
-          </a:p>
-        </p:txBody>
-      </p:sp>
-      <p:sp>
-        <p:nvSpPr>
-          <p:cNvPr id="9" name="demo step 3"/>
+              <a:t>The full hybrid has the highest SSIM of all compared methods (0.871), matches CLAHE-only on PSNR, and clearly beats UDCP, HE and WB+CLAHE on 622 held-out images.</a:t>
+            </a:r>
+            <a:endParaRPr lang="en-US" sz="1800" dirty="0"/>
+          </a:p>
+        </p:txBody>
+      </p:sp>
+      <p:sp>
+        <p:nvSpPr>
+          <p:cNvPr id="9" name="takeaway 3 circle"/>
           <p:cNvSpPr/>
           <p:nvPr/>
         </p:nvSpPr>
         <p:spPr>
           <a:xfrm>
-            <a:off x="548640" y="2926080"/>
-            <a:ext cx="502920" cy="502920"/>
+            <a:off x="548640" y="4069080"/>
+            <a:ext cx="777240" cy="777240"/>
           </a:xfrm>
           <a:prstGeom prst="ellipse">
             <a:avLst/>
@@ -9826,859 +9983,6 @@
           </a:ln>
         </p:spPr>
       </p:sp>
-      <p:sp>
-        <p:nvSpPr>
-          <p:cNvPr id="10" name="Text 8"/>
-          <p:cNvSpPr txBox="1"/>
-          <p:nvPr/>
-        </p:nvSpPr>
-        <p:spPr>
-          <a:xfrm>
-            <a:off x="548640" y="2926080"/>
-            <a:ext cx="502920" cy="502920"/>
-          </a:xfrm>
-          <a:prstGeom prst="rect">
-            <a:avLst/>
-          </a:prstGeom>
-          <a:noFill/>
-          <a:ln/>
-        </p:spPr>
-        <p:txBody>
-          <a:bodyPr wrap="square" lIns="0" tIns="0" rIns="0" bIns="0" rtlCol="0" anchor="ctr"/>
-          <a:lstStyle/>
-          <a:p>
-            <a:pPr algn="ctr" indent="0" marL="0">
-              <a:buNone/>
-            </a:pPr>
-            <a:r>
-              <a:rPr lang="en-US" sz="1600" b="1" dirty="0">
-                <a:solidFill>
-                  <a:schemeClr val="bg1"/>
-                </a:solidFill>
-              </a:rPr>
-              <a:t>3</a:t>
-            </a:r>
-            <a:endParaRPr lang="en-US" sz="1600" dirty="0"/>
-          </a:p>
-        </p:txBody>
-      </p:sp>
-      <p:sp>
-        <p:nvSpPr>
-          <p:cNvPr id="11" name="Text 9"/>
-          <p:cNvSpPr txBox="1"/>
-          <p:nvPr/>
-        </p:nvSpPr>
-        <p:spPr>
-          <a:xfrm>
-            <a:off x="1280160" y="2926080"/>
-            <a:ext cx="6766560" cy="502920"/>
-          </a:xfrm>
-          <a:prstGeom prst="rect">
-            <a:avLst/>
-          </a:prstGeom>
-          <a:noFill/>
-          <a:ln/>
-        </p:spPr>
-        <p:txBody>
-          <a:bodyPr wrap="square" lIns="0" tIns="0" rIns="0" bIns="0" rtlCol="0" anchor="ctr"/>
-          <a:lstStyle/>
-          <a:p>
-            <a:pPr indent="0" marL="0">
-              <a:buNone/>
-            </a:pPr>
-            <a:r>
-              <a:rPr lang="en-US" sz="1600" dirty="0">
-                <a:solidFill>
-                  <a:schemeClr val="tx1"/>
-                </a:solidFill>
-              </a:rPr>
-              <a:t>Toggle Module 5 and Module 7 off and on, watching PSNR/SSIM in the header</a:t>
-            </a:r>
-            <a:endParaRPr lang="en-US" sz="1600" dirty="0"/>
-          </a:p>
-        </p:txBody>
-      </p:sp>
-      <p:sp>
-        <p:nvSpPr>
-          <p:cNvPr id="12" name="demo step 4"/>
-          <p:cNvSpPr/>
-          <p:nvPr/>
-        </p:nvSpPr>
-        <p:spPr>
-          <a:xfrm>
-            <a:off x="548640" y="3703320"/>
-            <a:ext cx="502920" cy="502920"/>
-          </a:xfrm>
-          <a:prstGeom prst="ellipse">
-            <a:avLst/>
-          </a:prstGeom>
-          <a:solidFill>
-            <a:schemeClr val="accent1"/>
-          </a:solidFill>
-          <a:ln w="12700">
-            <a:solidFill>
-              <a:schemeClr val="accent1"/>
-            </a:solidFill>
-            <a:prstDash val="solid"/>
-          </a:ln>
-        </p:spPr>
-      </p:sp>
-      <p:sp>
-        <p:nvSpPr>
-          <p:cNvPr id="13" name="Text 11"/>
-          <p:cNvSpPr txBox="1"/>
-          <p:nvPr/>
-        </p:nvSpPr>
-        <p:spPr>
-          <a:xfrm>
-            <a:off x="548640" y="3703320"/>
-            <a:ext cx="502920" cy="502920"/>
-          </a:xfrm>
-          <a:prstGeom prst="rect">
-            <a:avLst/>
-          </a:prstGeom>
-          <a:noFill/>
-          <a:ln/>
-        </p:spPr>
-        <p:txBody>
-          <a:bodyPr wrap="square" lIns="0" tIns="0" rIns="0" bIns="0" rtlCol="0" anchor="ctr"/>
-          <a:lstStyle/>
-          <a:p>
-            <a:pPr algn="ctr" indent="0" marL="0">
-              <a:buNone/>
-            </a:pPr>
-            <a:r>
-              <a:rPr lang="en-US" sz="1600" b="1" dirty="0">
-                <a:solidFill>
-                  <a:schemeClr val="bg1"/>
-                </a:solidFill>
-              </a:rPr>
-              <a:t>4</a:t>
-            </a:r>
-            <a:endParaRPr lang="en-US" sz="1600" dirty="0"/>
-          </a:p>
-        </p:txBody>
-      </p:sp>
-      <p:sp>
-        <p:nvSpPr>
-          <p:cNvPr id="14" name="Text 12"/>
-          <p:cNvSpPr txBox="1"/>
-          <p:nvPr/>
-        </p:nvSpPr>
-        <p:spPr>
-          <a:xfrm>
-            <a:off x="1280160" y="3703320"/>
-            <a:ext cx="6766560" cy="502920"/>
-          </a:xfrm>
-          <a:prstGeom prst="rect">
-            <a:avLst/>
-          </a:prstGeom>
-          <a:noFill/>
-          <a:ln/>
-        </p:spPr>
-        <p:txBody>
-          <a:bodyPr wrap="square" lIns="0" tIns="0" rIns="0" bIns="0" rtlCol="0" anchor="ctr"/>
-          <a:lstStyle/>
-          <a:p>
-            <a:pPr indent="0" marL="0">
-              <a:buNone/>
-            </a:pPr>
-            <a:r>
-              <a:rPr lang="en-US" sz="1600" dirty="0">
-                <a:solidFill>
-                  <a:schemeClr val="tx1"/>
-                </a:solidFill>
-              </a:rPr>
-              <a:t>Metrics tab: no-reference scores vs. the PSNR/SSIM table</a:t>
-            </a:r>
-            <a:endParaRPr lang="en-US" sz="1600" dirty="0"/>
-          </a:p>
-        </p:txBody>
-      </p:sp>
-      <p:sp>
-        <p:nvSpPr>
-          <p:cNvPr id="15" name="demo step 5"/>
-          <p:cNvSpPr/>
-          <p:nvPr/>
-        </p:nvSpPr>
-        <p:spPr>
-          <a:xfrm>
-            <a:off x="548640" y="4480560"/>
-            <a:ext cx="502920" cy="502920"/>
-          </a:xfrm>
-          <a:prstGeom prst="ellipse">
-            <a:avLst/>
-          </a:prstGeom>
-          <a:solidFill>
-            <a:schemeClr val="accent1"/>
-          </a:solidFill>
-          <a:ln w="12700">
-            <a:solidFill>
-              <a:schemeClr val="accent1"/>
-            </a:solidFill>
-            <a:prstDash val="solid"/>
-          </a:ln>
-        </p:spPr>
-      </p:sp>
-      <p:sp>
-        <p:nvSpPr>
-          <p:cNvPr id="16" name="Text 14"/>
-          <p:cNvSpPr txBox="1"/>
-          <p:nvPr/>
-        </p:nvSpPr>
-        <p:spPr>
-          <a:xfrm>
-            <a:off x="548640" y="4480560"/>
-            <a:ext cx="502920" cy="502920"/>
-          </a:xfrm>
-          <a:prstGeom prst="rect">
-            <a:avLst/>
-          </a:prstGeom>
-          <a:noFill/>
-          <a:ln/>
-        </p:spPr>
-        <p:txBody>
-          <a:bodyPr wrap="square" lIns="0" tIns="0" rIns="0" bIns="0" rtlCol="0" anchor="ctr"/>
-          <a:lstStyle/>
-          <a:p>
-            <a:pPr algn="ctr" indent="0" marL="0">
-              <a:buNone/>
-            </a:pPr>
-            <a:r>
-              <a:rPr lang="en-US" sz="1600" b="1" dirty="0">
-                <a:solidFill>
-                  <a:schemeClr val="bg1"/>
-                </a:solidFill>
-              </a:rPr>
-              <a:t>5</a:t>
-            </a:r>
-            <a:endParaRPr lang="en-US" sz="1600" dirty="0"/>
-          </a:p>
-        </p:txBody>
-      </p:sp>
-      <p:sp>
-        <p:nvSpPr>
-          <p:cNvPr id="17" name="Text 15"/>
-          <p:cNvSpPr txBox="1"/>
-          <p:nvPr/>
-        </p:nvSpPr>
-        <p:spPr>
-          <a:xfrm>
-            <a:off x="1280160" y="4480560"/>
-            <a:ext cx="6766560" cy="502920"/>
-          </a:xfrm>
-          <a:prstGeom prst="rect">
-            <a:avLst/>
-          </a:prstGeom>
-          <a:noFill/>
-          <a:ln/>
-        </p:spPr>
-        <p:txBody>
-          <a:bodyPr wrap="square" lIns="0" tIns="0" rIns="0" bIns="0" rtlCol="0" anchor="ctr"/>
-          <a:lstStyle/>
-          <a:p>
-            <a:pPr indent="0" marL="0">
-              <a:buNone/>
-            </a:pPr>
-            <a:r>
-              <a:rPr lang="en-US" sz="1600" dirty="0">
-                <a:solidFill>
-                  <a:schemeClr val="tx1"/>
-                </a:solidFill>
-              </a:rPr>
-              <a:t>Downstream tab: run ORB keypoint and edge validation</a:t>
-            </a:r>
-            <a:endParaRPr lang="en-US" sz="1600" dirty="0"/>
-          </a:p>
-        </p:txBody>
-      </p:sp>
-      <p:sp>
-        <p:nvSpPr>
-          <p:cNvPr id="18" name="demo step 6"/>
-          <p:cNvSpPr/>
-          <p:nvPr/>
-        </p:nvSpPr>
-        <p:spPr>
-          <a:xfrm>
-            <a:off x="548640" y="5257800"/>
-            <a:ext cx="502920" cy="502920"/>
-          </a:xfrm>
-          <a:prstGeom prst="ellipse">
-            <a:avLst/>
-          </a:prstGeom>
-          <a:solidFill>
-            <a:schemeClr val="accent1"/>
-          </a:solidFill>
-          <a:ln w="12700">
-            <a:solidFill>
-              <a:schemeClr val="accent1"/>
-            </a:solidFill>
-            <a:prstDash val="solid"/>
-          </a:ln>
-        </p:spPr>
-      </p:sp>
-      <p:sp>
-        <p:nvSpPr>
-          <p:cNvPr id="19" name="Text 17"/>
-          <p:cNvSpPr txBox="1"/>
-          <p:nvPr/>
-        </p:nvSpPr>
-        <p:spPr>
-          <a:xfrm>
-            <a:off x="548640" y="5257800"/>
-            <a:ext cx="502920" cy="502920"/>
-          </a:xfrm>
-          <a:prstGeom prst="rect">
-            <a:avLst/>
-          </a:prstGeom>
-          <a:noFill/>
-          <a:ln/>
-        </p:spPr>
-        <p:txBody>
-          <a:bodyPr wrap="square" lIns="0" tIns="0" rIns="0" bIns="0" rtlCol="0" anchor="ctr"/>
-          <a:lstStyle/>
-          <a:p>
-            <a:pPr algn="ctr" indent="0" marL="0">
-              <a:buNone/>
-            </a:pPr>
-            <a:r>
-              <a:rPr lang="en-US" sz="1600" b="1" dirty="0">
-                <a:solidFill>
-                  <a:schemeClr val="bg1"/>
-                </a:solidFill>
-              </a:rPr>
-              <a:t>6</a:t>
-            </a:r>
-            <a:endParaRPr lang="en-US" sz="1600" dirty="0"/>
-          </a:p>
-        </p:txBody>
-      </p:sp>
-      <p:sp>
-        <p:nvSpPr>
-          <p:cNvPr id="20" name="Text 18"/>
-          <p:cNvSpPr txBox="1"/>
-          <p:nvPr/>
-        </p:nvSpPr>
-        <p:spPr>
-          <a:xfrm>
-            <a:off x="1280160" y="5257800"/>
-            <a:ext cx="6766560" cy="502920"/>
-          </a:xfrm>
-          <a:prstGeom prst="rect">
-            <a:avLst/>
-          </a:prstGeom>
-          <a:noFill/>
-          <a:ln/>
-        </p:spPr>
-        <p:txBody>
-          <a:bodyPr wrap="square" lIns="0" tIns="0" rIns="0" bIns="0" rtlCol="0" anchor="ctr"/>
-          <a:lstStyle/>
-          <a:p>
-            <a:pPr indent="0" marL="0">
-              <a:buNone/>
-            </a:pPr>
-            <a:r>
-              <a:rPr lang="en-US" sz="1600" dirty="0">
-                <a:solidFill>
-                  <a:schemeClr val="tx1"/>
-                </a:solidFill>
-              </a:rPr>
-              <a:t>Switch to 699_img_ (clear blue) to show the limitation</a:t>
-            </a:r>
-            <a:endParaRPr lang="en-US" sz="1600" dirty="0"/>
-          </a:p>
-        </p:txBody>
-      </p:sp>
-      <p:sp>
-        <p:nvSpPr>
-          <p:cNvPr id="21" name="demo card"/>
-          <p:cNvSpPr/>
-          <p:nvPr/>
-        </p:nvSpPr>
-        <p:spPr>
-          <a:xfrm>
-            <a:off x="8229600" y="1371600"/>
-            <a:ext cx="3413455" cy="4572000"/>
-          </a:xfrm>
-          <a:prstGeom prst="roundRect">
-            <a:avLst>
-              <a:gd name="adj" fmla="val 3215"/>
-            </a:avLst>
-          </a:prstGeom>
-          <a:solidFill>
-            <a:schemeClr val="tx2"/>
-          </a:solidFill>
-          <a:ln w="12700">
-            <a:solidFill>
-              <a:schemeClr val="tx2"/>
-            </a:solidFill>
-            <a:prstDash val="solid"/>
-          </a:ln>
-        </p:spPr>
-      </p:sp>
-      <p:sp>
-        <p:nvSpPr>
-          <p:cNvPr id="22" name="demo circle"/>
-          <p:cNvSpPr/>
-          <p:nvPr/>
-        </p:nvSpPr>
-        <p:spPr>
-          <a:xfrm>
-            <a:off x="9296248" y="1828800"/>
-            <a:ext cx="1280160" cy="1280160"/>
-          </a:xfrm>
-          <a:prstGeom prst="ellipse">
-            <a:avLst/>
-          </a:prstGeom>
-          <a:solidFill>
-            <a:schemeClr val="accent1"/>
-          </a:solidFill>
-          <a:ln w="12700">
-            <a:solidFill>
-              <a:schemeClr val="accent1"/>
-            </a:solidFill>
-            <a:prstDash val="solid"/>
-          </a:ln>
-        </p:spPr>
-      </p:sp>
-      <p:pic>
-        <p:nvPicPr>
-          <p:cNvPr id="23" name="demo glyph" descr="preencoded.png">    </p:cNvPr>
-          <p:cNvPicPr>
-            <a:picLocks noChangeAspect="1"/>
-          </p:cNvPicPr>
-          <p:nvPr/>
-        </p:nvPicPr>
-        <p:blipFill>
-          <a:blip r:embed="rId1"/>
-          <a:stretch>
-            <a:fillRect/>
-          </a:stretch>
-        </p:blipFill>
-        <p:spPr>
-          <a:xfrm>
-            <a:off x="9577883" y="2110435"/>
-            <a:ext cx="716890" cy="716890"/>
-          </a:xfrm>
-          <a:prstGeom prst="rect">
-            <a:avLst/>
-          </a:prstGeom>
-        </p:spPr>
-      </p:pic>
-      <p:sp>
-        <p:nvSpPr>
-          <p:cNvPr id="24" name="Text 21"/>
-          <p:cNvSpPr txBox="1"/>
-          <p:nvPr/>
-        </p:nvSpPr>
-        <p:spPr>
-          <a:xfrm>
-            <a:off x="8503920" y="3337560"/>
-            <a:ext cx="2864815" cy="411480"/>
-          </a:xfrm>
-          <a:prstGeom prst="rect">
-            <a:avLst/>
-          </a:prstGeom>
-          <a:noFill/>
-          <a:ln/>
-        </p:spPr>
-        <p:txBody>
-          <a:bodyPr wrap="square" lIns="0" tIns="0" rIns="0" bIns="0" rtlCol="0" anchor="t"/>
-          <a:lstStyle/>
-          <a:p>
-            <a:pPr algn="ctr" indent="0" marL="0">
-              <a:buNone/>
-            </a:pPr>
-            <a:r>
-              <a:rPr lang="en-US" sz="2000" b="1" dirty="0">
-                <a:solidFill>
-                  <a:schemeClr val="bg1"/>
-                </a:solidFill>
-              </a:rPr>
-              <a:t>Streamlit app</a:t>
-            </a:r>
-            <a:endParaRPr lang="en-US" sz="2000" dirty="0"/>
-          </a:p>
-        </p:txBody>
-      </p:sp>
-      <p:sp>
-        <p:nvSpPr>
-          <p:cNvPr id="25" name="Text 22"/>
-          <p:cNvSpPr txBox="1"/>
-          <p:nvPr/>
-        </p:nvSpPr>
-        <p:spPr>
-          <a:xfrm>
-            <a:off x="8503920" y="3840480"/>
-            <a:ext cx="2864815" cy="411480"/>
-          </a:xfrm>
-          <a:prstGeom prst="rect">
-            <a:avLst/>
-          </a:prstGeom>
-          <a:noFill/>
-          <a:ln/>
-        </p:spPr>
-        <p:txBody>
-          <a:bodyPr wrap="square" lIns="0" tIns="0" rIns="0" bIns="0" rtlCol="0" anchor="t"/>
-          <a:lstStyle/>
-          <a:p>
-            <a:pPr algn="ctr" indent="0" marL="0">
-              <a:buNone/>
-            </a:pPr>
-            <a:r>
-              <a:rPr lang="en-US" sz="1300" dirty="0">
-                <a:solidFill>
-                  <a:schemeClr val="bg2"/>
-                </a:solidFill>
-                <a:latin typeface="Courier New" pitchFamily="34" charset="0"/>
-                <a:ea typeface="Courier New" pitchFamily="34" charset="-122"/>
-                <a:cs typeface="Courier New" pitchFamily="34" charset="-120"/>
-              </a:rPr>
-              <a:t>streamlit run app/streamlit_app.py</a:t>
-            </a:r>
-            <a:endParaRPr lang="en-US" sz="1300" dirty="0"/>
-          </a:p>
-        </p:txBody>
-      </p:sp>
-      <p:sp>
-        <p:nvSpPr>
-          <p:cNvPr id="26" name="Text 23"/>
-          <p:cNvSpPr txBox="1"/>
-          <p:nvPr/>
-        </p:nvSpPr>
-        <p:spPr>
-          <a:xfrm>
-            <a:off x="8503920" y="4480560"/>
-            <a:ext cx="2864815" cy="822960"/>
-          </a:xfrm>
-          <a:prstGeom prst="rect">
-            <a:avLst/>
-          </a:prstGeom>
-          <a:noFill/>
-          <a:ln/>
-        </p:spPr>
-        <p:txBody>
-          <a:bodyPr wrap="square" lIns="0" tIns="0" rIns="0" bIns="0" rtlCol="0" anchor="t"/>
-          <a:lstStyle/>
-          <a:p>
-            <a:pPr algn="ctr" indent="0" marL="0">
-              <a:buNone/>
-            </a:pPr>
-            <a:r>
-              <a:rPr lang="en-US" sz="1400" dirty="0">
-                <a:solidFill>
-                  <a:schemeClr val="bg2"/>
-                </a:solidFill>
-              </a:rPr>
-              <a:t>Every metric is computed live on the selected image</a:t>
-            </a:r>
-            <a:endParaRPr lang="en-US" sz="1400" dirty="0"/>
-          </a:p>
-        </p:txBody>
-      </p:sp>
-      <p:sp>
-        <p:nvSpPr>
-          <p:cNvPr id="25" name="Slide Number Placeholder 0"/>
-          <p:cNvSpPr>
-            <a:spLocks noGrp="1"/>
-          </p:cNvSpPr>
-          <p:nvPr>
-            <p:ph type="sldNum" sz="quarter" idx="4294967295"/>
-          </p:nvPr>
-        </p:nvSpPr>
-        <p:spPr>
-          <a:xfrm>
-            <a:off x="11094415" y="6419088"/>
-            <a:ext cx="548640" cy="274320"/>
-          </a:xfrm>
-          <a:prstGeom prst="rect">
-            <a:avLst/>
-          </a:prstGeom>
-          <a:extLst>
-            <a:ext uri="{C572A759-6A51-4108-AA02-DFA0A04FC94B}">
-              <ma14:wrappingTextBoxFlag xmlns:ma14="http://schemas.microsoft.com/office/mac/drawingml/2011/main" val="0"/>
-            </a:ext>
-          </a:extLst>
-        </p:spPr>
-        <p:txBody>
-          <a:bodyPr/>
-          <a:lstStyle>
-            <a:lvl1pPr>
-              <a:defRPr sz="1000">
-                <a:solidFill>
-                  <a:schemeClr val="accent5"/>
-                </a:solidFill>
-              </a:defRPr>
-            </a:lvl1pPr>
-          </a:lstStyle>
-          <a:p>
-            <a:pPr algn="r"/>
-            <a:fld id="{F7021451-1387-4CA6-816F-3879F97B5CBC}" type="slidenum">
-              <a:rPr b="0" lang="en-US"/>
-              <a:t>17</a:t>
-            </a:fld>
-            <a:endParaRPr lang="en-US"/>
-          </a:p>
-        </p:txBody>
-      </p:sp>
-    </p:spTree>
-  </p:cSld>
-  <p:clrMapOvr>
-    <a:masterClrMapping/>
-  </p:clrMapOvr>
-</p:sld>
-</file>
-
-<file path=ppt/slides/slide18.xml><?xml version="1.0" encoding="utf-8"?>
-<p:sld xmlns:a="http://schemas.openxmlformats.org/drawingml/2006/main" xmlns:r="http://schemas.openxmlformats.org/officeDocument/2006/relationships" xmlns:p="http://schemas.openxmlformats.org/presentationml/2006/main">
-  <p:cSld name="Slide 18">
-    <p:spTree>
-      <p:nvGrpSpPr>
-        <p:cNvPr id="1" name=""/>
-        <p:cNvGrpSpPr/>
-        <p:nvPr/>
-      </p:nvGrpSpPr>
-      <p:grpSpPr>
-        <a:xfrm>
-          <a:off x="0" y="0"/>
-          <a:ext cx="0" cy="0"/>
-          <a:chOff x="0" y="0"/>
-          <a:chExt cx="0" cy="0"/>
-        </a:xfrm>
-      </p:grpSpPr>
-      <p:sp>
-        <p:nvSpPr>
-          <p:cNvPr id="2" name="Text 0"/>
-          <p:cNvSpPr/>
-          <p:nvPr>
-            <p:ph idx="100" type="title" hasCustomPrompt="1"/>
-          </p:nvPr>
-        </p:nvSpPr>
-        <p:spPr>
-          <a:xfrm>
-            <a:off x="548640" y="411480"/>
-            <a:ext cx="11094415" cy="822960"/>
-          </a:xfrm>
-          <a:prstGeom prst="rect">
-            <a:avLst/>
-          </a:prstGeom>
-          <a:noFill/>
-          <a:ln/>
-        </p:spPr>
-        <p:txBody>
-          <a:bodyPr wrap="square" lIns="0" tIns="0" rIns="0" bIns="0" rtlCol="0"/>
-          <a:lstStyle/>
-          <a:p>
-            <a:pPr algn="l" indent="0" marL="0">
-              <a:buNone/>
-            </a:pPr>
-            <a:r>
-              <a:rPr lang="en-US" sz="3600" b="1" dirty="0">
-                <a:solidFill>
-                  <a:schemeClr val="bg1"/>
-                </a:solidFill>
-              </a:rPr>
-              <a:t>Takeaways</a:t>
-            </a:r>
-            <a:endParaRPr lang="en-US" sz="3600" dirty="0"/>
-          </a:p>
-        </p:txBody>
-      </p:sp>
-      <p:sp>
-        <p:nvSpPr>
-          <p:cNvPr id="3" name="takeaway 1 circle"/>
-          <p:cNvSpPr/>
-          <p:nvPr/>
-        </p:nvSpPr>
-        <p:spPr>
-          <a:xfrm>
-            <a:off x="548640" y="1600200"/>
-            <a:ext cx="777240" cy="777240"/>
-          </a:xfrm>
-          <a:prstGeom prst="ellipse">
-            <a:avLst/>
-          </a:prstGeom>
-          <a:solidFill>
-            <a:schemeClr val="accent1"/>
-          </a:solidFill>
-          <a:ln w="12700">
-            <a:solidFill>
-              <a:schemeClr val="accent1"/>
-            </a:solidFill>
-            <a:prstDash val="solid"/>
-          </a:ln>
-        </p:spPr>
-      </p:sp>
-      <p:pic>
-        <p:nvPicPr>
-          <p:cNvPr id="4" name="takeaway 1 glyph" descr="preencoded.png">    </p:cNvPr>
-          <p:cNvPicPr>
-            <a:picLocks noChangeAspect="1"/>
-          </p:cNvPicPr>
-          <p:nvPr/>
-        </p:nvPicPr>
-        <p:blipFill>
-          <a:blip r:embed="rId1"/>
-          <a:stretch>
-            <a:fillRect/>
-          </a:stretch>
-        </p:blipFill>
-        <p:spPr>
-          <a:xfrm>
-            <a:off x="719633" y="1771193"/>
-            <a:ext cx="435254" cy="435254"/>
-          </a:xfrm>
-          <a:prstGeom prst="rect">
-            <a:avLst/>
-          </a:prstGeom>
-        </p:spPr>
-      </p:pic>
-      <p:sp>
-        <p:nvSpPr>
-          <p:cNvPr id="5" name="Text 2"/>
-          <p:cNvSpPr txBox="1"/>
-          <p:nvPr/>
-        </p:nvSpPr>
-        <p:spPr>
-          <a:xfrm>
-            <a:off x="1645920" y="1600200"/>
-            <a:ext cx="9997135" cy="777240"/>
-          </a:xfrm>
-          <a:prstGeom prst="rect">
-            <a:avLst/>
-          </a:prstGeom>
-          <a:noFill/>
-          <a:ln/>
-        </p:spPr>
-        <p:txBody>
-          <a:bodyPr wrap="square" lIns="0" tIns="0" rIns="0" bIns="0" rtlCol="0" anchor="ctr"/>
-          <a:lstStyle/>
-          <a:p>
-            <a:pPr indent="0" marL="0">
-              <a:buNone/>
-            </a:pPr>
-            <a:r>
-              <a:rPr lang="en-US" sz="1800" dirty="0">
-                <a:solidFill>
-                  <a:schemeClr val="bg1"/>
-                </a:solidFill>
-              </a:rPr>
-              <a:t>Red-channel compensation before white balance is the largest single gain: +0.52 dB PSNR on held-out images.</a:t>
-            </a:r>
-            <a:endParaRPr lang="en-US" sz="1800" dirty="0"/>
-          </a:p>
-        </p:txBody>
-      </p:sp>
-      <p:sp>
-        <p:nvSpPr>
-          <p:cNvPr id="6" name="takeaway 2 circle"/>
-          <p:cNvSpPr/>
-          <p:nvPr/>
-        </p:nvSpPr>
-        <p:spPr>
-          <a:xfrm>
-            <a:off x="548640" y="2834640"/>
-            <a:ext cx="777240" cy="777240"/>
-          </a:xfrm>
-          <a:prstGeom prst="ellipse">
-            <a:avLst/>
-          </a:prstGeom>
-          <a:solidFill>
-            <a:schemeClr val="accent1"/>
-          </a:solidFill>
-          <a:ln w="12700">
-            <a:solidFill>
-              <a:schemeClr val="accent1"/>
-            </a:solidFill>
-            <a:prstDash val="solid"/>
-          </a:ln>
-        </p:spPr>
-      </p:sp>
-      <p:pic>
-        <p:nvPicPr>
-          <p:cNvPr id="7" name="takeaway 2 glyph" descr="preencoded.png">    </p:cNvPr>
-          <p:cNvPicPr>
-            <a:picLocks noChangeAspect="1"/>
-          </p:cNvPicPr>
-          <p:nvPr/>
-        </p:nvPicPr>
-        <p:blipFill>
-          <a:blip r:embed="rId2"/>
-          <a:stretch>
-            <a:fillRect/>
-          </a:stretch>
-        </p:blipFill>
-        <p:spPr>
-          <a:xfrm>
-            <a:off x="719633" y="3005633"/>
-            <a:ext cx="435254" cy="435254"/>
-          </a:xfrm>
-          <a:prstGeom prst="rect">
-            <a:avLst/>
-          </a:prstGeom>
-        </p:spPr>
-      </p:pic>
-      <p:sp>
-        <p:nvSpPr>
-          <p:cNvPr id="8" name="Text 4"/>
-          <p:cNvSpPr txBox="1"/>
-          <p:nvPr/>
-        </p:nvSpPr>
-        <p:spPr>
-          <a:xfrm>
-            <a:off x="1645920" y="2834640"/>
-            <a:ext cx="9997135" cy="777240"/>
-          </a:xfrm>
-          <a:prstGeom prst="rect">
-            <a:avLst/>
-          </a:prstGeom>
-          <a:noFill/>
-          <a:ln/>
-        </p:spPr>
-        <p:txBody>
-          <a:bodyPr wrap="square" lIns="0" tIns="0" rIns="0" bIns="0" rtlCol="0" anchor="ctr"/>
-          <a:lstStyle/>
-          <a:p>
-            <a:pPr indent="0" marL="0">
-              <a:buNone/>
-            </a:pPr>
-            <a:r>
-              <a:rPr lang="en-US" sz="1800" dirty="0">
-                <a:solidFill>
-                  <a:schemeClr val="bg1"/>
-                </a:solidFill>
-              </a:rPr>
-              <a:t>The full hybrid has the highest SSIM of all compared methods (0.871), matches CLAHE-only on PSNR, and clearly beats HE and UDCP on 622 held-out images.</a:t>
-            </a:r>
-            <a:endParaRPr lang="en-US" sz="1800" dirty="0"/>
-          </a:p>
-        </p:txBody>
-      </p:sp>
-      <p:sp>
-        <p:nvSpPr>
-          <p:cNvPr id="9" name="takeaway 3 circle"/>
-          <p:cNvSpPr/>
-          <p:nvPr/>
-        </p:nvSpPr>
-        <p:spPr>
-          <a:xfrm>
-            <a:off x="548640" y="4069080"/>
-            <a:ext cx="777240" cy="777240"/>
-          </a:xfrm>
-          <a:prstGeom prst="ellipse">
-            <a:avLst/>
-          </a:prstGeom>
-          <a:solidFill>
-            <a:schemeClr val="accent1"/>
-          </a:solidFill>
-          <a:ln w="12700">
-            <a:solidFill>
-              <a:schemeClr val="accent1"/>
-            </a:solidFill>
-            <a:prstDash val="solid"/>
-          </a:ln>
-        </p:spPr>
-      </p:sp>
       <p:pic>
         <p:nvPicPr>
           <p:cNvPr id="10" name="takeaway 3 glyph" descr="preencoded.png">    </p:cNvPr>
@@ -10733,7 +10037,7 @@
                   <a:schemeClr val="bg1"/>
                 </a:solidFill>
               </a:rPr>
-              <a:t>Optimising no-reference scores hurts fidelity: calibrate against references and report results on held-out data.</a:t>
+              <a:t>A calibrated per-image fusion weight adds +0.16 dB; every parameter was tuned on 268 images and every claim tested on the other 622.</a:t>
             </a:r>
             <a:endParaRPr lang="en-US" sz="1800" dirty="0"/>
           </a:p>
@@ -12033,42 +11337,6 @@
                 </a:solidFill>
               </a:rPr>
               <a:t>Checks whether restoration helps computer vision, not just appearance: ORB keypoints, matches and edge density.</a:t>
-            </a:r>
-            <a:endParaRPr lang="en-US" sz="1400" dirty="0"/>
-          </a:p>
-        </p:txBody>
-      </p:sp>
-      <p:sp>
-        <p:nvSpPr>
-          <p:cNvPr id="22" name="finding teaser"/>
-          <p:cNvSpPr txBox="1"/>
-          <p:nvPr/>
-        </p:nvSpPr>
-        <p:spPr>
-          <a:xfrm>
-            <a:off x="548640" y="5852160"/>
-            <a:ext cx="11094415" cy="365760"/>
-          </a:xfrm>
-          <a:prstGeom prst="rect">
-            <a:avLst/>
-          </a:prstGeom>
-          <a:noFill/>
-          <a:ln/>
-        </p:spPr>
-        <p:txBody>
-          <a:bodyPr wrap="square" lIns="0" tIns="0" rIns="0" bIns="0" rtlCol="0" anchor="t"/>
-          <a:lstStyle/>
-          <a:p>
-            <a:pPr indent="0" marL="0">
-              <a:buNone/>
-            </a:pPr>
-            <a:r>
-              <a:rPr lang="en-US" sz="1400" i="1" dirty="0">
-                <a:solidFill>
-                  <a:schemeClr val="accent5"/>
-                </a:solidFill>
-              </a:rPr>
-              <a:t>Plus a finding: popular no-reference quality scores (UCIQE, UIQM) mislead when used to tune a restoration pipeline.</a:t>
             </a:r>
             <a:endParaRPr lang="en-US" sz="1400" dirty="0"/>
           </a:p>
